--- a/u02d_exceptions/notes/a_Java Exceptions.pptx
+++ b/u02d_exceptions/notes/a_Java Exceptions.pptx
@@ -7,10 +7,10 @@
     <p:sldMasterId id="2147483794" r:id="rId3"/>
   </p:sldMasterIdLst>
   <p:notesMasterIdLst>
-    <p:notesMasterId r:id="rId48"/>
+    <p:notesMasterId r:id="rId51"/>
   </p:notesMasterIdLst>
   <p:handoutMasterIdLst>
-    <p:handoutMasterId r:id="rId49"/>
+    <p:handoutMasterId r:id="rId52"/>
   </p:handoutMasterIdLst>
   <p:sldIdLst>
     <p:sldId id="256" r:id="rId4"/>
@@ -29,20 +29,20 @@
     <p:sldId id="660" r:id="rId17"/>
     <p:sldId id="413" r:id="rId18"/>
     <p:sldId id="277" r:id="rId19"/>
-    <p:sldId id="607" r:id="rId20"/>
-    <p:sldId id="670" r:id="rId21"/>
-    <p:sldId id="608" r:id="rId22"/>
-    <p:sldId id="432" r:id="rId23"/>
-    <p:sldId id="422" r:id="rId24"/>
-    <p:sldId id="419" r:id="rId25"/>
-    <p:sldId id="420" r:id="rId26"/>
-    <p:sldId id="417" r:id="rId27"/>
-    <p:sldId id="418" r:id="rId28"/>
-    <p:sldId id="421" r:id="rId29"/>
-    <p:sldId id="667" r:id="rId30"/>
-    <p:sldId id="668" r:id="rId31"/>
-    <p:sldId id="669" r:id="rId32"/>
-    <p:sldId id="281" r:id="rId33"/>
+    <p:sldId id="670" r:id="rId20"/>
+    <p:sldId id="608" r:id="rId21"/>
+    <p:sldId id="432" r:id="rId22"/>
+    <p:sldId id="422" r:id="rId23"/>
+    <p:sldId id="419" r:id="rId24"/>
+    <p:sldId id="420" r:id="rId25"/>
+    <p:sldId id="417" r:id="rId26"/>
+    <p:sldId id="418" r:id="rId27"/>
+    <p:sldId id="421" r:id="rId28"/>
+    <p:sldId id="667" r:id="rId29"/>
+    <p:sldId id="668" r:id="rId30"/>
+    <p:sldId id="669" r:id="rId31"/>
+    <p:sldId id="281" r:id="rId32"/>
+    <p:sldId id="675" r:id="rId33"/>
     <p:sldId id="424" r:id="rId34"/>
     <p:sldId id="631" r:id="rId35"/>
     <p:sldId id="426" r:id="rId36"/>
@@ -52,11 +52,14 @@
     <p:sldId id="628" r:id="rId40"/>
     <p:sldId id="629" r:id="rId41"/>
     <p:sldId id="414" r:id="rId42"/>
-    <p:sldId id="430" r:id="rId43"/>
-    <p:sldId id="431" r:id="rId44"/>
-    <p:sldId id="265" r:id="rId45"/>
-    <p:sldId id="266" r:id="rId46"/>
-    <p:sldId id="263" r:id="rId47"/>
+    <p:sldId id="671" r:id="rId43"/>
+    <p:sldId id="430" r:id="rId44"/>
+    <p:sldId id="431" r:id="rId45"/>
+    <p:sldId id="265" r:id="rId46"/>
+    <p:sldId id="672" r:id="rId47"/>
+    <p:sldId id="673" r:id="rId48"/>
+    <p:sldId id="674" r:id="rId49"/>
+    <p:sldId id="263" r:id="rId50"/>
   </p:sldIdLst>
   <p:sldSz cx="9144000" cy="6858000" type="screen4x3"/>
   <p:notesSz cx="6858000" cy="9144000"/>
@@ -3310,17 +3313,14 @@
           <a:bodyPr/>
           <a:lstStyle/>
           <a:p>
-            <a:r>
-              <a:rPr lang="en-US" altLang="en-US" dirty="0"/>
-              <a:t>Runtime exceptions generally shouldn’t be caught, because they represent are programming error and should be fixed when you’re writing the code.</a:t>
-            </a:r>
+            <a:endParaRPr lang="en-US" altLang="en-US" dirty="0"/>
           </a:p>
         </p:txBody>
       </p:sp>
     </p:spTree>
     <p:extLst>
       <p:ext uri="{BB962C8B-B14F-4D97-AF65-F5344CB8AC3E}">
-        <p14:creationId xmlns:p14="http://schemas.microsoft.com/office/powerpoint/2010/main" val="2702924710"/>
+        <p14:creationId xmlns:p14="http://schemas.microsoft.com/office/powerpoint/2010/main" val="4009582166"/>
       </p:ext>
     </p:extLst>
   </p:cSld>
@@ -3599,7 +3599,738 @@
     </p:spTree>
     <p:extLst>
       <p:ext uri="{BB962C8B-B14F-4D97-AF65-F5344CB8AC3E}">
+        <p14:creationId xmlns:p14="http://schemas.microsoft.com/office/powerpoint/2010/main" val="2702924710"/>
+      </p:ext>
+    </p:extLst>
+  </p:cSld>
+  <p:clrMapOvr>
+    <a:masterClrMapping/>
+  </p:clrMapOvr>
+</p:notes>
+</file>
+
+<file path=ppt/notesSlides/notesSlide31.xml><?xml version="1.0" encoding="utf-8"?>
+<p:notes xmlns:a="http://schemas.openxmlformats.org/drawingml/2006/main" xmlns:r="http://schemas.openxmlformats.org/officeDocument/2006/relationships" xmlns:p="http://schemas.openxmlformats.org/presentationml/2006/main">
+  <p:cSld>
+    <p:spTree>
+      <p:nvGrpSpPr>
+        <p:cNvPr id="1" name=""/>
+        <p:cNvGrpSpPr/>
+        <p:nvPr/>
+      </p:nvGrpSpPr>
+      <p:grpSpPr>
+        <a:xfrm>
+          <a:off x="0" y="0"/>
+          <a:ext cx="0" cy="0"/>
+          <a:chOff x="0" y="0"/>
+          <a:chExt cx="0" cy="0"/>
+        </a:xfrm>
+      </p:grpSpPr>
+      <p:sp>
+        <p:nvSpPr>
+          <p:cNvPr id="44034" name="Rectangle 2">
+            <a:extLst>
+              <a:ext uri="{FF2B5EF4-FFF2-40B4-BE49-F238E27FC236}">
+                <a16:creationId xmlns:a16="http://schemas.microsoft.com/office/drawing/2014/main" id="{20A43CC5-918D-47E0-BEE4-E8CA17808AD9}"/>
+              </a:ext>
+            </a:extLst>
+          </p:cNvPr>
+          <p:cNvSpPr>
+            <a:spLocks noGrp="1" noRot="1" noChangeAspect="1" noChangeArrowheads="1" noTextEdit="1"/>
+          </p:cNvSpPr>
+          <p:nvPr>
+            <p:ph type="sldImg"/>
+          </p:nvPr>
+        </p:nvSpPr>
+        <p:spPr bwMode="auto">
+          <a:xfrm>
+            <a:off x="1143000" y="685800"/>
+            <a:ext cx="4572000" cy="3429000"/>
+          </a:xfrm>
+          <a:prstGeom prst="rect">
+            <a:avLst/>
+          </a:prstGeom>
+          <a:noFill/>
+          <a:ln>
+            <a:solidFill>
+              <a:srgbClr val="000000"/>
+            </a:solidFill>
+            <a:miter lim="800000"/>
+            <a:headEnd/>
+            <a:tailEnd/>
+          </a:ln>
+          <a:extLst>
+            <a:ext uri="{909E8E84-426E-40DD-AFC4-6F175D3DCCD1}">
+              <a14:hiddenFill xmlns:a14="http://schemas.microsoft.com/office/drawing/2010/main">
+                <a:solidFill>
+                  <a:srgbClr val="FFFFFF"/>
+                </a:solidFill>
+              </a14:hiddenFill>
+            </a:ext>
+          </a:extLst>
+        </p:spPr>
+      </p:sp>
+      <p:sp>
+        <p:nvSpPr>
+          <p:cNvPr id="44035" name="Rectangle 3">
+            <a:extLst>
+              <a:ext uri="{FF2B5EF4-FFF2-40B4-BE49-F238E27FC236}">
+                <a16:creationId xmlns:a16="http://schemas.microsoft.com/office/drawing/2014/main" id="{B5955AB8-F3B6-4E99-812F-D7B97F625725}"/>
+              </a:ext>
+            </a:extLst>
+          </p:cNvPr>
+          <p:cNvSpPr>
+            <a:spLocks noGrp="1" noChangeArrowheads="1"/>
+          </p:cNvSpPr>
+          <p:nvPr>
+            <p:ph type="body" idx="1"/>
+          </p:nvPr>
+        </p:nvSpPr>
+        <p:spPr bwMode="auto">
+          <a:xfrm>
+            <a:off x="685800" y="4343400"/>
+            <a:ext cx="5486400" cy="4114800"/>
+          </a:xfrm>
+          <a:prstGeom prst="rect">
+            <a:avLst/>
+          </a:prstGeom>
+          <a:noFill/>
+          <a:ln/>
+          <a:extLst>
+            <a:ext uri="{909E8E84-426E-40DD-AFC4-6F175D3DCCD1}">
+              <a14:hiddenFill xmlns:a14="http://schemas.microsoft.com/office/drawing/2010/main">
+                <a:solidFill>
+                  <a:srgbClr val="FFFFFF"/>
+                </a:solidFill>
+              </a14:hiddenFill>
+            </a:ext>
+            <a:ext uri="{91240B29-F687-4F45-9708-019B960494DF}">
+              <a14:hiddenLine xmlns:a14="http://schemas.microsoft.com/office/drawing/2010/main" w="9525">
+                <a:solidFill>
+                  <a:srgbClr val="000000"/>
+                </a:solidFill>
+                <a:miter lim="800000"/>
+                <a:headEnd/>
+                <a:tailEnd/>
+              </a14:hiddenLine>
+            </a:ext>
+          </a:extLst>
+        </p:spPr>
+        <p:txBody>
+          <a:bodyPr/>
+          <a:lstStyle/>
+          <a:p>
+            <a:r>
+              <a:rPr lang="en-US" altLang="en-US" dirty="0"/>
+              <a:t>Runtime exceptions generally shouldn’t be caught, because they represent are programming error and should be fixed when you’re writing the code.</a:t>
+            </a:r>
+          </a:p>
+        </p:txBody>
+      </p:sp>
+    </p:spTree>
+    <p:extLst>
+      <p:ext uri="{BB962C8B-B14F-4D97-AF65-F5344CB8AC3E}">
         <p14:creationId xmlns:p14="http://schemas.microsoft.com/office/powerpoint/2010/main" val="3227783959"/>
+      </p:ext>
+    </p:extLst>
+  </p:cSld>
+  <p:clrMapOvr>
+    <a:masterClrMapping/>
+  </p:clrMapOvr>
+</p:notes>
+</file>
+
+<file path=ppt/notesSlides/notesSlide32.xml><?xml version="1.0" encoding="utf-8"?>
+<p:notes xmlns:a="http://schemas.openxmlformats.org/drawingml/2006/main" xmlns:r="http://schemas.openxmlformats.org/officeDocument/2006/relationships" xmlns:p="http://schemas.openxmlformats.org/presentationml/2006/main">
+  <p:cSld>
+    <p:spTree>
+      <p:nvGrpSpPr>
+        <p:cNvPr id="1" name=""/>
+        <p:cNvGrpSpPr/>
+        <p:nvPr/>
+      </p:nvGrpSpPr>
+      <p:grpSpPr>
+        <a:xfrm>
+          <a:off x="0" y="0"/>
+          <a:ext cx="0" cy="0"/>
+          <a:chOff x="0" y="0"/>
+          <a:chExt cx="0" cy="0"/>
+        </a:xfrm>
+      </p:grpSpPr>
+      <p:sp>
+        <p:nvSpPr>
+          <p:cNvPr id="2" name="Slide Image Placeholder 1"/>
+          <p:cNvSpPr>
+            <a:spLocks noGrp="1" noRot="1" noChangeAspect="1"/>
+          </p:cNvSpPr>
+          <p:nvPr>
+            <p:ph type="sldImg"/>
+          </p:nvPr>
+        </p:nvSpPr>
+        <p:spPr>
+          <a:xfrm>
+            <a:off x="1371600" y="1143000"/>
+            <a:ext cx="4114800" cy="3086100"/>
+          </a:xfrm>
+          <a:prstGeom prst="rect">
+            <a:avLst/>
+          </a:prstGeom>
+          <a:noFill/>
+          <a:ln w="12700">
+            <a:solidFill>
+              <a:prstClr val="black"/>
+            </a:solidFill>
+          </a:ln>
+        </p:spPr>
+      </p:sp>
+      <p:sp>
+        <p:nvSpPr>
+          <p:cNvPr id="3" name="Notes Placeholder 2"/>
+          <p:cNvSpPr>
+            <a:spLocks noGrp="1"/>
+          </p:cNvSpPr>
+          <p:nvPr>
+            <p:ph type="body" idx="1"/>
+          </p:nvPr>
+        </p:nvSpPr>
+        <p:spPr>
+          <a:xfrm>
+            <a:off x="685800" y="4400550"/>
+            <a:ext cx="5486400" cy="3600450"/>
+          </a:xfrm>
+          <a:prstGeom prst="rect">
+            <a:avLst/>
+          </a:prstGeom>
+        </p:spPr>
+        <p:txBody>
+          <a:bodyPr/>
+          <a:lstStyle/>
+          <a:p>
+            <a:pPr marL="0" indent="0" algn="l" eaLnBrk="1" hangingPunct="1">
+              <a:lnSpc>
+                <a:spcPct val="90000"/>
+              </a:lnSpc>
+              <a:buFont typeface="Wingdings" panose="05000000000000000000" pitchFamily="2" charset="2"/>
+              <a:buNone/>
+            </a:pPr>
+            <a:r>
+              <a:rPr lang="en-US" altLang="en-US" dirty="0">
+                <a:solidFill>
+                  <a:srgbClr val="006666"/>
+                </a:solidFill>
+                <a:latin typeface="Bahnschrift" panose="020B0502040204020203" pitchFamily="34" charset="0"/>
+                <a:cs typeface="Courier New" panose="02070309020205020404" pitchFamily="49" charset="0"/>
+              </a:rPr>
+              <a:t>Tempting since an empty catch block won’t raise complaints from compiler.</a:t>
+            </a:r>
+          </a:p>
+          <a:p>
+            <a:pPr marL="0" indent="0" algn="l" eaLnBrk="1" hangingPunct="1">
+              <a:lnSpc>
+                <a:spcPct val="90000"/>
+              </a:lnSpc>
+              <a:buFont typeface="Wingdings" panose="05000000000000000000" pitchFamily="2" charset="2"/>
+              <a:buNone/>
+            </a:pPr>
+            <a:r>
+              <a:rPr lang="en-US" altLang="en-US" dirty="0">
+                <a:solidFill>
+                  <a:srgbClr val="006666"/>
+                </a:solidFill>
+                <a:latin typeface="Bahnschrift" panose="020B0502040204020203" pitchFamily="34" charset="0"/>
+                <a:cs typeface="Courier New" panose="02070309020205020404" pitchFamily="49" charset="0"/>
+              </a:rPr>
+              <a:t>Don’t do this!</a:t>
+            </a:r>
+          </a:p>
+          <a:p>
+            <a:endParaRPr lang="en-US" altLang="en-US" dirty="0">
+              <a:latin typeface="Bahnschrift" panose="020B0502040204020203" pitchFamily="34" charset="0"/>
+            </a:endParaRPr>
+          </a:p>
+        </p:txBody>
+      </p:sp>
+    </p:spTree>
+    <p:extLst>
+      <p:ext uri="{BB962C8B-B14F-4D97-AF65-F5344CB8AC3E}">
+        <p14:creationId xmlns:p14="http://schemas.microsoft.com/office/powerpoint/2010/main" val="3515934567"/>
+      </p:ext>
+    </p:extLst>
+  </p:cSld>
+  <p:clrMapOvr>
+    <a:masterClrMapping/>
+  </p:clrMapOvr>
+</p:notes>
+</file>
+
+<file path=ppt/notesSlides/notesSlide33.xml><?xml version="1.0" encoding="utf-8"?>
+<p:notes xmlns:a="http://schemas.openxmlformats.org/drawingml/2006/main" xmlns:r="http://schemas.openxmlformats.org/officeDocument/2006/relationships" xmlns:p="http://schemas.openxmlformats.org/presentationml/2006/main">
+  <p:cSld>
+    <p:spTree>
+      <p:nvGrpSpPr>
+        <p:cNvPr id="1" name=""/>
+        <p:cNvGrpSpPr/>
+        <p:nvPr/>
+      </p:nvGrpSpPr>
+      <p:grpSpPr>
+        <a:xfrm>
+          <a:off x="0" y="0"/>
+          <a:ext cx="0" cy="0"/>
+          <a:chOff x="0" y="0"/>
+          <a:chExt cx="0" cy="0"/>
+        </a:xfrm>
+      </p:grpSpPr>
+      <p:sp>
+        <p:nvSpPr>
+          <p:cNvPr id="2" name="Slide Image Placeholder 1"/>
+          <p:cNvSpPr>
+            <a:spLocks noGrp="1" noRot="1" noChangeAspect="1"/>
+          </p:cNvSpPr>
+          <p:nvPr>
+            <p:ph type="sldImg"/>
+          </p:nvPr>
+        </p:nvSpPr>
+        <p:spPr>
+          <a:xfrm>
+            <a:off x="1371600" y="1143000"/>
+            <a:ext cx="4114800" cy="3086100"/>
+          </a:xfrm>
+          <a:prstGeom prst="rect">
+            <a:avLst/>
+          </a:prstGeom>
+          <a:noFill/>
+          <a:ln w="12700">
+            <a:solidFill>
+              <a:prstClr val="black"/>
+            </a:solidFill>
+          </a:ln>
+        </p:spPr>
+      </p:sp>
+      <p:sp>
+        <p:nvSpPr>
+          <p:cNvPr id="3" name="Notes Placeholder 2"/>
+          <p:cNvSpPr>
+            <a:spLocks noGrp="1"/>
+          </p:cNvSpPr>
+          <p:nvPr>
+            <p:ph type="body" idx="1"/>
+          </p:nvPr>
+        </p:nvSpPr>
+        <p:spPr>
+          <a:xfrm>
+            <a:off x="685800" y="4400550"/>
+            <a:ext cx="5486400" cy="3600450"/>
+          </a:xfrm>
+          <a:prstGeom prst="rect">
+            <a:avLst/>
+          </a:prstGeom>
+        </p:spPr>
+        <p:txBody>
+          <a:bodyPr/>
+          <a:lstStyle/>
+          <a:p>
+            <a:pPr marL="0" indent="0" algn="l" eaLnBrk="1" hangingPunct="1">
+              <a:lnSpc>
+                <a:spcPct val="90000"/>
+              </a:lnSpc>
+              <a:buFont typeface="Wingdings" panose="05000000000000000000" pitchFamily="2" charset="2"/>
+              <a:buNone/>
+            </a:pPr>
+            <a:r>
+              <a:rPr lang="en-US" altLang="en-US" dirty="0">
+                <a:solidFill>
+                  <a:srgbClr val="006666"/>
+                </a:solidFill>
+                <a:latin typeface="Bahnschrift" panose="020B0502040204020203" pitchFamily="34" charset="0"/>
+                <a:cs typeface="Courier New" panose="02070309020205020404" pitchFamily="49" charset="0"/>
+              </a:rPr>
+              <a:t>Don’t do this!</a:t>
+            </a:r>
+          </a:p>
+          <a:p>
+            <a:endParaRPr lang="en-US" altLang="en-US" dirty="0">
+              <a:latin typeface="Bahnschrift" panose="020B0502040204020203" pitchFamily="34" charset="0"/>
+            </a:endParaRPr>
+          </a:p>
+        </p:txBody>
+      </p:sp>
+    </p:spTree>
+    <p:extLst>
+      <p:ext uri="{BB962C8B-B14F-4D97-AF65-F5344CB8AC3E}">
+        <p14:creationId xmlns:p14="http://schemas.microsoft.com/office/powerpoint/2010/main" val="4275804108"/>
+      </p:ext>
+    </p:extLst>
+  </p:cSld>
+  <p:clrMapOvr>
+    <a:masterClrMapping/>
+  </p:clrMapOvr>
+</p:notes>
+</file>
+
+<file path=ppt/notesSlides/notesSlide34.xml><?xml version="1.0" encoding="utf-8"?>
+<p:notes xmlns:a="http://schemas.openxmlformats.org/drawingml/2006/main" xmlns:r="http://schemas.openxmlformats.org/officeDocument/2006/relationships" xmlns:p="http://schemas.openxmlformats.org/presentationml/2006/main">
+  <p:cSld>
+    <p:spTree>
+      <p:nvGrpSpPr>
+        <p:cNvPr id="1" name=""/>
+        <p:cNvGrpSpPr/>
+        <p:nvPr/>
+      </p:nvGrpSpPr>
+      <p:grpSpPr>
+        <a:xfrm>
+          <a:off x="0" y="0"/>
+          <a:ext cx="0" cy="0"/>
+          <a:chOff x="0" y="0"/>
+          <a:chExt cx="0" cy="0"/>
+        </a:xfrm>
+      </p:grpSpPr>
+      <p:sp>
+        <p:nvSpPr>
+          <p:cNvPr id="2" name="Slide Image Placeholder 1"/>
+          <p:cNvSpPr>
+            <a:spLocks noGrp="1" noRot="1" noChangeAspect="1"/>
+          </p:cNvSpPr>
+          <p:nvPr>
+            <p:ph type="sldImg"/>
+          </p:nvPr>
+        </p:nvSpPr>
+        <p:spPr>
+          <a:xfrm>
+            <a:off x="1371600" y="1143000"/>
+            <a:ext cx="4114800" cy="3086100"/>
+          </a:xfrm>
+          <a:prstGeom prst="rect">
+            <a:avLst/>
+          </a:prstGeom>
+          <a:noFill/>
+          <a:ln w="12700">
+            <a:solidFill>
+              <a:prstClr val="black"/>
+            </a:solidFill>
+          </a:ln>
+        </p:spPr>
+      </p:sp>
+      <p:sp>
+        <p:nvSpPr>
+          <p:cNvPr id="3" name="Notes Placeholder 2"/>
+          <p:cNvSpPr>
+            <a:spLocks noGrp="1"/>
+          </p:cNvSpPr>
+          <p:nvPr>
+            <p:ph type="body" idx="1"/>
+          </p:nvPr>
+        </p:nvSpPr>
+        <p:spPr>
+          <a:xfrm>
+            <a:off x="685800" y="4400550"/>
+            <a:ext cx="5486400" cy="3600450"/>
+          </a:xfrm>
+          <a:prstGeom prst="rect">
+            <a:avLst/>
+          </a:prstGeom>
+        </p:spPr>
+        <p:txBody>
+          <a:bodyPr/>
+          <a:lstStyle/>
+          <a:p>
+            <a:pPr marL="0" indent="0" algn="l" eaLnBrk="1" hangingPunct="1">
+              <a:lnSpc>
+                <a:spcPct val="90000"/>
+              </a:lnSpc>
+              <a:buFont typeface="Wingdings" panose="05000000000000000000" pitchFamily="2" charset="2"/>
+              <a:buNone/>
+            </a:pPr>
+            <a:r>
+              <a:rPr lang="en-US" altLang="en-US" dirty="0">
+                <a:solidFill>
+                  <a:srgbClr val="006666"/>
+                </a:solidFill>
+                <a:latin typeface="Bahnschrift" panose="020B0502040204020203" pitchFamily="34" charset="0"/>
+                <a:cs typeface="Courier New" panose="02070309020205020404" pitchFamily="49" charset="0"/>
+              </a:rPr>
+              <a:t>Don’t do this!</a:t>
+            </a:r>
+          </a:p>
+          <a:p>
+            <a:endParaRPr lang="en-US" altLang="en-US" dirty="0">
+              <a:latin typeface="Bahnschrift" panose="020B0502040204020203" pitchFamily="34" charset="0"/>
+            </a:endParaRPr>
+          </a:p>
+        </p:txBody>
+      </p:sp>
+    </p:spTree>
+    <p:extLst>
+      <p:ext uri="{BB962C8B-B14F-4D97-AF65-F5344CB8AC3E}">
+        <p14:creationId xmlns:p14="http://schemas.microsoft.com/office/powerpoint/2010/main" val="3937785436"/>
+      </p:ext>
+    </p:extLst>
+  </p:cSld>
+  <p:clrMapOvr>
+    <a:masterClrMapping/>
+  </p:clrMapOvr>
+</p:notes>
+</file>
+
+<file path=ppt/notesSlides/notesSlide35.xml><?xml version="1.0" encoding="utf-8"?>
+<p:notes xmlns:a="http://schemas.openxmlformats.org/drawingml/2006/main" xmlns:r="http://schemas.openxmlformats.org/officeDocument/2006/relationships" xmlns:p="http://schemas.openxmlformats.org/presentationml/2006/main">
+  <p:cSld>
+    <p:spTree>
+      <p:nvGrpSpPr>
+        <p:cNvPr id="1" name=""/>
+        <p:cNvGrpSpPr/>
+        <p:nvPr/>
+      </p:nvGrpSpPr>
+      <p:grpSpPr>
+        <a:xfrm>
+          <a:off x="0" y="0"/>
+          <a:ext cx="0" cy="0"/>
+          <a:chOff x="0" y="0"/>
+          <a:chExt cx="0" cy="0"/>
+        </a:xfrm>
+      </p:grpSpPr>
+      <p:sp>
+        <p:nvSpPr>
+          <p:cNvPr id="2" name="Slide Image Placeholder 1"/>
+          <p:cNvSpPr>
+            <a:spLocks noGrp="1" noRot="1" noChangeAspect="1"/>
+          </p:cNvSpPr>
+          <p:nvPr>
+            <p:ph type="sldImg"/>
+          </p:nvPr>
+        </p:nvSpPr>
+        <p:spPr>
+          <a:xfrm>
+            <a:off x="1371600" y="1143000"/>
+            <a:ext cx="4114800" cy="3086100"/>
+          </a:xfrm>
+          <a:prstGeom prst="rect">
+            <a:avLst/>
+          </a:prstGeom>
+          <a:noFill/>
+          <a:ln w="12700">
+            <a:solidFill>
+              <a:prstClr val="black"/>
+            </a:solidFill>
+          </a:ln>
+        </p:spPr>
+      </p:sp>
+      <p:sp>
+        <p:nvSpPr>
+          <p:cNvPr id="3" name="Notes Placeholder 2"/>
+          <p:cNvSpPr>
+            <a:spLocks noGrp="1"/>
+          </p:cNvSpPr>
+          <p:nvPr>
+            <p:ph type="body" idx="1"/>
+          </p:nvPr>
+        </p:nvSpPr>
+        <p:spPr>
+          <a:xfrm>
+            <a:off x="685800" y="4400550"/>
+            <a:ext cx="5486400" cy="3600450"/>
+          </a:xfrm>
+          <a:prstGeom prst="rect">
+            <a:avLst/>
+          </a:prstGeom>
+        </p:spPr>
+        <p:txBody>
+          <a:bodyPr/>
+          <a:lstStyle/>
+          <a:p>
+            <a:pPr algn="l"/>
+            <a:endParaRPr lang="en-US" sz="1800" b="0" i="0" u="none" strike="noStrike" baseline="0" dirty="0">
+              <a:solidFill>
+                <a:srgbClr val="000000"/>
+              </a:solidFill>
+              <a:latin typeface="Arial" panose="020B0604020202020204" pitchFamily="34" charset="0"/>
+            </a:endParaRPr>
+          </a:p>
+          <a:p>
+            <a:endParaRPr lang="en-US" sz="1800" b="0" i="0" u="none" strike="noStrike" baseline="0" dirty="0">
+              <a:latin typeface="Arial" panose="020B0604020202020204" pitchFamily="34" charset="0"/>
+            </a:endParaRPr>
+          </a:p>
+          <a:p>
+            <a:endParaRPr lang="en-US" sz="1800" b="0" i="0" u="none" strike="noStrike" baseline="0" dirty="0">
+              <a:latin typeface="Arial" panose="020B0604020202020204" pitchFamily="34" charset="0"/>
+            </a:endParaRPr>
+          </a:p>
+          <a:p>
+            <a:endParaRPr lang="en-US" sz="1800" b="0" i="0" u="none" strike="noStrike" baseline="0" dirty="0">
+              <a:latin typeface="Arial" panose="020B0604020202020204" pitchFamily="34" charset="0"/>
+            </a:endParaRPr>
+          </a:p>
+          <a:p>
+            <a:endParaRPr lang="en-US" sz="1800" b="0" i="0" u="none" strike="noStrike" baseline="0" dirty="0">
+              <a:latin typeface="Arial" panose="020B0604020202020204" pitchFamily="34" charset="0"/>
+            </a:endParaRPr>
+          </a:p>
+          <a:p>
+            <a:endParaRPr lang="en-US" sz="1800" b="0" i="0" u="none" strike="noStrike" baseline="0" dirty="0">
+              <a:latin typeface="Arial" panose="020B0604020202020204" pitchFamily="34" charset="0"/>
+            </a:endParaRPr>
+          </a:p>
+          <a:p>
+            <a:endParaRPr lang="en-US" sz="1800" b="0" i="0" u="none" strike="noStrike" baseline="0" dirty="0">
+              <a:latin typeface="Arial" panose="020B0604020202020204" pitchFamily="34" charset="0"/>
+            </a:endParaRPr>
+          </a:p>
+          <a:p>
+            <a:endParaRPr lang="en-US" sz="1800" b="0" i="0" u="none" strike="noStrike" baseline="0" dirty="0">
+              <a:latin typeface="Arial" panose="020B0604020202020204" pitchFamily="34" charset="0"/>
+            </a:endParaRPr>
+          </a:p>
+          <a:p>
+            <a:endParaRPr lang="en-US" sz="1800" b="0" i="0" u="none" strike="noStrike" baseline="0" dirty="0">
+              <a:latin typeface="Arial" panose="020B0604020202020204" pitchFamily="34" charset="0"/>
+            </a:endParaRPr>
+          </a:p>
+          <a:p>
+            <a:endParaRPr lang="en-US" sz="1800" b="0" i="0" u="none" strike="noStrike" baseline="0" dirty="0">
+              <a:latin typeface="Arial" panose="020B0604020202020204" pitchFamily="34" charset="0"/>
+            </a:endParaRPr>
+          </a:p>
+          <a:p>
+            <a:endParaRPr lang="en-US" sz="1800" b="0" i="0" u="none" strike="noStrike" baseline="0" dirty="0">
+              <a:latin typeface="Arial" panose="020B0604020202020204" pitchFamily="34" charset="0"/>
+            </a:endParaRPr>
+          </a:p>
+          <a:p>
+            <a:endParaRPr lang="en-US" sz="1800" b="0" i="0" u="none" strike="noStrike" baseline="0" dirty="0">
+              <a:latin typeface="Arial" panose="020B0604020202020204" pitchFamily="34" charset="0"/>
+            </a:endParaRPr>
+          </a:p>
+          <a:p>
+            <a:pPr algn="l"/>
+            <a:endParaRPr lang="en-US" sz="1800" b="0" i="0" u="none" strike="noStrike" baseline="0" dirty="0">
+              <a:solidFill>
+                <a:srgbClr val="000000"/>
+              </a:solidFill>
+              <a:latin typeface="Arial" panose="020B0604020202020204" pitchFamily="34" charset="0"/>
+            </a:endParaRPr>
+          </a:p>
+          <a:p>
+            <a:endParaRPr lang="en-US" sz="1800" b="0" i="0" u="none" strike="noStrike" baseline="0" dirty="0">
+              <a:latin typeface="Arial" panose="020B0604020202020204" pitchFamily="34" charset="0"/>
+            </a:endParaRPr>
+          </a:p>
+          <a:p>
+            <a:endParaRPr lang="en-US" sz="1800" b="0" i="0" u="none" strike="noStrike" baseline="0" dirty="0">
+              <a:latin typeface="Arial" panose="020B0604020202020204" pitchFamily="34" charset="0"/>
+            </a:endParaRPr>
+          </a:p>
+          <a:p>
+            <a:endParaRPr lang="en-US" sz="1800" b="0" i="0" u="none" strike="noStrike" baseline="0" dirty="0">
+              <a:latin typeface="Arial" panose="020B0604020202020204" pitchFamily="34" charset="0"/>
+            </a:endParaRPr>
+          </a:p>
+          <a:p>
+            <a:endParaRPr lang="en-US" sz="1800" b="0" i="0" u="none" strike="noStrike" baseline="0" dirty="0">
+              <a:latin typeface="Arial" panose="020B0604020202020204" pitchFamily="34" charset="0"/>
+            </a:endParaRPr>
+          </a:p>
+          <a:p>
+            <a:endParaRPr lang="en-US" sz="1800" b="0" i="0" u="none" strike="noStrike" baseline="0" dirty="0">
+              <a:latin typeface="Arial" panose="020B0604020202020204" pitchFamily="34" charset="0"/>
+            </a:endParaRPr>
+          </a:p>
+          <a:p>
+            <a:endParaRPr lang="en-US" sz="1800" b="0" i="0" u="none" strike="noStrike" baseline="0" dirty="0">
+              <a:latin typeface="Arial" panose="020B0604020202020204" pitchFamily="34" charset="0"/>
+            </a:endParaRPr>
+          </a:p>
+          <a:p>
+            <a:endParaRPr lang="en-US" sz="1800" b="0" i="0" u="none" strike="noStrike" baseline="0" dirty="0">
+              <a:latin typeface="Arial" panose="020B0604020202020204" pitchFamily="34" charset="0"/>
+            </a:endParaRPr>
+          </a:p>
+          <a:p>
+            <a:endParaRPr lang="en-US" sz="1800" b="0" i="0" u="none" strike="noStrike" baseline="0" dirty="0">
+              <a:latin typeface="Arial" panose="020B0604020202020204" pitchFamily="34" charset="0"/>
+            </a:endParaRPr>
+          </a:p>
+          <a:p>
+            <a:endParaRPr lang="en-US" sz="1800" b="0" i="0" u="none" strike="noStrike" baseline="0" dirty="0">
+              <a:latin typeface="Arial" panose="020B0604020202020204" pitchFamily="34" charset="0"/>
+            </a:endParaRPr>
+          </a:p>
+          <a:p>
+            <a:endParaRPr lang="en-US" sz="1800" b="0" i="0" u="none" strike="noStrike" baseline="0" dirty="0">
+              <a:latin typeface="Arial" panose="020B0604020202020204" pitchFamily="34" charset="0"/>
+            </a:endParaRPr>
+          </a:p>
+          <a:p>
+            <a:endParaRPr lang="en-US" sz="1800" b="0" i="0" u="none" strike="noStrike" baseline="0" dirty="0">
+              <a:latin typeface="Arial" panose="020B0604020202020204" pitchFamily="34" charset="0"/>
+            </a:endParaRPr>
+          </a:p>
+          <a:p>
+            <a:r>
+              <a:rPr lang="en-US" sz="1800" b="0" i="0" u="none" strike="noStrike" baseline="0" dirty="0">
+                <a:solidFill>
+                  <a:srgbClr val="212121"/>
+                </a:solidFill>
+                <a:latin typeface="Arial" panose="020B0604020202020204" pitchFamily="34" charset="0"/>
+              </a:rPr>
+              <a:t>When the exception is later caught and printed toSystemOut.log, the inner exception message and stack will be included.</a:t>
+            </a:r>
+          </a:p>
+          <a:p>
+            <a:r>
+              <a:rPr lang="en-US" sz="1800" b="0" i="0" u="none" strike="noStrike" baseline="0" dirty="0">
+                <a:solidFill>
+                  <a:srgbClr val="212121"/>
+                </a:solidFill>
+                <a:latin typeface="Arial" panose="020B0604020202020204" pitchFamily="34" charset="0"/>
+              </a:rPr>
+              <a:t>Customers often have general catch blocks in Servlets, MDBs, EJBs and other </a:t>
+            </a:r>
+            <a:r>
+              <a:rPr lang="en-US" sz="1800" b="0" i="0" u="none" strike="noStrike" baseline="0" dirty="0" err="1">
+                <a:solidFill>
+                  <a:srgbClr val="212121"/>
+                </a:solidFill>
+                <a:latin typeface="Arial" panose="020B0604020202020204" pitchFamily="34" charset="0"/>
+              </a:rPr>
+              <a:t>corecomponents</a:t>
+            </a:r>
+            <a:r>
+              <a:rPr lang="en-US" sz="1800" b="0" i="0" u="none" strike="noStrike" baseline="0" dirty="0">
+                <a:solidFill>
+                  <a:srgbClr val="212121"/>
+                </a:solidFill>
+                <a:latin typeface="Arial" panose="020B0604020202020204" pitchFamily="34" charset="0"/>
+              </a:rPr>
+              <a:t> where they catch all un-handled exceptions and re-throw them as </a:t>
+            </a:r>
+            <a:r>
+              <a:rPr lang="en-US" sz="1800" b="0" i="0" u="none" strike="noStrike" baseline="0" dirty="0" err="1">
+                <a:solidFill>
+                  <a:srgbClr val="212121"/>
+                </a:solidFill>
+                <a:latin typeface="Arial" panose="020B0604020202020204" pitchFamily="34" charset="0"/>
+              </a:rPr>
+              <a:t>newExceptions</a:t>
+            </a:r>
+            <a:r>
+              <a:rPr lang="en-US" sz="1800" b="0" i="0" u="none" strike="noStrike" baseline="0" dirty="0">
+                <a:solidFill>
+                  <a:srgbClr val="212121"/>
+                </a:solidFill>
+                <a:latin typeface="Arial" panose="020B0604020202020204" pitchFamily="34" charset="0"/>
+              </a:rPr>
+              <a:t>, adding application specific debugging information or auditing information.</a:t>
+            </a:r>
+            <a:endParaRPr lang="en-US" altLang="en-US" dirty="0">
+              <a:latin typeface="Bahnschrift" panose="020B0502040204020203" pitchFamily="34" charset="0"/>
+            </a:endParaRPr>
+          </a:p>
+        </p:txBody>
+      </p:sp>
+    </p:spTree>
+    <p:extLst>
+      <p:ext uri="{BB962C8B-B14F-4D97-AF65-F5344CB8AC3E}">
+        <p14:creationId xmlns:p14="http://schemas.microsoft.com/office/powerpoint/2010/main" val="2523797656"/>
       </p:ext>
     </p:extLst>
   </p:cSld>
@@ -17664,7 +18395,7 @@
         <p:spPr bwMode="auto">
           <a:xfrm>
             <a:off x="609600" y="1676400"/>
-            <a:ext cx="8158003" cy="4524315"/>
+            <a:ext cx="8158003" cy="4893647"/>
           </a:xfrm>
           <a:prstGeom prst="rect">
             <a:avLst/>
@@ -17939,7 +18670,7 @@
             </a:endParaRPr>
           </a:p>
           <a:p>
-            <a:pPr>
+            <a:pPr marL="1485900" indent="-1485900">
               <a:spcBef>
                 <a:spcPct val="0"/>
               </a:spcBef>
@@ -17958,6 +18689,26 @@
               </a:rPr>
               <a:t> -  this section always happens no matter what</a:t>
             </a:r>
+            <a:br>
+              <a:rPr lang="en-US" altLang="en-US" sz="2400" dirty="0">
+                <a:latin typeface="Arial" panose="020B0604020202020204" pitchFamily="34" charset="0"/>
+              </a:rPr>
+            </a:br>
+            <a:r>
+              <a:rPr lang="en-US" altLang="en-US" sz="2400" dirty="0">
+                <a:latin typeface="Arial" panose="020B0604020202020204" pitchFamily="34" charset="0"/>
+              </a:rPr>
+              <a:t>and is used to </a:t>
+            </a:r>
+            <a:r>
+              <a:rPr lang="en-US" altLang="en-US" sz="2400">
+                <a:latin typeface="Arial" panose="020B0604020202020204" pitchFamily="34" charset="0"/>
+              </a:rPr>
+              <a:t>release resources.</a:t>
+            </a:r>
+            <a:endParaRPr lang="en-US" altLang="en-US" sz="2400" dirty="0">
+              <a:latin typeface="Arial" panose="020B0604020202020204" pitchFamily="34" charset="0"/>
+            </a:endParaRPr>
           </a:p>
           <a:p>
             <a:pPr>
@@ -18781,12 +19532,12 @@
           <a:p>
             <a:pPr eaLnBrk="1" hangingPunct="1"/>
             <a:r>
-              <a:rPr lang="en-GB" altLang="en-US" sz="4000">
-                <a:solidFill>
-                  <a:schemeClr val="tx1"/>
-                </a:solidFill>
-              </a:rPr>
-              <a:t>Finding a Sum of Integer Values Passed as Command Line Parameters</a:t>
+              <a:rPr lang="en-GB" altLang="en-US" sz="3200" dirty="0">
+                <a:solidFill>
+                  <a:schemeClr val="tx1"/>
+                </a:solidFill>
+              </a:rPr>
+              <a:t>Finding a Sum of String Integer Values</a:t>
             </a:r>
           </a:p>
         </p:txBody>
@@ -18809,7 +19560,7 @@
         </p:nvSpPr>
         <p:spPr>
           <a:xfrm>
-            <a:off x="152400" y="1447800"/>
+            <a:off x="76200" y="1371600"/>
             <a:ext cx="9067800" cy="5181600"/>
           </a:xfrm>
         </p:spPr>
@@ -18825,770 +19576,54 @@
               <a:buNone/>
             </a:pPr>
             <a:r>
-              <a:rPr lang="en-GB" altLang="en-US" sz="1400">
+              <a:rPr lang="en-GB" altLang="en-US" sz="2300" dirty="0">
                 <a:solidFill>
                   <a:schemeClr val="tx1"/>
                 </a:solidFill>
                 <a:latin typeface="Courier New" panose="02070309020205020404" pitchFamily="49" charset="0"/>
                 <a:cs typeface="Courier New" panose="02070309020205020404" pitchFamily="49" charset="0"/>
               </a:rPr>
-              <a:t>// ComLineSum.java: adding command line parameters</a:t>
-            </a:r>
-          </a:p>
-          <a:p>
-            <a:pPr eaLnBrk="1" hangingPunct="1">
-              <a:lnSpc>
-                <a:spcPct val="80000"/>
-              </a:lnSpc>
-              <a:buFont typeface="Wingdings" panose="05000000000000000000" pitchFamily="2" charset="2"/>
-              <a:buNone/>
-            </a:pPr>
-            <a:r>
-              <a:rPr lang="en-GB" altLang="en-US" sz="1400">
+              <a:t>public void </a:t>
+            </a:r>
+            <a:r>
+              <a:rPr lang="en-GB" altLang="en-US" sz="2300" dirty="0" err="1">
                 <a:solidFill>
                   <a:schemeClr val="tx1"/>
                 </a:solidFill>
                 <a:latin typeface="Courier New" panose="02070309020205020404" pitchFamily="49" charset="0"/>
                 <a:cs typeface="Courier New" panose="02070309020205020404" pitchFamily="49" charset="0"/>
               </a:rPr>
-              <a:t>class ComLineSum  </a:t>
-            </a:r>
-          </a:p>
-          <a:p>
-            <a:pPr eaLnBrk="1" hangingPunct="1">
-              <a:lnSpc>
-                <a:spcPct val="80000"/>
-              </a:lnSpc>
-              <a:buFont typeface="Wingdings" panose="05000000000000000000" pitchFamily="2" charset="2"/>
-              <a:buNone/>
-            </a:pPr>
-            <a:r>
-              <a:rPr lang="en-GB" altLang="en-US" sz="1400">
+              <a:t>sumArray</a:t>
+            </a:r>
+            <a:r>
+              <a:rPr lang="en-GB" altLang="en-US" sz="2300" dirty="0">
                 <a:solidFill>
                   <a:schemeClr val="tx1"/>
                 </a:solidFill>
                 <a:latin typeface="Courier New" panose="02070309020205020404" pitchFamily="49" charset="0"/>
                 <a:cs typeface="Courier New" panose="02070309020205020404" pitchFamily="49" charset="0"/>
               </a:rPr>
-              <a:t>{</a:t>
-            </a:r>
-          </a:p>
-          <a:p>
-            <a:pPr eaLnBrk="1" hangingPunct="1">
-              <a:lnSpc>
-                <a:spcPct val="80000"/>
-              </a:lnSpc>
-              <a:buFont typeface="Wingdings" panose="05000000000000000000" pitchFamily="2" charset="2"/>
-              <a:buNone/>
-            </a:pPr>
-            <a:r>
-              <a:rPr lang="en-GB" altLang="en-US" sz="1400">
+              <a:t>(String[] </a:t>
+            </a:r>
+            <a:r>
+              <a:rPr lang="en-GB" altLang="en-US" sz="2300" dirty="0" err="1">
                 <a:solidFill>
                   <a:schemeClr val="tx1"/>
                 </a:solidFill>
                 <a:latin typeface="Courier New" panose="02070309020205020404" pitchFamily="49" charset="0"/>
                 <a:cs typeface="Courier New" panose="02070309020205020404" pitchFamily="49" charset="0"/>
               </a:rPr>
-              <a:t>  public static void main(String args[])   </a:t>
-            </a:r>
-          </a:p>
-          <a:p>
-            <a:pPr eaLnBrk="1" hangingPunct="1">
-              <a:lnSpc>
-                <a:spcPct val="80000"/>
-              </a:lnSpc>
-              <a:buFont typeface="Wingdings" panose="05000000000000000000" pitchFamily="2" charset="2"/>
-              <a:buNone/>
-            </a:pPr>
-            <a:r>
-              <a:rPr lang="en-GB" altLang="en-US" sz="1400">
+              <a:t>nums</a:t>
+            </a:r>
+            <a:r>
+              <a:rPr lang="en-GB" altLang="en-US" sz="2300" dirty="0">
                 <a:solidFill>
                   <a:schemeClr val="tx1"/>
                 </a:solidFill>
                 <a:latin typeface="Courier New" panose="02070309020205020404" pitchFamily="49" charset="0"/>
                 <a:cs typeface="Courier New" panose="02070309020205020404" pitchFamily="49" charset="0"/>
               </a:rPr>
-              <a:t>  {</a:t>
-            </a:r>
-          </a:p>
-          <a:p>
-            <a:pPr eaLnBrk="1" hangingPunct="1">
-              <a:lnSpc>
-                <a:spcPct val="80000"/>
-              </a:lnSpc>
-              <a:buFont typeface="Wingdings" panose="05000000000000000000" pitchFamily="2" charset="2"/>
-              <a:buNone/>
-            </a:pPr>
-            <a:r>
-              <a:rPr lang="en-GB" altLang="en-US" sz="1400">
-                <a:solidFill>
-                  <a:schemeClr val="tx1"/>
-                </a:solidFill>
-                <a:latin typeface="Courier New" panose="02070309020205020404" pitchFamily="49" charset="0"/>
-                <a:cs typeface="Courier New" panose="02070309020205020404" pitchFamily="49" charset="0"/>
-              </a:rPr>
-              <a:t>     int InvalidCount = 0;</a:t>
-            </a:r>
-          </a:p>
-          <a:p>
-            <a:pPr eaLnBrk="1" hangingPunct="1">
-              <a:lnSpc>
-                <a:spcPct val="80000"/>
-              </a:lnSpc>
-              <a:buFont typeface="Wingdings" panose="05000000000000000000" pitchFamily="2" charset="2"/>
-              <a:buNone/>
-            </a:pPr>
-            <a:r>
-              <a:rPr lang="en-GB" altLang="en-US" sz="1400">
-                <a:solidFill>
-                  <a:schemeClr val="tx1"/>
-                </a:solidFill>
-                <a:latin typeface="Courier New" panose="02070309020205020404" pitchFamily="49" charset="0"/>
-                <a:cs typeface="Courier New" panose="02070309020205020404" pitchFamily="49" charset="0"/>
-              </a:rPr>
-              <a:t>     int number, sum = 0;</a:t>
-            </a:r>
-          </a:p>
-          <a:p>
-            <a:pPr eaLnBrk="1" hangingPunct="1">
-              <a:lnSpc>
-                <a:spcPct val="80000"/>
-              </a:lnSpc>
-              <a:buFont typeface="Wingdings" panose="05000000000000000000" pitchFamily="2" charset="2"/>
-              <a:buNone/>
-            </a:pPr>
-            <a:endParaRPr lang="en-GB" altLang="en-US" sz="1400">
-              <a:solidFill>
-                <a:schemeClr val="tx1"/>
-              </a:solidFill>
-              <a:latin typeface="Courier New" panose="02070309020205020404" pitchFamily="49" charset="0"/>
-              <a:cs typeface="Courier New" panose="02070309020205020404" pitchFamily="49" charset="0"/>
-            </a:endParaRPr>
-          </a:p>
-          <a:p>
-            <a:pPr eaLnBrk="1" hangingPunct="1">
-              <a:lnSpc>
-                <a:spcPct val="80000"/>
-              </a:lnSpc>
-              <a:buFont typeface="Wingdings" panose="05000000000000000000" pitchFamily="2" charset="2"/>
-              <a:buNone/>
-            </a:pPr>
-            <a:r>
-              <a:rPr lang="en-GB" altLang="en-US" sz="1400">
-                <a:solidFill>
-                  <a:schemeClr val="tx1"/>
-                </a:solidFill>
-                <a:latin typeface="Courier New" panose="02070309020205020404" pitchFamily="49" charset="0"/>
-                <a:cs typeface="Courier New" panose="02070309020205020404" pitchFamily="49" charset="0"/>
-              </a:rPr>
-              <a:t>     for( int i = 0; i &lt; args.length; i++)     {</a:t>
-            </a:r>
-          </a:p>
-          <a:p>
-            <a:pPr eaLnBrk="1" hangingPunct="1">
-              <a:lnSpc>
-                <a:spcPct val="80000"/>
-              </a:lnSpc>
-              <a:buFont typeface="Wingdings" panose="05000000000000000000" pitchFamily="2" charset="2"/>
-              <a:buNone/>
-            </a:pPr>
-            <a:r>
-              <a:rPr lang="en-GB" altLang="en-US" sz="1400">
-                <a:solidFill>
-                  <a:schemeClr val="tx1"/>
-                </a:solidFill>
-                <a:latin typeface="Courier New" panose="02070309020205020404" pitchFamily="49" charset="0"/>
-                <a:cs typeface="Courier New" panose="02070309020205020404" pitchFamily="49" charset="0"/>
-              </a:rPr>
-              <a:t>        try {</a:t>
-            </a:r>
-          </a:p>
-          <a:p>
-            <a:pPr eaLnBrk="1" hangingPunct="1">
-              <a:lnSpc>
-                <a:spcPct val="80000"/>
-              </a:lnSpc>
-              <a:buFont typeface="Wingdings" panose="05000000000000000000" pitchFamily="2" charset="2"/>
-              <a:buNone/>
-            </a:pPr>
-            <a:r>
-              <a:rPr lang="en-GB" altLang="en-US" sz="1400">
-                <a:solidFill>
-                  <a:schemeClr val="tx1"/>
-                </a:solidFill>
-                <a:latin typeface="Courier New" panose="02070309020205020404" pitchFamily="49" charset="0"/>
-                <a:cs typeface="Courier New" panose="02070309020205020404" pitchFamily="49" charset="0"/>
-              </a:rPr>
-              <a:t>           number = Integer.parseInt(args[i]);</a:t>
-            </a:r>
-          </a:p>
-          <a:p>
-            <a:pPr eaLnBrk="1" hangingPunct="1">
-              <a:lnSpc>
-                <a:spcPct val="80000"/>
-              </a:lnSpc>
-              <a:buFont typeface="Wingdings" panose="05000000000000000000" pitchFamily="2" charset="2"/>
-              <a:buNone/>
-            </a:pPr>
-            <a:r>
-              <a:rPr lang="en-GB" altLang="en-US" sz="1400">
-                <a:solidFill>
-                  <a:schemeClr val="tx1"/>
-                </a:solidFill>
-                <a:latin typeface="Courier New" panose="02070309020205020404" pitchFamily="49" charset="0"/>
-                <a:cs typeface="Courier New" panose="02070309020205020404" pitchFamily="49" charset="0"/>
-              </a:rPr>
-              <a:t>        }</a:t>
-            </a:r>
-          </a:p>
-          <a:p>
-            <a:pPr eaLnBrk="1" hangingPunct="1">
-              <a:lnSpc>
-                <a:spcPct val="80000"/>
-              </a:lnSpc>
-              <a:buFont typeface="Wingdings" panose="05000000000000000000" pitchFamily="2" charset="2"/>
-              <a:buNone/>
-            </a:pPr>
-            <a:r>
-              <a:rPr lang="en-GB" altLang="en-US" sz="1400">
-                <a:solidFill>
-                  <a:schemeClr val="tx1"/>
-                </a:solidFill>
-                <a:latin typeface="Courier New" panose="02070309020205020404" pitchFamily="49" charset="0"/>
-                <a:cs typeface="Courier New" panose="02070309020205020404" pitchFamily="49" charset="0"/>
-              </a:rPr>
-              <a:t>        catch(NumberFormatException e)   {</a:t>
-            </a:r>
-          </a:p>
-          <a:p>
-            <a:pPr eaLnBrk="1" hangingPunct="1">
-              <a:lnSpc>
-                <a:spcPct val="80000"/>
-              </a:lnSpc>
-              <a:buFont typeface="Wingdings" panose="05000000000000000000" pitchFamily="2" charset="2"/>
-              <a:buNone/>
-            </a:pPr>
-            <a:r>
-              <a:rPr lang="en-GB" altLang="en-US" sz="1400">
-                <a:solidFill>
-                  <a:schemeClr val="tx1"/>
-                </a:solidFill>
-                <a:latin typeface="Courier New" panose="02070309020205020404" pitchFamily="49" charset="0"/>
-                <a:cs typeface="Courier New" panose="02070309020205020404" pitchFamily="49" charset="0"/>
-              </a:rPr>
-              <a:t>           InvalidCount++;</a:t>
-            </a:r>
-          </a:p>
-          <a:p>
-            <a:pPr eaLnBrk="1" hangingPunct="1">
-              <a:lnSpc>
-                <a:spcPct val="80000"/>
-              </a:lnSpc>
-              <a:buFont typeface="Wingdings" panose="05000000000000000000" pitchFamily="2" charset="2"/>
-              <a:buNone/>
-            </a:pPr>
-            <a:r>
-              <a:rPr lang="en-GB" altLang="en-US" sz="1400">
-                <a:solidFill>
-                  <a:schemeClr val="tx1"/>
-                </a:solidFill>
-                <a:latin typeface="Courier New" panose="02070309020205020404" pitchFamily="49" charset="0"/>
-                <a:cs typeface="Courier New" panose="02070309020205020404" pitchFamily="49" charset="0"/>
-              </a:rPr>
-              <a:t>           System.out.println("Invalid Number: "+args[i]);</a:t>
-            </a:r>
-          </a:p>
-          <a:p>
-            <a:pPr eaLnBrk="1" hangingPunct="1">
-              <a:lnSpc>
-                <a:spcPct val="80000"/>
-              </a:lnSpc>
-              <a:buFont typeface="Wingdings" panose="05000000000000000000" pitchFamily="2" charset="2"/>
-              <a:buNone/>
-            </a:pPr>
-            <a:r>
-              <a:rPr lang="en-GB" altLang="en-US" sz="1400">
-                <a:solidFill>
-                  <a:schemeClr val="tx1"/>
-                </a:solidFill>
-                <a:latin typeface="Courier New" panose="02070309020205020404" pitchFamily="49" charset="0"/>
-                <a:cs typeface="Courier New" panose="02070309020205020404" pitchFamily="49" charset="0"/>
-              </a:rPr>
-              <a:t>           continue;//skip the remaining part of loop</a:t>
-            </a:r>
-          </a:p>
-          <a:p>
-            <a:pPr eaLnBrk="1" hangingPunct="1">
-              <a:lnSpc>
-                <a:spcPct val="80000"/>
-              </a:lnSpc>
-              <a:buFont typeface="Wingdings" panose="05000000000000000000" pitchFamily="2" charset="2"/>
-              <a:buNone/>
-            </a:pPr>
-            <a:r>
-              <a:rPr lang="en-GB" altLang="en-US" sz="1400">
-                <a:solidFill>
-                  <a:schemeClr val="tx1"/>
-                </a:solidFill>
-                <a:latin typeface="Courier New" panose="02070309020205020404" pitchFamily="49" charset="0"/>
-                <a:cs typeface="Courier New" panose="02070309020205020404" pitchFamily="49" charset="0"/>
-              </a:rPr>
-              <a:t>        }</a:t>
-            </a:r>
-          </a:p>
-          <a:p>
-            <a:pPr eaLnBrk="1" hangingPunct="1">
-              <a:lnSpc>
-                <a:spcPct val="80000"/>
-              </a:lnSpc>
-              <a:buFont typeface="Wingdings" panose="05000000000000000000" pitchFamily="2" charset="2"/>
-              <a:buNone/>
-            </a:pPr>
-            <a:r>
-              <a:rPr lang="en-GB" altLang="en-US" sz="1400">
-                <a:solidFill>
-                  <a:schemeClr val="tx1"/>
-                </a:solidFill>
-                <a:latin typeface="Courier New" panose="02070309020205020404" pitchFamily="49" charset="0"/>
-                <a:cs typeface="Courier New" panose="02070309020205020404" pitchFamily="49" charset="0"/>
-              </a:rPr>
-              <a:t>        sum += number;</a:t>
-            </a:r>
-          </a:p>
-          <a:p>
-            <a:pPr eaLnBrk="1" hangingPunct="1">
-              <a:lnSpc>
-                <a:spcPct val="80000"/>
-              </a:lnSpc>
-              <a:buFont typeface="Wingdings" panose="05000000000000000000" pitchFamily="2" charset="2"/>
-              <a:buNone/>
-            </a:pPr>
-            <a:r>
-              <a:rPr lang="en-GB" altLang="en-US" sz="1400">
-                <a:solidFill>
-                  <a:schemeClr val="tx1"/>
-                </a:solidFill>
-                <a:latin typeface="Courier New" panose="02070309020205020404" pitchFamily="49" charset="0"/>
-                <a:cs typeface="Courier New" panose="02070309020205020404" pitchFamily="49" charset="0"/>
-              </a:rPr>
-              <a:t>     }</a:t>
-            </a:r>
-          </a:p>
-          <a:p>
-            <a:pPr eaLnBrk="1" hangingPunct="1">
-              <a:lnSpc>
-                <a:spcPct val="80000"/>
-              </a:lnSpc>
-              <a:buFont typeface="Wingdings" panose="05000000000000000000" pitchFamily="2" charset="2"/>
-              <a:buNone/>
-            </a:pPr>
-            <a:r>
-              <a:rPr lang="en-GB" altLang="en-US" sz="1400">
-                <a:solidFill>
-                  <a:schemeClr val="tx1"/>
-                </a:solidFill>
-                <a:latin typeface="Courier New" panose="02070309020205020404" pitchFamily="49" charset="0"/>
-                <a:cs typeface="Courier New" panose="02070309020205020404" pitchFamily="49" charset="0"/>
-              </a:rPr>
-              <a:t>     System.out.println("Number of Invalid Arguments = "+InvalidCount);</a:t>
-            </a:r>
-          </a:p>
-          <a:p>
-            <a:pPr eaLnBrk="1" hangingPunct="1">
-              <a:lnSpc>
-                <a:spcPct val="80000"/>
-              </a:lnSpc>
-              <a:buFont typeface="Wingdings" panose="05000000000000000000" pitchFamily="2" charset="2"/>
-              <a:buNone/>
-            </a:pPr>
-            <a:r>
-              <a:rPr lang="en-GB" altLang="en-US" sz="1400">
-                <a:solidFill>
-                  <a:schemeClr val="tx1"/>
-                </a:solidFill>
-                <a:latin typeface="Courier New" panose="02070309020205020404" pitchFamily="49" charset="0"/>
-                <a:cs typeface="Courier New" panose="02070309020205020404" pitchFamily="49" charset="0"/>
-              </a:rPr>
-              <a:t>     System.out.println("Number of Valid Arguments = "+(args.length-InvalidCount));</a:t>
-            </a:r>
-          </a:p>
-          <a:p>
-            <a:pPr eaLnBrk="1" hangingPunct="1">
-              <a:lnSpc>
-                <a:spcPct val="80000"/>
-              </a:lnSpc>
-              <a:buFont typeface="Wingdings" panose="05000000000000000000" pitchFamily="2" charset="2"/>
-              <a:buNone/>
-            </a:pPr>
-            <a:r>
-              <a:rPr lang="en-GB" altLang="en-US" sz="1400">
-                <a:solidFill>
-                  <a:schemeClr val="tx1"/>
-                </a:solidFill>
-                <a:latin typeface="Courier New" panose="02070309020205020404" pitchFamily="49" charset="0"/>
-                <a:cs typeface="Courier New" panose="02070309020205020404" pitchFamily="49" charset="0"/>
-              </a:rPr>
-              <a:t>     System.out.println("Sum of Valid Arguments = "+sum);</a:t>
-            </a:r>
-          </a:p>
-          <a:p>
-            <a:pPr eaLnBrk="1" hangingPunct="1">
-              <a:lnSpc>
-                <a:spcPct val="80000"/>
-              </a:lnSpc>
-              <a:buFont typeface="Wingdings" panose="05000000000000000000" pitchFamily="2" charset="2"/>
-              <a:buNone/>
-            </a:pPr>
-            <a:r>
-              <a:rPr lang="en-GB" altLang="en-US" sz="1400">
-                <a:solidFill>
-                  <a:schemeClr val="tx1"/>
-                </a:solidFill>
-                <a:latin typeface="Courier New" panose="02070309020205020404" pitchFamily="49" charset="0"/>
-                <a:cs typeface="Courier New" panose="02070309020205020404" pitchFamily="49" charset="0"/>
-              </a:rPr>
-              <a:t>   }</a:t>
-            </a:r>
-          </a:p>
-          <a:p>
-            <a:pPr eaLnBrk="1" hangingPunct="1">
-              <a:lnSpc>
-                <a:spcPct val="80000"/>
-              </a:lnSpc>
-              <a:buFont typeface="Wingdings" panose="05000000000000000000" pitchFamily="2" charset="2"/>
-              <a:buNone/>
-            </a:pPr>
-            <a:r>
-              <a:rPr lang="en-GB" altLang="en-US" sz="1400">
-                <a:solidFill>
-                  <a:schemeClr val="tx1"/>
-                </a:solidFill>
-                <a:latin typeface="Courier New" panose="02070309020205020404" pitchFamily="49" charset="0"/>
-                <a:cs typeface="Courier New" panose="02070309020205020404" pitchFamily="49" charset="0"/>
-              </a:rPr>
-              <a:t>}</a:t>
-            </a:r>
-          </a:p>
-        </p:txBody>
-      </p:sp>
-    </p:spTree>
-  </p:cSld>
-  <p:clrMapOvr>
-    <a:masterClrMapping/>
-  </p:clrMapOvr>
-  <p:transition advTm="1000"/>
-</p:sld>
-</file>
-
-<file path=ppt/slides/slide18.xml><?xml version="1.0" encoding="utf-8"?>
-<p:sld xmlns:a="http://schemas.openxmlformats.org/drawingml/2006/main" xmlns:r="http://schemas.openxmlformats.org/officeDocument/2006/relationships" xmlns:p="http://schemas.openxmlformats.org/presentationml/2006/main">
-  <p:cSld>
-    <p:spTree>
-      <p:nvGrpSpPr>
-        <p:cNvPr id="1" name=""/>
-        <p:cNvGrpSpPr/>
-        <p:nvPr/>
-      </p:nvGrpSpPr>
-      <p:grpSpPr>
-        <a:xfrm>
-          <a:off x="0" y="0"/>
-          <a:ext cx="0" cy="0"/>
-          <a:chOff x="0" y="0"/>
-          <a:chExt cx="0" cy="0"/>
-        </a:xfrm>
-      </p:grpSpPr>
-      <p:sp>
-        <p:nvSpPr>
-          <p:cNvPr id="69634" name="Slide Number Placeholder 3">
-            <a:extLst>
-              <a:ext uri="{FF2B5EF4-FFF2-40B4-BE49-F238E27FC236}">
-                <a16:creationId xmlns:a16="http://schemas.microsoft.com/office/drawing/2014/main" id="{EF8417FE-B7D1-9590-3041-6A26FEEA9F44}"/>
-              </a:ext>
-            </a:extLst>
-          </p:cNvPr>
-          <p:cNvSpPr>
-            <a:spLocks noGrp="1"/>
-          </p:cNvSpPr>
-          <p:nvPr>
-            <p:ph type="sldNum" sz="quarter" idx="10"/>
-          </p:nvPr>
-        </p:nvSpPr>
-        <p:spPr>
-          <a:noFill/>
-        </p:spPr>
-        <p:txBody>
-          <a:bodyPr/>
-          <a:lstStyle>
-            <a:lvl1pPr eaLnBrk="0" hangingPunct="0">
-              <a:defRPr sz="1600">
-                <a:solidFill>
-                  <a:schemeClr val="tx1"/>
-                </a:solidFill>
-                <a:latin typeface="Tahoma" panose="020B0604030504040204" pitchFamily="34" charset="0"/>
-                <a:ea typeface="SimSun" panose="02010600030101010101" pitchFamily="2" charset="-122"/>
-              </a:defRPr>
-            </a:lvl1pPr>
-            <a:lvl2pPr marL="742950" indent="-285750" eaLnBrk="0" hangingPunct="0">
-              <a:defRPr sz="1600">
-                <a:solidFill>
-                  <a:schemeClr val="tx1"/>
-                </a:solidFill>
-                <a:latin typeface="Tahoma" panose="020B0604030504040204" pitchFamily="34" charset="0"/>
-                <a:ea typeface="SimSun" panose="02010600030101010101" pitchFamily="2" charset="-122"/>
-              </a:defRPr>
-            </a:lvl2pPr>
-            <a:lvl3pPr marL="1143000" indent="-228600" eaLnBrk="0" hangingPunct="0">
-              <a:defRPr sz="1600">
-                <a:solidFill>
-                  <a:schemeClr val="tx1"/>
-                </a:solidFill>
-                <a:latin typeface="Tahoma" panose="020B0604030504040204" pitchFamily="34" charset="0"/>
-                <a:ea typeface="SimSun" panose="02010600030101010101" pitchFamily="2" charset="-122"/>
-              </a:defRPr>
-            </a:lvl3pPr>
-            <a:lvl4pPr marL="1600200" indent="-228600" eaLnBrk="0" hangingPunct="0">
-              <a:defRPr sz="1600">
-                <a:solidFill>
-                  <a:schemeClr val="tx1"/>
-                </a:solidFill>
-                <a:latin typeface="Tahoma" panose="020B0604030504040204" pitchFamily="34" charset="0"/>
-                <a:ea typeface="SimSun" panose="02010600030101010101" pitchFamily="2" charset="-122"/>
-              </a:defRPr>
-            </a:lvl4pPr>
-            <a:lvl5pPr marL="2057400" indent="-228600" eaLnBrk="0" hangingPunct="0">
-              <a:defRPr sz="1600">
-                <a:solidFill>
-                  <a:schemeClr val="tx1"/>
-                </a:solidFill>
-                <a:latin typeface="Tahoma" panose="020B0604030504040204" pitchFamily="34" charset="0"/>
-                <a:ea typeface="SimSun" panose="02010600030101010101" pitchFamily="2" charset="-122"/>
-              </a:defRPr>
-            </a:lvl5pPr>
-            <a:lvl6pPr marL="2514600" indent="-228600" algn="ctr" eaLnBrk="0" fontAlgn="base" hangingPunct="0">
-              <a:spcBef>
-                <a:spcPct val="0"/>
-              </a:spcBef>
-              <a:spcAft>
-                <a:spcPct val="0"/>
-              </a:spcAft>
-              <a:defRPr sz="1600">
-                <a:solidFill>
-                  <a:schemeClr val="tx1"/>
-                </a:solidFill>
-                <a:latin typeface="Tahoma" panose="020B0604030504040204" pitchFamily="34" charset="0"/>
-                <a:ea typeface="SimSun" panose="02010600030101010101" pitchFamily="2" charset="-122"/>
-              </a:defRPr>
-            </a:lvl6pPr>
-            <a:lvl7pPr marL="2971800" indent="-228600" algn="ctr" eaLnBrk="0" fontAlgn="base" hangingPunct="0">
-              <a:spcBef>
-                <a:spcPct val="0"/>
-              </a:spcBef>
-              <a:spcAft>
-                <a:spcPct val="0"/>
-              </a:spcAft>
-              <a:defRPr sz="1600">
-                <a:solidFill>
-                  <a:schemeClr val="tx1"/>
-                </a:solidFill>
-                <a:latin typeface="Tahoma" panose="020B0604030504040204" pitchFamily="34" charset="0"/>
-                <a:ea typeface="SimSun" panose="02010600030101010101" pitchFamily="2" charset="-122"/>
-              </a:defRPr>
-            </a:lvl7pPr>
-            <a:lvl8pPr marL="3429000" indent="-228600" algn="ctr" eaLnBrk="0" fontAlgn="base" hangingPunct="0">
-              <a:spcBef>
-                <a:spcPct val="0"/>
-              </a:spcBef>
-              <a:spcAft>
-                <a:spcPct val="0"/>
-              </a:spcAft>
-              <a:defRPr sz="1600">
-                <a:solidFill>
-                  <a:schemeClr val="tx1"/>
-                </a:solidFill>
-                <a:latin typeface="Tahoma" panose="020B0604030504040204" pitchFamily="34" charset="0"/>
-                <a:ea typeface="SimSun" panose="02010600030101010101" pitchFamily="2" charset="-122"/>
-              </a:defRPr>
-            </a:lvl8pPr>
-            <a:lvl9pPr marL="3886200" indent="-228600" algn="ctr" eaLnBrk="0" fontAlgn="base" hangingPunct="0">
-              <a:spcBef>
-                <a:spcPct val="0"/>
-              </a:spcBef>
-              <a:spcAft>
-                <a:spcPct val="0"/>
-              </a:spcAft>
-              <a:defRPr sz="1600">
-                <a:solidFill>
-                  <a:schemeClr val="tx1"/>
-                </a:solidFill>
-                <a:latin typeface="Tahoma" panose="020B0604030504040204" pitchFamily="34" charset="0"/>
-                <a:ea typeface="SimSun" panose="02010600030101010101" pitchFamily="2" charset="-122"/>
-              </a:defRPr>
-            </a:lvl9pPr>
-          </a:lstStyle>
-          <a:p>
-            <a:pPr marL="0" marR="0" lvl="0" indent="0" algn="r" defTabSz="914400" rtl="0" eaLnBrk="1" fontAlgn="base" latinLnBrk="0" hangingPunct="1">
-              <a:lnSpc>
-                <a:spcPct val="100000"/>
-              </a:lnSpc>
-              <a:spcBef>
-                <a:spcPct val="0"/>
-              </a:spcBef>
-              <a:spcAft>
-                <a:spcPct val="0"/>
-              </a:spcAft>
-              <a:buClrTx/>
-              <a:buSzTx/>
-              <a:buFontTx/>
-              <a:buNone/>
-              <a:tabLst/>
-              <a:defRPr/>
-            </a:pPr>
-            <a:fld id="{F8BABFC0-9C03-499D-A6D8-AAB9DBC9504C}" type="slidenum">
-              <a:rPr kumimoji="0" lang="zh-CN" altLang="en-GB" sz="1400" b="0" i="0" u="none" strike="noStrike" kern="1200" cap="none" spc="0" normalizeH="0" baseline="0" noProof="0">
-                <a:ln>
-                  <a:noFill/>
-                </a:ln>
-                <a:solidFill>
-                  <a:srgbClr val="000000"/>
-                </a:solidFill>
-                <a:effectLst/>
-                <a:uLnTx/>
-                <a:uFillTx/>
-                <a:latin typeface="Tahoma" panose="020B0604030504040204" pitchFamily="34" charset="0"/>
-                <a:ea typeface="SimSun" panose="02010600030101010101" pitchFamily="2" charset="-122"/>
-                <a:cs typeface="+mn-cs"/>
-              </a:rPr>
-              <a:pPr marL="0" marR="0" lvl="0" indent="0" algn="r" defTabSz="914400" rtl="0" eaLnBrk="1" fontAlgn="base" latinLnBrk="0" hangingPunct="1">
-                <a:lnSpc>
-                  <a:spcPct val="100000"/>
-                </a:lnSpc>
-                <a:spcBef>
-                  <a:spcPct val="0"/>
-                </a:spcBef>
-                <a:spcAft>
-                  <a:spcPct val="0"/>
-                </a:spcAft>
-                <a:buClrTx/>
-                <a:buSzTx/>
-                <a:buFontTx/>
-                <a:buNone/>
-                <a:tabLst/>
-                <a:defRPr/>
-              </a:pPr>
-              <a:t>18</a:t>
-            </a:fld>
-            <a:endParaRPr kumimoji="0" lang="en-GB" altLang="zh-CN" sz="1400" b="0" i="0" u="none" strike="noStrike" kern="1200" cap="none" spc="0" normalizeH="0" baseline="0" noProof="0">
-              <a:ln>
-                <a:noFill/>
-              </a:ln>
-              <a:solidFill>
-                <a:srgbClr val="000000"/>
-              </a:solidFill>
-              <a:effectLst/>
-              <a:uLnTx/>
-              <a:uFillTx/>
-              <a:latin typeface="Tahoma" panose="020B0604030504040204" pitchFamily="34" charset="0"/>
-              <a:ea typeface="SimSun" panose="02010600030101010101" pitchFamily="2" charset="-122"/>
-              <a:cs typeface="+mn-cs"/>
-            </a:endParaRPr>
-          </a:p>
-        </p:txBody>
-      </p:sp>
-      <p:sp>
-        <p:nvSpPr>
-          <p:cNvPr id="69635" name="Rectangle 9">
-            <a:extLst>
-              <a:ext uri="{FF2B5EF4-FFF2-40B4-BE49-F238E27FC236}">
-                <a16:creationId xmlns:a16="http://schemas.microsoft.com/office/drawing/2014/main" id="{A2B86597-4A71-3D7A-483F-5E005E619DD3}"/>
-              </a:ext>
-            </a:extLst>
-          </p:cNvPr>
-          <p:cNvSpPr>
-            <a:spLocks noGrp="1" noChangeArrowheads="1"/>
-          </p:cNvSpPr>
-          <p:nvPr>
-            <p:ph type="title"/>
-          </p:nvPr>
-        </p:nvSpPr>
-        <p:spPr/>
-        <p:txBody>
-          <a:bodyPr/>
-          <a:lstStyle/>
-          <a:p>
-            <a:pPr eaLnBrk="1" hangingPunct="1"/>
-            <a:r>
-              <a:rPr lang="en-GB" altLang="en-US" sz="3200" dirty="0">
-                <a:solidFill>
-                  <a:schemeClr val="tx1"/>
-                </a:solidFill>
-              </a:rPr>
-              <a:t>Finding a Sum of Integer Values Passed as Command Line Parameters</a:t>
-            </a:r>
-          </a:p>
-        </p:txBody>
-      </p:sp>
-      <p:sp>
-        <p:nvSpPr>
-          <p:cNvPr id="69636" name="Rectangle 13">
-            <a:extLst>
-              <a:ext uri="{FF2B5EF4-FFF2-40B4-BE49-F238E27FC236}">
-                <a16:creationId xmlns:a16="http://schemas.microsoft.com/office/drawing/2014/main" id="{50A86B36-3037-9E0E-C889-7333FCE8818B}"/>
-              </a:ext>
-            </a:extLst>
-          </p:cNvPr>
-          <p:cNvSpPr>
-            <a:spLocks noGrp="1" noChangeArrowheads="1"/>
-          </p:cNvSpPr>
-          <p:nvPr>
-            <p:ph type="body" idx="1"/>
-          </p:nvPr>
-        </p:nvSpPr>
-        <p:spPr>
-          <a:xfrm>
-            <a:off x="76200" y="1219200"/>
-            <a:ext cx="9067800" cy="5181600"/>
-          </a:xfrm>
-        </p:spPr>
-        <p:txBody>
-          <a:bodyPr/>
-          <a:lstStyle/>
-          <a:p>
-            <a:pPr eaLnBrk="1" hangingPunct="1">
-              <a:lnSpc>
-                <a:spcPct val="80000"/>
-              </a:lnSpc>
-              <a:buFont typeface="Wingdings" panose="05000000000000000000" pitchFamily="2" charset="2"/>
-              <a:buNone/>
-            </a:pPr>
-            <a:r>
-              <a:rPr lang="en-GB" altLang="en-US" sz="2300" dirty="0">
-                <a:solidFill>
-                  <a:schemeClr val="tx1"/>
-                </a:solidFill>
-                <a:latin typeface="Courier New" panose="02070309020205020404" pitchFamily="49" charset="0"/>
-                <a:cs typeface="Courier New" panose="02070309020205020404" pitchFamily="49" charset="0"/>
-              </a:rPr>
-              <a:t>public static void main(String </a:t>
-            </a:r>
-            <a:r>
-              <a:rPr lang="en-GB" altLang="en-US" sz="2300" dirty="0" err="1">
-                <a:solidFill>
-                  <a:schemeClr val="tx1"/>
-                </a:solidFill>
-                <a:latin typeface="Courier New" panose="02070309020205020404" pitchFamily="49" charset="0"/>
-                <a:cs typeface="Courier New" panose="02070309020205020404" pitchFamily="49" charset="0"/>
-              </a:rPr>
-              <a:t>args</a:t>
-            </a:r>
-            <a:r>
-              <a:rPr lang="en-GB" altLang="en-US" sz="2300" dirty="0">
-                <a:solidFill>
-                  <a:schemeClr val="tx1"/>
-                </a:solidFill>
-                <a:latin typeface="Courier New" panose="02070309020205020404" pitchFamily="49" charset="0"/>
-                <a:cs typeface="Courier New" panose="02070309020205020404" pitchFamily="49" charset="0"/>
-              </a:rPr>
-              <a:t>[]) {</a:t>
+              <a:t>) {</a:t>
             </a:r>
           </a:p>
           <a:p>
@@ -19731,7 +19766,7 @@
                 <a:latin typeface="Courier New" panose="02070309020205020404" pitchFamily="49" charset="0"/>
                 <a:cs typeface="Courier New" panose="02070309020205020404" pitchFamily="49" charset="0"/>
               </a:rPr>
-              <a:t>args.length</a:t>
+              <a:t>nums.length</a:t>
             </a:r>
             <a:r>
               <a:rPr lang="en-GB" altLang="en-US" sz="2300" dirty="0">
@@ -19829,7 +19864,7 @@
                 <a:latin typeface="Courier New" panose="02070309020205020404" pitchFamily="49" charset="0"/>
                 <a:cs typeface="Courier New" panose="02070309020205020404" pitchFamily="49" charset="0"/>
               </a:rPr>
-              <a:t>args</a:t>
+              <a:t>nums</a:t>
             </a:r>
             <a:r>
               <a:rPr lang="en-GB" altLang="en-US" sz="2300" dirty="0">
@@ -19995,7 +20030,7 @@
                 <a:latin typeface="Courier New" panose="02070309020205020404" pitchFamily="49" charset="0"/>
                 <a:cs typeface="Courier New" panose="02070309020205020404" pitchFamily="49" charset="0"/>
               </a:rPr>
-              <a:t>("Invalid Number: "+</a:t>
+              <a:t>("Invalid Number: "+ </a:t>
             </a:r>
             <a:r>
               <a:rPr lang="en-GB" altLang="en-US" sz="2300" dirty="0" err="1">
@@ -20005,7 +20040,7 @@
                 <a:latin typeface="Courier New" panose="02070309020205020404" pitchFamily="49" charset="0"/>
                 <a:cs typeface="Courier New" panose="02070309020205020404" pitchFamily="49" charset="0"/>
               </a:rPr>
-              <a:t>args</a:t>
+              <a:t>nums</a:t>
             </a:r>
             <a:r>
               <a:rPr lang="en-GB" altLang="en-US" sz="2300" dirty="0">
@@ -20149,7 +20184,7 @@
 </p:sld>
 </file>
 
-<file path=ppt/slides/slide19.xml><?xml version="1.0" encoding="utf-8"?>
+<file path=ppt/slides/slide18.xml><?xml version="1.0" encoding="utf-8"?>
 <p:sld xmlns:a="http://schemas.openxmlformats.org/drawingml/2006/main" xmlns:r="http://schemas.openxmlformats.org/officeDocument/2006/relationships" xmlns:p="http://schemas.openxmlformats.org/presentationml/2006/main">
   <p:cSld>
     <p:spTree>
@@ -20344,7 +20379,7 @@
                 <a:tabLst/>
                 <a:defRPr/>
               </a:pPr>
-              <a:t>19</a:t>
+              <a:t>18</a:t>
             </a:fld>
             <a:endParaRPr kumimoji="0" lang="en-GB" altLang="zh-CN" sz="1400" b="0" i="0" u="none" strike="noStrike" kern="1200" cap="none" spc="0" normalizeH="0" baseline="0" noProof="0">
               <a:ln>
@@ -20602,364 +20637,7 @@
 </p:sld>
 </file>
 
-<file path=ppt/slides/slide2.xml><?xml version="1.0" encoding="utf-8"?>
-<p:sld xmlns:a="http://schemas.openxmlformats.org/drawingml/2006/main" xmlns:r="http://schemas.openxmlformats.org/officeDocument/2006/relationships" xmlns:p="http://schemas.openxmlformats.org/presentationml/2006/main">
-  <p:cSld>
-    <p:spTree>
-      <p:nvGrpSpPr>
-        <p:cNvPr id="1" name=""/>
-        <p:cNvGrpSpPr/>
-        <p:nvPr/>
-      </p:nvGrpSpPr>
-      <p:grpSpPr>
-        <a:xfrm>
-          <a:off x="0" y="0"/>
-          <a:ext cx="0" cy="0"/>
-          <a:chOff x="0" y="0"/>
-          <a:chExt cx="0" cy="0"/>
-        </a:xfrm>
-      </p:grpSpPr>
-      <p:sp>
-        <p:nvSpPr>
-          <p:cNvPr id="36866" name="Title 1">
-            <a:extLst>
-              <a:ext uri="{FF2B5EF4-FFF2-40B4-BE49-F238E27FC236}">
-                <a16:creationId xmlns:a16="http://schemas.microsoft.com/office/drawing/2014/main" id="{B5742F0B-9FF6-DB7F-B7AA-B922D61C3737}"/>
-              </a:ext>
-            </a:extLst>
-          </p:cNvPr>
-          <p:cNvSpPr>
-            <a:spLocks noGrp="1"/>
-          </p:cNvSpPr>
-          <p:nvPr>
-            <p:ph type="title"/>
-          </p:nvPr>
-        </p:nvSpPr>
-        <p:spPr>
-          <a:xfrm>
-            <a:off x="685800" y="304800"/>
-            <a:ext cx="7772400" cy="1143000"/>
-          </a:xfrm>
-        </p:spPr>
-        <p:txBody>
-          <a:bodyPr/>
-          <a:lstStyle/>
-          <a:p>
-            <a:r>
-              <a:rPr lang="en-US" altLang="en-US" sz="5400" b="1" dirty="0">
-                <a:solidFill>
-                  <a:schemeClr val="tx1"/>
-                </a:solidFill>
-                <a:latin typeface="Abadi" panose="020B0604020104020204" pitchFamily="34" charset="0"/>
-              </a:rPr>
-              <a:t>Why Exceptions?</a:t>
-            </a:r>
-          </a:p>
-        </p:txBody>
-      </p:sp>
-      <p:sp>
-        <p:nvSpPr>
-          <p:cNvPr id="36868" name="Rectangle 3">
-            <a:extLst>
-              <a:ext uri="{FF2B5EF4-FFF2-40B4-BE49-F238E27FC236}">
-                <a16:creationId xmlns:a16="http://schemas.microsoft.com/office/drawing/2014/main" id="{BC14B05C-ADF4-A308-FA9F-250677B0EC1A}"/>
-              </a:ext>
-            </a:extLst>
-          </p:cNvPr>
-          <p:cNvSpPr txBox="1">
-            <a:spLocks noRot="1" noChangeArrowheads="1"/>
-          </p:cNvSpPr>
-          <p:nvPr/>
-        </p:nvSpPr>
-        <p:spPr bwMode="auto">
-          <a:xfrm>
-            <a:off x="914400" y="1828800"/>
-            <a:ext cx="7772400" cy="4953000"/>
-          </a:xfrm>
-          <a:prstGeom prst="rect">
-            <a:avLst/>
-          </a:prstGeom>
-          <a:noFill/>
-          <a:ln>
-            <a:noFill/>
-          </a:ln>
-          <a:effectLst/>
-          <a:extLst>
-            <a:ext uri="{909E8E84-426E-40DD-AFC4-6F175D3DCCD1}">
-              <a14:hiddenFill xmlns:a14="http://schemas.microsoft.com/office/drawing/2010/main">
-                <a:solidFill>
-                  <a:schemeClr val="accent1"/>
-                </a:solidFill>
-              </a14:hiddenFill>
-            </a:ext>
-            <a:ext uri="{91240B29-F687-4F45-9708-019B960494DF}">
-              <a14:hiddenLine xmlns:a14="http://schemas.microsoft.com/office/drawing/2010/main" w="9525">
-                <a:solidFill>
-                  <a:schemeClr val="tx1"/>
-                </a:solidFill>
-                <a:miter lim="800000"/>
-                <a:headEnd/>
-                <a:tailEnd/>
-              </a14:hiddenLine>
-            </a:ext>
-            <a:ext uri="{AF507438-7753-43E0-B8FC-AC1667EBCBE1}">
-              <a14:hiddenEffects xmlns:a14="http://schemas.microsoft.com/office/drawing/2010/main">
-                <a:effectLst>
-                  <a:outerShdw dist="35921" dir="2700000" algn="ctr" rotWithShape="0">
-                    <a:schemeClr val="bg2"/>
-                  </a:outerShdw>
-                </a:effectLst>
-              </a14:hiddenEffects>
-            </a:ext>
-          </a:extLst>
-        </p:spPr>
-        <p:txBody>
-          <a:bodyPr/>
-          <a:lstStyle>
-            <a:lvl1pPr marL="342900" indent="-342900" eaLnBrk="0" hangingPunct="0">
-              <a:defRPr sz="1600">
-                <a:solidFill>
-                  <a:schemeClr val="tx1"/>
-                </a:solidFill>
-                <a:latin typeface="Tahoma" panose="020B0604030504040204" pitchFamily="34" charset="0"/>
-                <a:ea typeface="SimSun" panose="02010600030101010101" pitchFamily="2" charset="-122"/>
-              </a:defRPr>
-            </a:lvl1pPr>
-            <a:lvl2pPr marL="742950" indent="-285750" eaLnBrk="0" hangingPunct="0">
-              <a:defRPr sz="1600">
-                <a:solidFill>
-                  <a:schemeClr val="tx1"/>
-                </a:solidFill>
-                <a:latin typeface="Tahoma" panose="020B0604030504040204" pitchFamily="34" charset="0"/>
-                <a:ea typeface="SimSun" panose="02010600030101010101" pitchFamily="2" charset="-122"/>
-              </a:defRPr>
-            </a:lvl2pPr>
-            <a:lvl3pPr marL="1143000" indent="-228600" eaLnBrk="0" hangingPunct="0">
-              <a:defRPr sz="1600">
-                <a:solidFill>
-                  <a:schemeClr val="tx1"/>
-                </a:solidFill>
-                <a:latin typeface="Tahoma" panose="020B0604030504040204" pitchFamily="34" charset="0"/>
-                <a:ea typeface="SimSun" panose="02010600030101010101" pitchFamily="2" charset="-122"/>
-              </a:defRPr>
-            </a:lvl3pPr>
-            <a:lvl4pPr marL="1600200" indent="-228600" eaLnBrk="0" hangingPunct="0">
-              <a:defRPr sz="1600">
-                <a:solidFill>
-                  <a:schemeClr val="tx1"/>
-                </a:solidFill>
-                <a:latin typeface="Tahoma" panose="020B0604030504040204" pitchFamily="34" charset="0"/>
-                <a:ea typeface="SimSun" panose="02010600030101010101" pitchFamily="2" charset="-122"/>
-              </a:defRPr>
-            </a:lvl4pPr>
-            <a:lvl5pPr marL="2057400" indent="-228600" eaLnBrk="0" hangingPunct="0">
-              <a:defRPr sz="1600">
-                <a:solidFill>
-                  <a:schemeClr val="tx1"/>
-                </a:solidFill>
-                <a:latin typeface="Tahoma" panose="020B0604030504040204" pitchFamily="34" charset="0"/>
-                <a:ea typeface="SimSun" panose="02010600030101010101" pitchFamily="2" charset="-122"/>
-              </a:defRPr>
-            </a:lvl5pPr>
-            <a:lvl6pPr marL="2514600" indent="-228600" algn="ctr" eaLnBrk="0" fontAlgn="base" hangingPunct="0">
-              <a:spcBef>
-                <a:spcPct val="0"/>
-              </a:spcBef>
-              <a:spcAft>
-                <a:spcPct val="0"/>
-              </a:spcAft>
-              <a:defRPr sz="1600">
-                <a:solidFill>
-                  <a:schemeClr val="tx1"/>
-                </a:solidFill>
-                <a:latin typeface="Tahoma" panose="020B0604030504040204" pitchFamily="34" charset="0"/>
-                <a:ea typeface="SimSun" panose="02010600030101010101" pitchFamily="2" charset="-122"/>
-              </a:defRPr>
-            </a:lvl6pPr>
-            <a:lvl7pPr marL="2971800" indent="-228600" algn="ctr" eaLnBrk="0" fontAlgn="base" hangingPunct="0">
-              <a:spcBef>
-                <a:spcPct val="0"/>
-              </a:spcBef>
-              <a:spcAft>
-                <a:spcPct val="0"/>
-              </a:spcAft>
-              <a:defRPr sz="1600">
-                <a:solidFill>
-                  <a:schemeClr val="tx1"/>
-                </a:solidFill>
-                <a:latin typeface="Tahoma" panose="020B0604030504040204" pitchFamily="34" charset="0"/>
-                <a:ea typeface="SimSun" panose="02010600030101010101" pitchFamily="2" charset="-122"/>
-              </a:defRPr>
-            </a:lvl7pPr>
-            <a:lvl8pPr marL="3429000" indent="-228600" algn="ctr" eaLnBrk="0" fontAlgn="base" hangingPunct="0">
-              <a:spcBef>
-                <a:spcPct val="0"/>
-              </a:spcBef>
-              <a:spcAft>
-                <a:spcPct val="0"/>
-              </a:spcAft>
-              <a:defRPr sz="1600">
-                <a:solidFill>
-                  <a:schemeClr val="tx1"/>
-                </a:solidFill>
-                <a:latin typeface="Tahoma" panose="020B0604030504040204" pitchFamily="34" charset="0"/>
-                <a:ea typeface="SimSun" panose="02010600030101010101" pitchFamily="2" charset="-122"/>
-              </a:defRPr>
-            </a:lvl8pPr>
-            <a:lvl9pPr marL="3886200" indent="-228600" algn="ctr" eaLnBrk="0" fontAlgn="base" hangingPunct="0">
-              <a:spcBef>
-                <a:spcPct val="0"/>
-              </a:spcBef>
-              <a:spcAft>
-                <a:spcPct val="0"/>
-              </a:spcAft>
-              <a:defRPr sz="1600">
-                <a:solidFill>
-                  <a:schemeClr val="tx1"/>
-                </a:solidFill>
-                <a:latin typeface="Tahoma" panose="020B0604030504040204" pitchFamily="34" charset="0"/>
-                <a:ea typeface="SimSun" panose="02010600030101010101" pitchFamily="2" charset="-122"/>
-              </a:defRPr>
-            </a:lvl9pPr>
-          </a:lstStyle>
-          <a:p>
-            <a:pPr algn="l" eaLnBrk="1" hangingPunct="1">
-              <a:spcBef>
-                <a:spcPct val="20000"/>
-              </a:spcBef>
-              <a:spcAft>
-                <a:spcPts val="1200"/>
-              </a:spcAft>
-              <a:buClr>
-                <a:schemeClr val="tx1"/>
-              </a:buClr>
-              <a:buSzPct val="60000"/>
-              <a:buFont typeface="Wingdings" panose="05000000000000000000" pitchFamily="2" charset="2"/>
-              <a:buChar char="n"/>
-            </a:pPr>
-            <a:r>
-              <a:rPr lang="en-US" altLang="en-US" sz="2800" dirty="0"/>
-              <a:t>We seek </a:t>
-            </a:r>
-            <a:r>
-              <a:rPr lang="en-US" altLang="en-US" sz="2800" u="sng" dirty="0"/>
-              <a:t>robust</a:t>
-            </a:r>
-            <a:r>
-              <a:rPr lang="en-US" altLang="en-US" sz="2800" dirty="0"/>
-              <a:t> programs</a:t>
-            </a:r>
-          </a:p>
-          <a:p>
-            <a:pPr algn="l" eaLnBrk="1" hangingPunct="1">
-              <a:spcBef>
-                <a:spcPct val="20000"/>
-              </a:spcBef>
-              <a:buClr>
-                <a:schemeClr val="tx1"/>
-              </a:buClr>
-              <a:buSzPct val="60000"/>
-              <a:buFont typeface="Wingdings" panose="05000000000000000000" pitchFamily="2" charset="2"/>
-              <a:buChar char="n"/>
-            </a:pPr>
-            <a:r>
-              <a:rPr lang="en-US" altLang="en-US" sz="2800" dirty="0"/>
-              <a:t>When something unexpected occurs</a:t>
-            </a:r>
-          </a:p>
-          <a:p>
-            <a:pPr lvl="1" algn="l" eaLnBrk="1" hangingPunct="1">
-              <a:spcBef>
-                <a:spcPct val="20000"/>
-              </a:spcBef>
-              <a:buClr>
-                <a:schemeClr val="tx1"/>
-              </a:buClr>
-              <a:buSzPct val="55000"/>
-              <a:buFont typeface="Wingdings" panose="05000000000000000000" pitchFamily="2" charset="2"/>
-              <a:buChar char="n"/>
-            </a:pPr>
-            <a:r>
-              <a:rPr lang="en-US" altLang="en-US" sz="2400" dirty="0"/>
-              <a:t>Ensure program detects the problem</a:t>
-            </a:r>
-          </a:p>
-          <a:p>
-            <a:pPr lvl="1" algn="l" eaLnBrk="1" hangingPunct="1">
-              <a:spcBef>
-                <a:spcPct val="20000"/>
-              </a:spcBef>
-              <a:spcAft>
-                <a:spcPts val="1200"/>
-              </a:spcAft>
-              <a:buClr>
-                <a:schemeClr val="tx1"/>
-              </a:buClr>
-              <a:buSzPct val="55000"/>
-              <a:buFont typeface="Wingdings" panose="05000000000000000000" pitchFamily="2" charset="2"/>
-              <a:buChar char="n"/>
-            </a:pPr>
-            <a:r>
-              <a:rPr lang="en-US" altLang="en-US" sz="2400" dirty="0"/>
-              <a:t>Then program must do something about it</a:t>
-            </a:r>
-          </a:p>
-          <a:p>
-            <a:pPr algn="l" eaLnBrk="1" hangingPunct="1">
-              <a:spcBef>
-                <a:spcPct val="20000"/>
-              </a:spcBef>
-              <a:spcAft>
-                <a:spcPts val="1200"/>
-              </a:spcAft>
-              <a:buClr>
-                <a:schemeClr val="tx1"/>
-              </a:buClr>
-              <a:buSzPct val="60000"/>
-              <a:buFont typeface="Wingdings" panose="05000000000000000000" pitchFamily="2" charset="2"/>
-              <a:buChar char="n"/>
-            </a:pPr>
-            <a:r>
-              <a:rPr lang="en-US" altLang="en-US" sz="2800" dirty="0"/>
-              <a:t>Extensive testing of special situations can result in "spaghetti code"</a:t>
-            </a:r>
-          </a:p>
-          <a:p>
-            <a:pPr algn="l" eaLnBrk="1" hangingPunct="1">
-              <a:spcBef>
-                <a:spcPct val="20000"/>
-              </a:spcBef>
-              <a:buClr>
-                <a:schemeClr val="tx1"/>
-              </a:buClr>
-              <a:buSzPct val="60000"/>
-              <a:buFont typeface="Wingdings" panose="05000000000000000000" pitchFamily="2" charset="2"/>
-              <a:buChar char="n"/>
-            </a:pPr>
-            <a:r>
-              <a:rPr lang="en-US" altLang="en-US" sz="2800" dirty="0"/>
-              <a:t>We need mechanism to check for problem where it could occur</a:t>
-            </a:r>
-          </a:p>
-        </p:txBody>
-      </p:sp>
-    </p:spTree>
-  </p:cSld>
-  <p:clrMapOvr>
-    <a:masterClrMapping/>
-  </p:clrMapOvr>
-  <mc:AlternateContent xmlns:mc="http://schemas.openxmlformats.org/markup-compatibility/2006" xmlns:p14="http://schemas.microsoft.com/office/powerpoint/2010/main">
-    <mc:Choice Requires="p14">
-      <p:transition spd="slow" p14:dur="2000" advTm="1000"/>
-    </mc:Choice>
-    <mc:Fallback xmlns="">
-      <p:transition spd="slow" advTm="1000"/>
-    </mc:Fallback>
-  </mc:AlternateContent>
-</p:sld>
-</file>
-
-<file path=ppt/slides/slide20.xml><?xml version="1.0" encoding="utf-8"?>
+<file path=ppt/slides/slide19.xml><?xml version="1.0" encoding="utf-8"?>
 <p:sld xmlns:a="http://schemas.openxmlformats.org/drawingml/2006/main" xmlns:r="http://schemas.openxmlformats.org/officeDocument/2006/relationships" xmlns:p="http://schemas.openxmlformats.org/presentationml/2006/main">
   <p:cSld>
     <p:spTree>
@@ -21498,7 +21176,364 @@
 </p:sld>
 </file>
 
-<file path=ppt/slides/slide21.xml><?xml version="1.0" encoding="utf-8"?>
+<file path=ppt/slides/slide2.xml><?xml version="1.0" encoding="utf-8"?>
+<p:sld xmlns:a="http://schemas.openxmlformats.org/drawingml/2006/main" xmlns:r="http://schemas.openxmlformats.org/officeDocument/2006/relationships" xmlns:p="http://schemas.openxmlformats.org/presentationml/2006/main">
+  <p:cSld>
+    <p:spTree>
+      <p:nvGrpSpPr>
+        <p:cNvPr id="1" name=""/>
+        <p:cNvGrpSpPr/>
+        <p:nvPr/>
+      </p:nvGrpSpPr>
+      <p:grpSpPr>
+        <a:xfrm>
+          <a:off x="0" y="0"/>
+          <a:ext cx="0" cy="0"/>
+          <a:chOff x="0" y="0"/>
+          <a:chExt cx="0" cy="0"/>
+        </a:xfrm>
+      </p:grpSpPr>
+      <p:sp>
+        <p:nvSpPr>
+          <p:cNvPr id="36866" name="Title 1">
+            <a:extLst>
+              <a:ext uri="{FF2B5EF4-FFF2-40B4-BE49-F238E27FC236}">
+                <a16:creationId xmlns:a16="http://schemas.microsoft.com/office/drawing/2014/main" id="{B5742F0B-9FF6-DB7F-B7AA-B922D61C3737}"/>
+              </a:ext>
+            </a:extLst>
+          </p:cNvPr>
+          <p:cNvSpPr>
+            <a:spLocks noGrp="1"/>
+          </p:cNvSpPr>
+          <p:nvPr>
+            <p:ph type="title"/>
+          </p:nvPr>
+        </p:nvSpPr>
+        <p:spPr>
+          <a:xfrm>
+            <a:off x="685800" y="304800"/>
+            <a:ext cx="7772400" cy="1143000"/>
+          </a:xfrm>
+        </p:spPr>
+        <p:txBody>
+          <a:bodyPr/>
+          <a:lstStyle/>
+          <a:p>
+            <a:r>
+              <a:rPr lang="en-US" altLang="en-US" sz="5400" b="1" dirty="0">
+                <a:solidFill>
+                  <a:schemeClr val="tx1"/>
+                </a:solidFill>
+                <a:latin typeface="Abadi" panose="020B0604020104020204" pitchFamily="34" charset="0"/>
+              </a:rPr>
+              <a:t>Why Exceptions?</a:t>
+            </a:r>
+          </a:p>
+        </p:txBody>
+      </p:sp>
+      <p:sp>
+        <p:nvSpPr>
+          <p:cNvPr id="36868" name="Rectangle 3">
+            <a:extLst>
+              <a:ext uri="{FF2B5EF4-FFF2-40B4-BE49-F238E27FC236}">
+                <a16:creationId xmlns:a16="http://schemas.microsoft.com/office/drawing/2014/main" id="{BC14B05C-ADF4-A308-FA9F-250677B0EC1A}"/>
+              </a:ext>
+            </a:extLst>
+          </p:cNvPr>
+          <p:cNvSpPr txBox="1">
+            <a:spLocks noRot="1" noChangeArrowheads="1"/>
+          </p:cNvSpPr>
+          <p:nvPr/>
+        </p:nvSpPr>
+        <p:spPr bwMode="auto">
+          <a:xfrm>
+            <a:off x="914400" y="1828800"/>
+            <a:ext cx="7772400" cy="4953000"/>
+          </a:xfrm>
+          <a:prstGeom prst="rect">
+            <a:avLst/>
+          </a:prstGeom>
+          <a:noFill/>
+          <a:ln>
+            <a:noFill/>
+          </a:ln>
+          <a:effectLst/>
+          <a:extLst>
+            <a:ext uri="{909E8E84-426E-40DD-AFC4-6F175D3DCCD1}">
+              <a14:hiddenFill xmlns:a14="http://schemas.microsoft.com/office/drawing/2010/main">
+                <a:solidFill>
+                  <a:schemeClr val="accent1"/>
+                </a:solidFill>
+              </a14:hiddenFill>
+            </a:ext>
+            <a:ext uri="{91240B29-F687-4F45-9708-019B960494DF}">
+              <a14:hiddenLine xmlns:a14="http://schemas.microsoft.com/office/drawing/2010/main" w="9525">
+                <a:solidFill>
+                  <a:schemeClr val="tx1"/>
+                </a:solidFill>
+                <a:miter lim="800000"/>
+                <a:headEnd/>
+                <a:tailEnd/>
+              </a14:hiddenLine>
+            </a:ext>
+            <a:ext uri="{AF507438-7753-43E0-B8FC-AC1667EBCBE1}">
+              <a14:hiddenEffects xmlns:a14="http://schemas.microsoft.com/office/drawing/2010/main">
+                <a:effectLst>
+                  <a:outerShdw dist="35921" dir="2700000" algn="ctr" rotWithShape="0">
+                    <a:schemeClr val="bg2"/>
+                  </a:outerShdw>
+                </a:effectLst>
+              </a14:hiddenEffects>
+            </a:ext>
+          </a:extLst>
+        </p:spPr>
+        <p:txBody>
+          <a:bodyPr/>
+          <a:lstStyle>
+            <a:lvl1pPr marL="342900" indent="-342900" eaLnBrk="0" hangingPunct="0">
+              <a:defRPr sz="1600">
+                <a:solidFill>
+                  <a:schemeClr val="tx1"/>
+                </a:solidFill>
+                <a:latin typeface="Tahoma" panose="020B0604030504040204" pitchFamily="34" charset="0"/>
+                <a:ea typeface="SimSun" panose="02010600030101010101" pitchFamily="2" charset="-122"/>
+              </a:defRPr>
+            </a:lvl1pPr>
+            <a:lvl2pPr marL="742950" indent="-285750" eaLnBrk="0" hangingPunct="0">
+              <a:defRPr sz="1600">
+                <a:solidFill>
+                  <a:schemeClr val="tx1"/>
+                </a:solidFill>
+                <a:latin typeface="Tahoma" panose="020B0604030504040204" pitchFamily="34" charset="0"/>
+                <a:ea typeface="SimSun" panose="02010600030101010101" pitchFamily="2" charset="-122"/>
+              </a:defRPr>
+            </a:lvl2pPr>
+            <a:lvl3pPr marL="1143000" indent="-228600" eaLnBrk="0" hangingPunct="0">
+              <a:defRPr sz="1600">
+                <a:solidFill>
+                  <a:schemeClr val="tx1"/>
+                </a:solidFill>
+                <a:latin typeface="Tahoma" panose="020B0604030504040204" pitchFamily="34" charset="0"/>
+                <a:ea typeface="SimSun" panose="02010600030101010101" pitchFamily="2" charset="-122"/>
+              </a:defRPr>
+            </a:lvl3pPr>
+            <a:lvl4pPr marL="1600200" indent="-228600" eaLnBrk="0" hangingPunct="0">
+              <a:defRPr sz="1600">
+                <a:solidFill>
+                  <a:schemeClr val="tx1"/>
+                </a:solidFill>
+                <a:latin typeface="Tahoma" panose="020B0604030504040204" pitchFamily="34" charset="0"/>
+                <a:ea typeface="SimSun" panose="02010600030101010101" pitchFamily="2" charset="-122"/>
+              </a:defRPr>
+            </a:lvl4pPr>
+            <a:lvl5pPr marL="2057400" indent="-228600" eaLnBrk="0" hangingPunct="0">
+              <a:defRPr sz="1600">
+                <a:solidFill>
+                  <a:schemeClr val="tx1"/>
+                </a:solidFill>
+                <a:latin typeface="Tahoma" panose="020B0604030504040204" pitchFamily="34" charset="0"/>
+                <a:ea typeface="SimSun" panose="02010600030101010101" pitchFamily="2" charset="-122"/>
+              </a:defRPr>
+            </a:lvl5pPr>
+            <a:lvl6pPr marL="2514600" indent="-228600" algn="ctr" eaLnBrk="0" fontAlgn="base" hangingPunct="0">
+              <a:spcBef>
+                <a:spcPct val="0"/>
+              </a:spcBef>
+              <a:spcAft>
+                <a:spcPct val="0"/>
+              </a:spcAft>
+              <a:defRPr sz="1600">
+                <a:solidFill>
+                  <a:schemeClr val="tx1"/>
+                </a:solidFill>
+                <a:latin typeface="Tahoma" panose="020B0604030504040204" pitchFamily="34" charset="0"/>
+                <a:ea typeface="SimSun" panose="02010600030101010101" pitchFamily="2" charset="-122"/>
+              </a:defRPr>
+            </a:lvl6pPr>
+            <a:lvl7pPr marL="2971800" indent="-228600" algn="ctr" eaLnBrk="0" fontAlgn="base" hangingPunct="0">
+              <a:spcBef>
+                <a:spcPct val="0"/>
+              </a:spcBef>
+              <a:spcAft>
+                <a:spcPct val="0"/>
+              </a:spcAft>
+              <a:defRPr sz="1600">
+                <a:solidFill>
+                  <a:schemeClr val="tx1"/>
+                </a:solidFill>
+                <a:latin typeface="Tahoma" panose="020B0604030504040204" pitchFamily="34" charset="0"/>
+                <a:ea typeface="SimSun" panose="02010600030101010101" pitchFamily="2" charset="-122"/>
+              </a:defRPr>
+            </a:lvl7pPr>
+            <a:lvl8pPr marL="3429000" indent="-228600" algn="ctr" eaLnBrk="0" fontAlgn="base" hangingPunct="0">
+              <a:spcBef>
+                <a:spcPct val="0"/>
+              </a:spcBef>
+              <a:spcAft>
+                <a:spcPct val="0"/>
+              </a:spcAft>
+              <a:defRPr sz="1600">
+                <a:solidFill>
+                  <a:schemeClr val="tx1"/>
+                </a:solidFill>
+                <a:latin typeface="Tahoma" panose="020B0604030504040204" pitchFamily="34" charset="0"/>
+                <a:ea typeface="SimSun" panose="02010600030101010101" pitchFamily="2" charset="-122"/>
+              </a:defRPr>
+            </a:lvl8pPr>
+            <a:lvl9pPr marL="3886200" indent="-228600" algn="ctr" eaLnBrk="0" fontAlgn="base" hangingPunct="0">
+              <a:spcBef>
+                <a:spcPct val="0"/>
+              </a:spcBef>
+              <a:spcAft>
+                <a:spcPct val="0"/>
+              </a:spcAft>
+              <a:defRPr sz="1600">
+                <a:solidFill>
+                  <a:schemeClr val="tx1"/>
+                </a:solidFill>
+                <a:latin typeface="Tahoma" panose="020B0604030504040204" pitchFamily="34" charset="0"/>
+                <a:ea typeface="SimSun" panose="02010600030101010101" pitchFamily="2" charset="-122"/>
+              </a:defRPr>
+            </a:lvl9pPr>
+          </a:lstStyle>
+          <a:p>
+            <a:pPr algn="l" eaLnBrk="1" hangingPunct="1">
+              <a:spcBef>
+                <a:spcPct val="20000"/>
+              </a:spcBef>
+              <a:spcAft>
+                <a:spcPts val="1200"/>
+              </a:spcAft>
+              <a:buClr>
+                <a:schemeClr val="tx1"/>
+              </a:buClr>
+              <a:buSzPct val="60000"/>
+              <a:buFont typeface="Wingdings" panose="05000000000000000000" pitchFamily="2" charset="2"/>
+              <a:buChar char="n"/>
+            </a:pPr>
+            <a:r>
+              <a:rPr lang="en-US" altLang="en-US" sz="2800" dirty="0"/>
+              <a:t>We seek </a:t>
+            </a:r>
+            <a:r>
+              <a:rPr lang="en-US" altLang="en-US" sz="2800" u="sng" dirty="0"/>
+              <a:t>robust</a:t>
+            </a:r>
+            <a:r>
+              <a:rPr lang="en-US" altLang="en-US" sz="2800" dirty="0"/>
+              <a:t> programs</a:t>
+            </a:r>
+          </a:p>
+          <a:p>
+            <a:pPr algn="l" eaLnBrk="1" hangingPunct="1">
+              <a:spcBef>
+                <a:spcPct val="20000"/>
+              </a:spcBef>
+              <a:buClr>
+                <a:schemeClr val="tx1"/>
+              </a:buClr>
+              <a:buSzPct val="60000"/>
+              <a:buFont typeface="Wingdings" panose="05000000000000000000" pitchFamily="2" charset="2"/>
+              <a:buChar char="n"/>
+            </a:pPr>
+            <a:r>
+              <a:rPr lang="en-US" altLang="en-US" sz="2800" dirty="0"/>
+              <a:t>When something unexpected occurs</a:t>
+            </a:r>
+          </a:p>
+          <a:p>
+            <a:pPr lvl="1" algn="l" eaLnBrk="1" hangingPunct="1">
+              <a:spcBef>
+                <a:spcPct val="20000"/>
+              </a:spcBef>
+              <a:buClr>
+                <a:schemeClr val="tx1"/>
+              </a:buClr>
+              <a:buSzPct val="55000"/>
+              <a:buFont typeface="Wingdings" panose="05000000000000000000" pitchFamily="2" charset="2"/>
+              <a:buChar char="n"/>
+            </a:pPr>
+            <a:r>
+              <a:rPr lang="en-US" altLang="en-US" sz="2400" dirty="0"/>
+              <a:t>Ensure program detects the problem</a:t>
+            </a:r>
+          </a:p>
+          <a:p>
+            <a:pPr lvl="1" algn="l" eaLnBrk="1" hangingPunct="1">
+              <a:spcBef>
+                <a:spcPct val="20000"/>
+              </a:spcBef>
+              <a:spcAft>
+                <a:spcPts val="1200"/>
+              </a:spcAft>
+              <a:buClr>
+                <a:schemeClr val="tx1"/>
+              </a:buClr>
+              <a:buSzPct val="55000"/>
+              <a:buFont typeface="Wingdings" panose="05000000000000000000" pitchFamily="2" charset="2"/>
+              <a:buChar char="n"/>
+            </a:pPr>
+            <a:r>
+              <a:rPr lang="en-US" altLang="en-US" sz="2400" dirty="0"/>
+              <a:t>Then program must do something about it</a:t>
+            </a:r>
+          </a:p>
+          <a:p>
+            <a:pPr algn="l" eaLnBrk="1" hangingPunct="1">
+              <a:spcBef>
+                <a:spcPct val="20000"/>
+              </a:spcBef>
+              <a:spcAft>
+                <a:spcPts val="1200"/>
+              </a:spcAft>
+              <a:buClr>
+                <a:schemeClr val="tx1"/>
+              </a:buClr>
+              <a:buSzPct val="60000"/>
+              <a:buFont typeface="Wingdings" panose="05000000000000000000" pitchFamily="2" charset="2"/>
+              <a:buChar char="n"/>
+            </a:pPr>
+            <a:r>
+              <a:rPr lang="en-US" altLang="en-US" sz="2800" dirty="0"/>
+              <a:t>Extensive testing of special situations can result in "spaghetti code"</a:t>
+            </a:r>
+          </a:p>
+          <a:p>
+            <a:pPr algn="l" eaLnBrk="1" hangingPunct="1">
+              <a:spcBef>
+                <a:spcPct val="20000"/>
+              </a:spcBef>
+              <a:buClr>
+                <a:schemeClr val="tx1"/>
+              </a:buClr>
+              <a:buSzPct val="60000"/>
+              <a:buFont typeface="Wingdings" panose="05000000000000000000" pitchFamily="2" charset="2"/>
+              <a:buChar char="n"/>
+            </a:pPr>
+            <a:r>
+              <a:rPr lang="en-US" altLang="en-US" sz="2800" dirty="0"/>
+              <a:t>We need mechanism to check for problem where it could occur</a:t>
+            </a:r>
+          </a:p>
+        </p:txBody>
+      </p:sp>
+    </p:spTree>
+  </p:cSld>
+  <p:clrMapOvr>
+    <a:masterClrMapping/>
+  </p:clrMapOvr>
+  <mc:AlternateContent xmlns:mc="http://schemas.openxmlformats.org/markup-compatibility/2006" xmlns:p14="http://schemas.microsoft.com/office/powerpoint/2010/main">
+    <mc:Choice Requires="p14">
+      <p:transition spd="slow" p14:dur="2000" advTm="1000"/>
+    </mc:Choice>
+    <mc:Fallback xmlns="">
+      <p:transition spd="slow" advTm="1000"/>
+    </mc:Fallback>
+  </mc:AlternateContent>
+</p:sld>
+</file>
+
+<file path=ppt/slides/slide20.xml><?xml version="1.0" encoding="utf-8"?>
 <p:sld xmlns:a="http://schemas.openxmlformats.org/drawingml/2006/main" xmlns:r="http://schemas.openxmlformats.org/officeDocument/2006/relationships" xmlns:p="http://schemas.openxmlformats.org/presentationml/2006/main">
   <p:cSld>
     <p:spTree>
@@ -21687,7 +21722,7 @@
 </p:sld>
 </file>
 
-<file path=ppt/slides/slide22.xml><?xml version="1.0" encoding="utf-8"?>
+<file path=ppt/slides/slide21.xml><?xml version="1.0" encoding="utf-8"?>
 <p:sld xmlns:a="http://schemas.openxmlformats.org/drawingml/2006/main" xmlns:r="http://schemas.openxmlformats.org/officeDocument/2006/relationships" xmlns:p="http://schemas.openxmlformats.org/presentationml/2006/main">
   <p:cSld>
     <p:spTree>
@@ -22152,6 +22187,598 @@
                 <a:latin typeface="Arial" panose="020B0604020202020204" pitchFamily="34" charset="0"/>
               </a:rPr>
               <a:t> clause. </a:t>
+            </a:r>
+          </a:p>
+        </p:txBody>
+      </p:sp>
+    </p:spTree>
+  </p:cSld>
+  <p:clrMapOvr>
+    <a:masterClrMapping/>
+  </p:clrMapOvr>
+  <p:timing>
+    <p:tnLst>
+      <p:par>
+        <p:cTn id="1" dur="indefinite" restart="never" nodeType="tmRoot">
+          <p:childTnLst>
+            <p:seq concurrent="1" nextAc="seek">
+              <p:cTn id="2" dur="indefinite" nodeType="mainSeq">
+                <p:childTnLst>
+                  <p:par>
+                    <p:cTn id="3" fill="hold">
+                      <p:stCondLst>
+                        <p:cond delay="indefinite"/>
+                      </p:stCondLst>
+                      <p:childTnLst>
+                        <p:par>
+                          <p:cTn id="4" fill="hold">
+                            <p:stCondLst>
+                              <p:cond delay="0"/>
+                            </p:stCondLst>
+                            <p:childTnLst>
+                              <p:par>
+                                <p:cTn id="5" presetID="1" presetClass="entr" presetSubtype="0" fill="hold" grpId="0" nodeType="clickEffect">
+                                  <p:stCondLst>
+                                    <p:cond delay="0"/>
+                                  </p:stCondLst>
+                                  <p:childTnLst>
+                                    <p:set>
+                                      <p:cBhvr>
+                                        <p:cTn id="6" dur="1" fill="hold">
+                                          <p:stCondLst>
+                                            <p:cond delay="0"/>
+                                          </p:stCondLst>
+                                        </p:cTn>
+                                        <p:tgtEl>
+                                          <p:spTgt spid="4"/>
+                                        </p:tgtEl>
+                                        <p:attrNameLst>
+                                          <p:attrName>style.visibility</p:attrName>
+                                        </p:attrNameLst>
+                                      </p:cBhvr>
+                                      <p:to>
+                                        <p:strVal val="visible"/>
+                                      </p:to>
+                                    </p:set>
+                                  </p:childTnLst>
+                                </p:cTn>
+                              </p:par>
+                            </p:childTnLst>
+                          </p:cTn>
+                        </p:par>
+                      </p:childTnLst>
+                    </p:cTn>
+                  </p:par>
+                </p:childTnLst>
+              </p:cTn>
+              <p:prevCondLst>
+                <p:cond evt="onPrev" delay="0">
+                  <p:tgtEl>
+                    <p:sldTgt/>
+                  </p:tgtEl>
+                </p:cond>
+              </p:prevCondLst>
+              <p:nextCondLst>
+                <p:cond evt="onNext" delay="0">
+                  <p:tgtEl>
+                    <p:sldTgt/>
+                  </p:tgtEl>
+                </p:cond>
+              </p:nextCondLst>
+            </p:seq>
+          </p:childTnLst>
+        </p:cTn>
+      </p:par>
+    </p:tnLst>
+    <p:bldLst>
+      <p:bldP spid="4" grpId="0"/>
+    </p:bldLst>
+  </p:timing>
+</p:sld>
+</file>
+
+<file path=ppt/slides/slide22.xml><?xml version="1.0" encoding="utf-8"?>
+<p:sld xmlns:a="http://schemas.openxmlformats.org/drawingml/2006/main" xmlns:r="http://schemas.openxmlformats.org/officeDocument/2006/relationships" xmlns:p="http://schemas.openxmlformats.org/presentationml/2006/main">
+  <p:cSld>
+    <p:spTree>
+      <p:nvGrpSpPr>
+        <p:cNvPr id="1" name=""/>
+        <p:cNvGrpSpPr/>
+        <p:nvPr/>
+      </p:nvGrpSpPr>
+      <p:grpSpPr>
+        <a:xfrm>
+          <a:off x="0" y="0"/>
+          <a:ext cx="0" cy="0"/>
+          <a:chOff x="0" y="0"/>
+          <a:chExt cx="0" cy="0"/>
+        </a:xfrm>
+      </p:grpSpPr>
+      <p:sp>
+        <p:nvSpPr>
+          <p:cNvPr id="5" name="Footer Placeholder 3">
+            <a:extLst>
+              <a:ext uri="{FF2B5EF4-FFF2-40B4-BE49-F238E27FC236}">
+                <a16:creationId xmlns:a16="http://schemas.microsoft.com/office/drawing/2014/main" id="{102AFB3B-0B4B-40EB-8215-7159D7FCFAB1}"/>
+              </a:ext>
+            </a:extLst>
+          </p:cNvPr>
+          <p:cNvSpPr>
+            <a:spLocks noGrp="1"/>
+          </p:cNvSpPr>
+          <p:nvPr>
+            <p:ph type="ftr" sz="quarter" idx="12"/>
+          </p:nvPr>
+        </p:nvSpPr>
+        <p:spPr/>
+        <p:txBody>
+          <a:bodyPr/>
+          <a:lstStyle/>
+          <a:p>
+            <a:pPr>
+              <a:defRPr/>
+            </a:pPr>
+            <a:endParaRPr lang="en-US"/>
+          </a:p>
+          <a:p>
+            <a:pPr>
+              <a:defRPr/>
+            </a:pPr>
+            <a:endParaRPr lang="en-US" b="0">
+              <a:latin typeface="Tahoma" pitchFamily="34" charset="0"/>
+            </a:endParaRPr>
+          </a:p>
+          <a:p>
+            <a:pPr>
+              <a:defRPr/>
+            </a:pPr>
+            <a:endParaRPr lang="en-US">
+              <a:latin typeface="Tahoma" pitchFamily="34" charset="0"/>
+            </a:endParaRPr>
+          </a:p>
+          <a:p>
+            <a:pPr>
+              <a:defRPr/>
+            </a:pPr>
+            <a:r>
+              <a:rPr lang="en-US">
+                <a:latin typeface="Tahoma" pitchFamily="34" charset="0"/>
+              </a:rPr>
+              <a:t>© A+ Computer Science  -  www.apluscompsci.com</a:t>
+            </a:r>
+          </a:p>
+        </p:txBody>
+      </p:sp>
+      <p:sp>
+        <p:nvSpPr>
+          <p:cNvPr id="30723" name="Text Box 2">
+            <a:extLst>
+              <a:ext uri="{FF2B5EF4-FFF2-40B4-BE49-F238E27FC236}">
+                <a16:creationId xmlns:a16="http://schemas.microsoft.com/office/drawing/2014/main" id="{820C0865-409D-417C-B1D6-D0A904AB9FFD}"/>
+              </a:ext>
+            </a:extLst>
+          </p:cNvPr>
+          <p:cNvSpPr txBox="1">
+            <a:spLocks noChangeArrowheads="1"/>
+          </p:cNvSpPr>
+          <p:nvPr/>
+        </p:nvSpPr>
+        <p:spPr bwMode="auto">
+          <a:xfrm>
+            <a:off x="762000" y="1752600"/>
+            <a:ext cx="7848600" cy="2308324"/>
+          </a:xfrm>
+          <a:prstGeom prst="rect">
+            <a:avLst/>
+          </a:prstGeom>
+          <a:noFill/>
+          <a:ln>
+            <a:noFill/>
+          </a:ln>
+          <a:extLst>
+            <a:ext uri="{909E8E84-426E-40DD-AFC4-6F175D3DCCD1}">
+              <a14:hiddenFill xmlns:a14="http://schemas.microsoft.com/office/drawing/2010/main">
+                <a:solidFill>
+                  <a:srgbClr val="FFFFFF"/>
+                </a:solidFill>
+              </a14:hiddenFill>
+            </a:ext>
+            <a:ext uri="{91240B29-F687-4F45-9708-019B960494DF}">
+              <a14:hiddenLine xmlns:a14="http://schemas.microsoft.com/office/drawing/2010/main" w="12700">
+                <a:solidFill>
+                  <a:srgbClr val="000000"/>
+                </a:solidFill>
+                <a:miter lim="800000"/>
+                <a:headEnd type="none" w="sm" len="sm"/>
+                <a:tailEnd type="none" w="sm" len="sm"/>
+              </a14:hiddenLine>
+            </a:ext>
+          </a:extLst>
+        </p:spPr>
+        <p:txBody>
+          <a:bodyPr>
+            <a:spAutoFit/>
+          </a:bodyPr>
+          <a:lstStyle>
+            <a:lvl1pPr>
+              <a:spcBef>
+                <a:spcPct val="20000"/>
+              </a:spcBef>
+              <a:buChar char="•"/>
+              <a:defRPr sz="3200">
+                <a:solidFill>
+                  <a:schemeClr val="tx1"/>
+                </a:solidFill>
+                <a:latin typeface="Times New Roman" panose="02020603050405020304" pitchFamily="18" charset="0"/>
+              </a:defRPr>
+            </a:lvl1pPr>
+            <a:lvl2pPr marL="742950" indent="-285750">
+              <a:spcBef>
+                <a:spcPct val="20000"/>
+              </a:spcBef>
+              <a:buChar char="–"/>
+              <a:defRPr sz="2800">
+                <a:solidFill>
+                  <a:schemeClr val="tx1"/>
+                </a:solidFill>
+                <a:latin typeface="Times New Roman" panose="02020603050405020304" pitchFamily="18" charset="0"/>
+              </a:defRPr>
+            </a:lvl2pPr>
+            <a:lvl3pPr marL="1143000" indent="-228600">
+              <a:spcBef>
+                <a:spcPct val="20000"/>
+              </a:spcBef>
+              <a:buChar char="•"/>
+              <a:defRPr sz="2400">
+                <a:solidFill>
+                  <a:schemeClr val="tx1"/>
+                </a:solidFill>
+                <a:latin typeface="Times New Roman" panose="02020603050405020304" pitchFamily="18" charset="0"/>
+              </a:defRPr>
+            </a:lvl3pPr>
+            <a:lvl4pPr marL="1600200" indent="-228600">
+              <a:spcBef>
+                <a:spcPct val="20000"/>
+              </a:spcBef>
+              <a:buChar char="–"/>
+              <a:defRPr sz="2000">
+                <a:solidFill>
+                  <a:schemeClr val="tx1"/>
+                </a:solidFill>
+                <a:latin typeface="Times New Roman" panose="02020603050405020304" pitchFamily="18" charset="0"/>
+              </a:defRPr>
+            </a:lvl4pPr>
+            <a:lvl5pPr marL="2057400" indent="-228600">
+              <a:spcBef>
+                <a:spcPct val="20000"/>
+              </a:spcBef>
+              <a:buChar char="•"/>
+              <a:defRPr sz="2000">
+                <a:solidFill>
+                  <a:schemeClr val="tx1"/>
+                </a:solidFill>
+                <a:latin typeface="Times New Roman" panose="02020603050405020304" pitchFamily="18" charset="0"/>
+              </a:defRPr>
+            </a:lvl5pPr>
+            <a:lvl6pPr marL="2514600" indent="-228600" eaLnBrk="0" fontAlgn="base" hangingPunct="0">
+              <a:spcBef>
+                <a:spcPct val="20000"/>
+              </a:spcBef>
+              <a:spcAft>
+                <a:spcPct val="0"/>
+              </a:spcAft>
+              <a:buChar char="•"/>
+              <a:defRPr sz="2000">
+                <a:solidFill>
+                  <a:schemeClr val="tx1"/>
+                </a:solidFill>
+                <a:latin typeface="Times New Roman" panose="02020603050405020304" pitchFamily="18" charset="0"/>
+              </a:defRPr>
+            </a:lvl6pPr>
+            <a:lvl7pPr marL="2971800" indent="-228600" eaLnBrk="0" fontAlgn="base" hangingPunct="0">
+              <a:spcBef>
+                <a:spcPct val="20000"/>
+              </a:spcBef>
+              <a:spcAft>
+                <a:spcPct val="0"/>
+              </a:spcAft>
+              <a:buChar char="•"/>
+              <a:defRPr sz="2000">
+                <a:solidFill>
+                  <a:schemeClr val="tx1"/>
+                </a:solidFill>
+                <a:latin typeface="Times New Roman" panose="02020603050405020304" pitchFamily="18" charset="0"/>
+              </a:defRPr>
+            </a:lvl7pPr>
+            <a:lvl8pPr marL="3429000" indent="-228600" eaLnBrk="0" fontAlgn="base" hangingPunct="0">
+              <a:spcBef>
+                <a:spcPct val="20000"/>
+              </a:spcBef>
+              <a:spcAft>
+                <a:spcPct val="0"/>
+              </a:spcAft>
+              <a:buChar char="•"/>
+              <a:defRPr sz="2000">
+                <a:solidFill>
+                  <a:schemeClr val="tx1"/>
+                </a:solidFill>
+                <a:latin typeface="Times New Roman" panose="02020603050405020304" pitchFamily="18" charset="0"/>
+              </a:defRPr>
+            </a:lvl8pPr>
+            <a:lvl9pPr marL="3886200" indent="-228600" eaLnBrk="0" fontAlgn="base" hangingPunct="0">
+              <a:spcBef>
+                <a:spcPct val="20000"/>
+              </a:spcBef>
+              <a:spcAft>
+                <a:spcPct val="0"/>
+              </a:spcAft>
+              <a:buChar char="•"/>
+              <a:defRPr sz="2000">
+                <a:solidFill>
+                  <a:schemeClr val="tx1"/>
+                </a:solidFill>
+                <a:latin typeface="Times New Roman" panose="02020603050405020304" pitchFamily="18" charset="0"/>
+              </a:defRPr>
+            </a:lvl9pPr>
+          </a:lstStyle>
+          <a:p>
+            <a:pPr>
+              <a:spcBef>
+                <a:spcPct val="0"/>
+              </a:spcBef>
+              <a:buFontTx/>
+              <a:buNone/>
+            </a:pPr>
+            <a:r>
+              <a:rPr lang="en-US" altLang="en-US" sz="2400" dirty="0">
+                <a:latin typeface="Arial" panose="020B0604020202020204" pitchFamily="34" charset="0"/>
+              </a:rPr>
+              <a:t>public static void main(String </a:t>
+            </a:r>
+            <a:r>
+              <a:rPr lang="en-US" altLang="en-US" sz="2400" dirty="0" err="1">
+                <a:latin typeface="Arial" panose="020B0604020202020204" pitchFamily="34" charset="0"/>
+              </a:rPr>
+              <a:t>args</a:t>
+            </a:r>
+            <a:r>
+              <a:rPr lang="en-US" altLang="en-US" sz="2400" dirty="0">
+                <a:latin typeface="Arial" panose="020B0604020202020204" pitchFamily="34" charset="0"/>
+              </a:rPr>
+              <a:t>[ ])</a:t>
+            </a:r>
+          </a:p>
+          <a:p>
+            <a:pPr>
+              <a:spcBef>
+                <a:spcPct val="0"/>
+              </a:spcBef>
+              <a:buFontTx/>
+              <a:buNone/>
+            </a:pPr>
+            <a:r>
+              <a:rPr lang="en-US" altLang="en-US" sz="2400" dirty="0">
+                <a:latin typeface="Arial" panose="020B0604020202020204" pitchFamily="34" charset="0"/>
+              </a:rPr>
+              <a:t>{</a:t>
+            </a:r>
+          </a:p>
+          <a:p>
+            <a:pPr>
+              <a:spcBef>
+                <a:spcPct val="0"/>
+              </a:spcBef>
+              <a:buFontTx/>
+              <a:buNone/>
+            </a:pPr>
+            <a:r>
+              <a:rPr lang="en-US" altLang="en-US" sz="2400" dirty="0">
+                <a:latin typeface="Arial" panose="020B0604020202020204" pitchFamily="34" charset="0"/>
+              </a:rPr>
+              <a:t>     int num=32;</a:t>
+            </a:r>
+          </a:p>
+          <a:p>
+            <a:pPr>
+              <a:spcBef>
+                <a:spcPct val="0"/>
+              </a:spcBef>
+              <a:buFontTx/>
+              <a:buNone/>
+            </a:pPr>
+            <a:r>
+              <a:rPr lang="en-US" altLang="en-US" sz="2400" dirty="0">
+                <a:latin typeface="Arial" panose="020B0604020202020204" pitchFamily="34" charset="0"/>
+              </a:rPr>
+              <a:t>     if(num==32)</a:t>
+            </a:r>
+          </a:p>
+          <a:p>
+            <a:pPr>
+              <a:spcBef>
+                <a:spcPct val="0"/>
+              </a:spcBef>
+              <a:buFontTx/>
+              <a:buNone/>
+            </a:pPr>
+            <a:r>
+              <a:rPr lang="en-US" altLang="en-US" sz="2400" dirty="0">
+                <a:latin typeface="Arial" panose="020B0604020202020204" pitchFamily="34" charset="0"/>
+              </a:rPr>
+              <a:t>          throw new </a:t>
+            </a:r>
+            <a:r>
+              <a:rPr lang="en-US" altLang="en-US" sz="2400" dirty="0" err="1">
+                <a:latin typeface="Arial" panose="020B0604020202020204" pitchFamily="34" charset="0"/>
+              </a:rPr>
+              <a:t>RuntimeException</a:t>
+            </a:r>
+            <a:r>
+              <a:rPr lang="en-US" altLang="en-US" sz="2400" dirty="0">
+                <a:latin typeface="Arial" panose="020B0604020202020204" pitchFamily="34" charset="0"/>
+              </a:rPr>
+              <a:t>("num==32");</a:t>
+            </a:r>
+          </a:p>
+          <a:p>
+            <a:pPr>
+              <a:spcBef>
+                <a:spcPct val="0"/>
+              </a:spcBef>
+              <a:buFontTx/>
+              <a:buNone/>
+            </a:pPr>
+            <a:r>
+              <a:rPr lang="en-US" altLang="en-US" sz="2400" dirty="0">
+                <a:latin typeface="Arial" panose="020B0604020202020204" pitchFamily="34" charset="0"/>
+              </a:rPr>
+              <a:t>}</a:t>
+            </a:r>
+          </a:p>
+        </p:txBody>
+      </p:sp>
+      <p:sp>
+        <p:nvSpPr>
+          <p:cNvPr id="2" name="Rectangle 1">
+            <a:extLst>
+              <a:ext uri="{FF2B5EF4-FFF2-40B4-BE49-F238E27FC236}">
+                <a16:creationId xmlns:a16="http://schemas.microsoft.com/office/drawing/2014/main" id="{217F65C6-B646-77AC-0F88-A4BBB7BE9AA5}"/>
+              </a:ext>
+            </a:extLst>
+          </p:cNvPr>
+          <p:cNvSpPr/>
+          <p:nvPr/>
+        </p:nvSpPr>
+        <p:spPr>
+          <a:xfrm>
+            <a:off x="1935925" y="465676"/>
+            <a:ext cx="5372304" cy="923330"/>
+          </a:xfrm>
+          <a:prstGeom prst="rect">
+            <a:avLst/>
+          </a:prstGeom>
+          <a:noFill/>
+        </p:spPr>
+        <p:txBody>
+          <a:bodyPr wrap="none" lIns="91440" tIns="45720" rIns="91440" bIns="45720">
+            <a:spAutoFit/>
+          </a:bodyPr>
+          <a:lstStyle/>
+          <a:p>
+            <a:pPr algn="ctr"/>
+            <a:r>
+              <a:rPr lang="en-US" sz="5400" b="1" cap="none" spc="0" dirty="0">
+                <a:ln w="22225">
+                  <a:solidFill>
+                    <a:schemeClr val="accent2"/>
+                  </a:solidFill>
+                  <a:prstDash val="solid"/>
+                </a:ln>
+                <a:solidFill>
+                  <a:srgbClr val="0000CC"/>
+                </a:solidFill>
+                <a:effectLst>
+                  <a:outerShdw blurRad="50800" dist="38100" dir="10800000" algn="r" rotWithShape="0">
+                    <a:prstClr val="black">
+                      <a:alpha val="40000"/>
+                    </a:prstClr>
+                  </a:outerShdw>
+                </a:effectLst>
+              </a:rPr>
+              <a:t>Will it Compile?</a:t>
+            </a:r>
+          </a:p>
+        </p:txBody>
+      </p:sp>
+      <p:sp>
+        <p:nvSpPr>
+          <p:cNvPr id="4" name="TextBox 3">
+            <a:extLst>
+              <a:ext uri="{FF2B5EF4-FFF2-40B4-BE49-F238E27FC236}">
+                <a16:creationId xmlns:a16="http://schemas.microsoft.com/office/drawing/2014/main" id="{3E6C2AF5-25DB-67B6-706B-6397CC2D1C2C}"/>
+              </a:ext>
+            </a:extLst>
+          </p:cNvPr>
+          <p:cNvSpPr txBox="1"/>
+          <p:nvPr/>
+        </p:nvSpPr>
+        <p:spPr>
+          <a:xfrm>
+            <a:off x="741680" y="4953000"/>
+            <a:ext cx="7620000" cy="830997"/>
+          </a:xfrm>
+          <a:prstGeom prst="rect">
+            <a:avLst/>
+          </a:prstGeom>
+          <a:noFill/>
+        </p:spPr>
+        <p:txBody>
+          <a:bodyPr wrap="square">
+            <a:spAutoFit/>
+          </a:bodyPr>
+          <a:lstStyle/>
+          <a:p>
+            <a:pPr>
+              <a:spcBef>
+                <a:spcPct val="0"/>
+              </a:spcBef>
+              <a:buFontTx/>
+              <a:buNone/>
+            </a:pPr>
+            <a:r>
+              <a:rPr lang="en-US" altLang="en-US" sz="2400" dirty="0">
+                <a:solidFill>
+                  <a:schemeClr val="accent6">
+                    <a:lumMod val="75000"/>
+                  </a:schemeClr>
+                </a:solidFill>
+                <a:latin typeface="Arial" panose="020B0604020202020204" pitchFamily="34" charset="0"/>
+              </a:rPr>
+              <a:t>Yes, </a:t>
+            </a:r>
+            <a:r>
+              <a:rPr lang="en-US" altLang="en-US" sz="2400" dirty="0" err="1">
+                <a:solidFill>
+                  <a:schemeClr val="accent6">
+                    <a:lumMod val="75000"/>
+                  </a:schemeClr>
+                </a:solidFill>
+                <a:latin typeface="Arial" panose="020B0604020202020204" pitchFamily="34" charset="0"/>
+              </a:rPr>
+              <a:t>b.c.</a:t>
+            </a:r>
+            <a:r>
+              <a:rPr lang="en-US" altLang="en-US" sz="2400" dirty="0">
+                <a:solidFill>
+                  <a:schemeClr val="accent6">
+                    <a:lumMod val="75000"/>
+                  </a:schemeClr>
+                </a:solidFill>
+                <a:latin typeface="Arial" panose="020B0604020202020204" pitchFamily="34" charset="0"/>
+              </a:rPr>
+              <a:t> you DO NOT have to have throws because you are throwing an </a:t>
+            </a:r>
+            <a:r>
+              <a:rPr lang="en-US" altLang="en-US" sz="2400" u="sng" dirty="0">
+                <a:solidFill>
+                  <a:schemeClr val="accent6">
+                    <a:lumMod val="75000"/>
+                  </a:schemeClr>
+                </a:solidFill>
+                <a:latin typeface="Arial" panose="020B0604020202020204" pitchFamily="34" charset="0"/>
+              </a:rPr>
+              <a:t>unchecked</a:t>
+            </a:r>
+            <a:r>
+              <a:rPr lang="en-US" altLang="en-US" sz="2400" dirty="0">
+                <a:solidFill>
+                  <a:schemeClr val="accent6">
+                    <a:lumMod val="75000"/>
+                  </a:schemeClr>
+                </a:solidFill>
+                <a:latin typeface="Arial" panose="020B0604020202020204" pitchFamily="34" charset="0"/>
+              </a:rPr>
+              <a:t> Exception.</a:t>
             </a:r>
           </a:p>
         </p:txBody>
@@ -22261,598 +22888,6 @@
       </p:grpSpPr>
       <p:sp>
         <p:nvSpPr>
-          <p:cNvPr id="5" name="Footer Placeholder 3">
-            <a:extLst>
-              <a:ext uri="{FF2B5EF4-FFF2-40B4-BE49-F238E27FC236}">
-                <a16:creationId xmlns:a16="http://schemas.microsoft.com/office/drawing/2014/main" id="{102AFB3B-0B4B-40EB-8215-7159D7FCFAB1}"/>
-              </a:ext>
-            </a:extLst>
-          </p:cNvPr>
-          <p:cNvSpPr>
-            <a:spLocks noGrp="1"/>
-          </p:cNvSpPr>
-          <p:nvPr>
-            <p:ph type="ftr" sz="quarter" idx="12"/>
-          </p:nvPr>
-        </p:nvSpPr>
-        <p:spPr/>
-        <p:txBody>
-          <a:bodyPr/>
-          <a:lstStyle/>
-          <a:p>
-            <a:pPr>
-              <a:defRPr/>
-            </a:pPr>
-            <a:endParaRPr lang="en-US"/>
-          </a:p>
-          <a:p>
-            <a:pPr>
-              <a:defRPr/>
-            </a:pPr>
-            <a:endParaRPr lang="en-US" b="0">
-              <a:latin typeface="Tahoma" pitchFamily="34" charset="0"/>
-            </a:endParaRPr>
-          </a:p>
-          <a:p>
-            <a:pPr>
-              <a:defRPr/>
-            </a:pPr>
-            <a:endParaRPr lang="en-US">
-              <a:latin typeface="Tahoma" pitchFamily="34" charset="0"/>
-            </a:endParaRPr>
-          </a:p>
-          <a:p>
-            <a:pPr>
-              <a:defRPr/>
-            </a:pPr>
-            <a:r>
-              <a:rPr lang="en-US">
-                <a:latin typeface="Tahoma" pitchFamily="34" charset="0"/>
-              </a:rPr>
-              <a:t>© A+ Computer Science  -  www.apluscompsci.com</a:t>
-            </a:r>
-          </a:p>
-        </p:txBody>
-      </p:sp>
-      <p:sp>
-        <p:nvSpPr>
-          <p:cNvPr id="30723" name="Text Box 2">
-            <a:extLst>
-              <a:ext uri="{FF2B5EF4-FFF2-40B4-BE49-F238E27FC236}">
-                <a16:creationId xmlns:a16="http://schemas.microsoft.com/office/drawing/2014/main" id="{820C0865-409D-417C-B1D6-D0A904AB9FFD}"/>
-              </a:ext>
-            </a:extLst>
-          </p:cNvPr>
-          <p:cNvSpPr txBox="1">
-            <a:spLocks noChangeArrowheads="1"/>
-          </p:cNvSpPr>
-          <p:nvPr/>
-        </p:nvSpPr>
-        <p:spPr bwMode="auto">
-          <a:xfrm>
-            <a:off x="762000" y="1752600"/>
-            <a:ext cx="7848600" cy="2308324"/>
-          </a:xfrm>
-          <a:prstGeom prst="rect">
-            <a:avLst/>
-          </a:prstGeom>
-          <a:noFill/>
-          <a:ln>
-            <a:noFill/>
-          </a:ln>
-          <a:extLst>
-            <a:ext uri="{909E8E84-426E-40DD-AFC4-6F175D3DCCD1}">
-              <a14:hiddenFill xmlns:a14="http://schemas.microsoft.com/office/drawing/2010/main">
-                <a:solidFill>
-                  <a:srgbClr val="FFFFFF"/>
-                </a:solidFill>
-              </a14:hiddenFill>
-            </a:ext>
-            <a:ext uri="{91240B29-F687-4F45-9708-019B960494DF}">
-              <a14:hiddenLine xmlns:a14="http://schemas.microsoft.com/office/drawing/2010/main" w="12700">
-                <a:solidFill>
-                  <a:srgbClr val="000000"/>
-                </a:solidFill>
-                <a:miter lim="800000"/>
-                <a:headEnd type="none" w="sm" len="sm"/>
-                <a:tailEnd type="none" w="sm" len="sm"/>
-              </a14:hiddenLine>
-            </a:ext>
-          </a:extLst>
-        </p:spPr>
-        <p:txBody>
-          <a:bodyPr>
-            <a:spAutoFit/>
-          </a:bodyPr>
-          <a:lstStyle>
-            <a:lvl1pPr>
-              <a:spcBef>
-                <a:spcPct val="20000"/>
-              </a:spcBef>
-              <a:buChar char="•"/>
-              <a:defRPr sz="3200">
-                <a:solidFill>
-                  <a:schemeClr val="tx1"/>
-                </a:solidFill>
-                <a:latin typeface="Times New Roman" panose="02020603050405020304" pitchFamily="18" charset="0"/>
-              </a:defRPr>
-            </a:lvl1pPr>
-            <a:lvl2pPr marL="742950" indent="-285750">
-              <a:spcBef>
-                <a:spcPct val="20000"/>
-              </a:spcBef>
-              <a:buChar char="–"/>
-              <a:defRPr sz="2800">
-                <a:solidFill>
-                  <a:schemeClr val="tx1"/>
-                </a:solidFill>
-                <a:latin typeface="Times New Roman" panose="02020603050405020304" pitchFamily="18" charset="0"/>
-              </a:defRPr>
-            </a:lvl2pPr>
-            <a:lvl3pPr marL="1143000" indent="-228600">
-              <a:spcBef>
-                <a:spcPct val="20000"/>
-              </a:spcBef>
-              <a:buChar char="•"/>
-              <a:defRPr sz="2400">
-                <a:solidFill>
-                  <a:schemeClr val="tx1"/>
-                </a:solidFill>
-                <a:latin typeface="Times New Roman" panose="02020603050405020304" pitchFamily="18" charset="0"/>
-              </a:defRPr>
-            </a:lvl3pPr>
-            <a:lvl4pPr marL="1600200" indent="-228600">
-              <a:spcBef>
-                <a:spcPct val="20000"/>
-              </a:spcBef>
-              <a:buChar char="–"/>
-              <a:defRPr sz="2000">
-                <a:solidFill>
-                  <a:schemeClr val="tx1"/>
-                </a:solidFill>
-                <a:latin typeface="Times New Roman" panose="02020603050405020304" pitchFamily="18" charset="0"/>
-              </a:defRPr>
-            </a:lvl4pPr>
-            <a:lvl5pPr marL="2057400" indent="-228600">
-              <a:spcBef>
-                <a:spcPct val="20000"/>
-              </a:spcBef>
-              <a:buChar char="•"/>
-              <a:defRPr sz="2000">
-                <a:solidFill>
-                  <a:schemeClr val="tx1"/>
-                </a:solidFill>
-                <a:latin typeface="Times New Roman" panose="02020603050405020304" pitchFamily="18" charset="0"/>
-              </a:defRPr>
-            </a:lvl5pPr>
-            <a:lvl6pPr marL="2514600" indent="-228600" eaLnBrk="0" fontAlgn="base" hangingPunct="0">
-              <a:spcBef>
-                <a:spcPct val="20000"/>
-              </a:spcBef>
-              <a:spcAft>
-                <a:spcPct val="0"/>
-              </a:spcAft>
-              <a:buChar char="•"/>
-              <a:defRPr sz="2000">
-                <a:solidFill>
-                  <a:schemeClr val="tx1"/>
-                </a:solidFill>
-                <a:latin typeface="Times New Roman" panose="02020603050405020304" pitchFamily="18" charset="0"/>
-              </a:defRPr>
-            </a:lvl6pPr>
-            <a:lvl7pPr marL="2971800" indent="-228600" eaLnBrk="0" fontAlgn="base" hangingPunct="0">
-              <a:spcBef>
-                <a:spcPct val="20000"/>
-              </a:spcBef>
-              <a:spcAft>
-                <a:spcPct val="0"/>
-              </a:spcAft>
-              <a:buChar char="•"/>
-              <a:defRPr sz="2000">
-                <a:solidFill>
-                  <a:schemeClr val="tx1"/>
-                </a:solidFill>
-                <a:latin typeface="Times New Roman" panose="02020603050405020304" pitchFamily="18" charset="0"/>
-              </a:defRPr>
-            </a:lvl7pPr>
-            <a:lvl8pPr marL="3429000" indent="-228600" eaLnBrk="0" fontAlgn="base" hangingPunct="0">
-              <a:spcBef>
-                <a:spcPct val="20000"/>
-              </a:spcBef>
-              <a:spcAft>
-                <a:spcPct val="0"/>
-              </a:spcAft>
-              <a:buChar char="•"/>
-              <a:defRPr sz="2000">
-                <a:solidFill>
-                  <a:schemeClr val="tx1"/>
-                </a:solidFill>
-                <a:latin typeface="Times New Roman" panose="02020603050405020304" pitchFamily="18" charset="0"/>
-              </a:defRPr>
-            </a:lvl8pPr>
-            <a:lvl9pPr marL="3886200" indent="-228600" eaLnBrk="0" fontAlgn="base" hangingPunct="0">
-              <a:spcBef>
-                <a:spcPct val="20000"/>
-              </a:spcBef>
-              <a:spcAft>
-                <a:spcPct val="0"/>
-              </a:spcAft>
-              <a:buChar char="•"/>
-              <a:defRPr sz="2000">
-                <a:solidFill>
-                  <a:schemeClr val="tx1"/>
-                </a:solidFill>
-                <a:latin typeface="Times New Roman" panose="02020603050405020304" pitchFamily="18" charset="0"/>
-              </a:defRPr>
-            </a:lvl9pPr>
-          </a:lstStyle>
-          <a:p>
-            <a:pPr>
-              <a:spcBef>
-                <a:spcPct val="0"/>
-              </a:spcBef>
-              <a:buFontTx/>
-              <a:buNone/>
-            </a:pPr>
-            <a:r>
-              <a:rPr lang="en-US" altLang="en-US" sz="2400" dirty="0">
-                <a:latin typeface="Arial" panose="020B0604020202020204" pitchFamily="34" charset="0"/>
-              </a:rPr>
-              <a:t>public static void main(String </a:t>
-            </a:r>
-            <a:r>
-              <a:rPr lang="en-US" altLang="en-US" sz="2400" dirty="0" err="1">
-                <a:latin typeface="Arial" panose="020B0604020202020204" pitchFamily="34" charset="0"/>
-              </a:rPr>
-              <a:t>args</a:t>
-            </a:r>
-            <a:r>
-              <a:rPr lang="en-US" altLang="en-US" sz="2400" dirty="0">
-                <a:latin typeface="Arial" panose="020B0604020202020204" pitchFamily="34" charset="0"/>
-              </a:rPr>
-              <a:t>[ ])</a:t>
-            </a:r>
-          </a:p>
-          <a:p>
-            <a:pPr>
-              <a:spcBef>
-                <a:spcPct val="0"/>
-              </a:spcBef>
-              <a:buFontTx/>
-              <a:buNone/>
-            </a:pPr>
-            <a:r>
-              <a:rPr lang="en-US" altLang="en-US" sz="2400" dirty="0">
-                <a:latin typeface="Arial" panose="020B0604020202020204" pitchFamily="34" charset="0"/>
-              </a:rPr>
-              <a:t>{</a:t>
-            </a:r>
-          </a:p>
-          <a:p>
-            <a:pPr>
-              <a:spcBef>
-                <a:spcPct val="0"/>
-              </a:spcBef>
-              <a:buFontTx/>
-              <a:buNone/>
-            </a:pPr>
-            <a:r>
-              <a:rPr lang="en-US" altLang="en-US" sz="2400" dirty="0">
-                <a:latin typeface="Arial" panose="020B0604020202020204" pitchFamily="34" charset="0"/>
-              </a:rPr>
-              <a:t>     int num=32;</a:t>
-            </a:r>
-          </a:p>
-          <a:p>
-            <a:pPr>
-              <a:spcBef>
-                <a:spcPct val="0"/>
-              </a:spcBef>
-              <a:buFontTx/>
-              <a:buNone/>
-            </a:pPr>
-            <a:r>
-              <a:rPr lang="en-US" altLang="en-US" sz="2400" dirty="0">
-                <a:latin typeface="Arial" panose="020B0604020202020204" pitchFamily="34" charset="0"/>
-              </a:rPr>
-              <a:t>     if(num==32)</a:t>
-            </a:r>
-          </a:p>
-          <a:p>
-            <a:pPr>
-              <a:spcBef>
-                <a:spcPct val="0"/>
-              </a:spcBef>
-              <a:buFontTx/>
-              <a:buNone/>
-            </a:pPr>
-            <a:r>
-              <a:rPr lang="en-US" altLang="en-US" sz="2400" dirty="0">
-                <a:latin typeface="Arial" panose="020B0604020202020204" pitchFamily="34" charset="0"/>
-              </a:rPr>
-              <a:t>          throw new </a:t>
-            </a:r>
-            <a:r>
-              <a:rPr lang="en-US" altLang="en-US" sz="2400" dirty="0" err="1">
-                <a:latin typeface="Arial" panose="020B0604020202020204" pitchFamily="34" charset="0"/>
-              </a:rPr>
-              <a:t>RuntimeException</a:t>
-            </a:r>
-            <a:r>
-              <a:rPr lang="en-US" altLang="en-US" sz="2400" dirty="0">
-                <a:latin typeface="Arial" panose="020B0604020202020204" pitchFamily="34" charset="0"/>
-              </a:rPr>
-              <a:t>("num==32");</a:t>
-            </a:r>
-          </a:p>
-          <a:p>
-            <a:pPr>
-              <a:spcBef>
-                <a:spcPct val="0"/>
-              </a:spcBef>
-              <a:buFontTx/>
-              <a:buNone/>
-            </a:pPr>
-            <a:r>
-              <a:rPr lang="en-US" altLang="en-US" sz="2400" dirty="0">
-                <a:latin typeface="Arial" panose="020B0604020202020204" pitchFamily="34" charset="0"/>
-              </a:rPr>
-              <a:t>}</a:t>
-            </a:r>
-          </a:p>
-        </p:txBody>
-      </p:sp>
-      <p:sp>
-        <p:nvSpPr>
-          <p:cNvPr id="2" name="Rectangle 1">
-            <a:extLst>
-              <a:ext uri="{FF2B5EF4-FFF2-40B4-BE49-F238E27FC236}">
-                <a16:creationId xmlns:a16="http://schemas.microsoft.com/office/drawing/2014/main" id="{217F65C6-B646-77AC-0F88-A4BBB7BE9AA5}"/>
-              </a:ext>
-            </a:extLst>
-          </p:cNvPr>
-          <p:cNvSpPr/>
-          <p:nvPr/>
-        </p:nvSpPr>
-        <p:spPr>
-          <a:xfrm>
-            <a:off x="1935925" y="465676"/>
-            <a:ext cx="5372304" cy="923330"/>
-          </a:xfrm>
-          <a:prstGeom prst="rect">
-            <a:avLst/>
-          </a:prstGeom>
-          <a:noFill/>
-        </p:spPr>
-        <p:txBody>
-          <a:bodyPr wrap="none" lIns="91440" tIns="45720" rIns="91440" bIns="45720">
-            <a:spAutoFit/>
-          </a:bodyPr>
-          <a:lstStyle/>
-          <a:p>
-            <a:pPr algn="ctr"/>
-            <a:r>
-              <a:rPr lang="en-US" sz="5400" b="1" cap="none" spc="0" dirty="0">
-                <a:ln w="22225">
-                  <a:solidFill>
-                    <a:schemeClr val="accent2"/>
-                  </a:solidFill>
-                  <a:prstDash val="solid"/>
-                </a:ln>
-                <a:solidFill>
-                  <a:srgbClr val="0000CC"/>
-                </a:solidFill>
-                <a:effectLst>
-                  <a:outerShdw blurRad="50800" dist="38100" dir="10800000" algn="r" rotWithShape="0">
-                    <a:prstClr val="black">
-                      <a:alpha val="40000"/>
-                    </a:prstClr>
-                  </a:outerShdw>
-                </a:effectLst>
-              </a:rPr>
-              <a:t>Will it Compile?</a:t>
-            </a:r>
-          </a:p>
-        </p:txBody>
-      </p:sp>
-      <p:sp>
-        <p:nvSpPr>
-          <p:cNvPr id="4" name="TextBox 3">
-            <a:extLst>
-              <a:ext uri="{FF2B5EF4-FFF2-40B4-BE49-F238E27FC236}">
-                <a16:creationId xmlns:a16="http://schemas.microsoft.com/office/drawing/2014/main" id="{3E6C2AF5-25DB-67B6-706B-6397CC2D1C2C}"/>
-              </a:ext>
-            </a:extLst>
-          </p:cNvPr>
-          <p:cNvSpPr txBox="1"/>
-          <p:nvPr/>
-        </p:nvSpPr>
-        <p:spPr>
-          <a:xfrm>
-            <a:off x="741680" y="4953000"/>
-            <a:ext cx="7620000" cy="830997"/>
-          </a:xfrm>
-          <a:prstGeom prst="rect">
-            <a:avLst/>
-          </a:prstGeom>
-          <a:noFill/>
-        </p:spPr>
-        <p:txBody>
-          <a:bodyPr wrap="square">
-            <a:spAutoFit/>
-          </a:bodyPr>
-          <a:lstStyle/>
-          <a:p>
-            <a:pPr>
-              <a:spcBef>
-                <a:spcPct val="0"/>
-              </a:spcBef>
-              <a:buFontTx/>
-              <a:buNone/>
-            </a:pPr>
-            <a:r>
-              <a:rPr lang="en-US" altLang="en-US" sz="2400" dirty="0">
-                <a:solidFill>
-                  <a:schemeClr val="accent6">
-                    <a:lumMod val="75000"/>
-                  </a:schemeClr>
-                </a:solidFill>
-                <a:latin typeface="Arial" panose="020B0604020202020204" pitchFamily="34" charset="0"/>
-              </a:rPr>
-              <a:t>Yes, </a:t>
-            </a:r>
-            <a:r>
-              <a:rPr lang="en-US" altLang="en-US" sz="2400" dirty="0" err="1">
-                <a:solidFill>
-                  <a:schemeClr val="accent6">
-                    <a:lumMod val="75000"/>
-                  </a:schemeClr>
-                </a:solidFill>
-                <a:latin typeface="Arial" panose="020B0604020202020204" pitchFamily="34" charset="0"/>
-              </a:rPr>
-              <a:t>b.c.</a:t>
-            </a:r>
-            <a:r>
-              <a:rPr lang="en-US" altLang="en-US" sz="2400" dirty="0">
-                <a:solidFill>
-                  <a:schemeClr val="accent6">
-                    <a:lumMod val="75000"/>
-                  </a:schemeClr>
-                </a:solidFill>
-                <a:latin typeface="Arial" panose="020B0604020202020204" pitchFamily="34" charset="0"/>
-              </a:rPr>
-              <a:t> you DO NOT have to have throws because you are throwing an </a:t>
-            </a:r>
-            <a:r>
-              <a:rPr lang="en-US" altLang="en-US" sz="2400" u="sng" dirty="0">
-                <a:solidFill>
-                  <a:schemeClr val="accent6">
-                    <a:lumMod val="75000"/>
-                  </a:schemeClr>
-                </a:solidFill>
-                <a:latin typeface="Arial" panose="020B0604020202020204" pitchFamily="34" charset="0"/>
-              </a:rPr>
-              <a:t>unchecked</a:t>
-            </a:r>
-            <a:r>
-              <a:rPr lang="en-US" altLang="en-US" sz="2400" dirty="0">
-                <a:solidFill>
-                  <a:schemeClr val="accent6">
-                    <a:lumMod val="75000"/>
-                  </a:schemeClr>
-                </a:solidFill>
-                <a:latin typeface="Arial" panose="020B0604020202020204" pitchFamily="34" charset="0"/>
-              </a:rPr>
-              <a:t> Exception.</a:t>
-            </a:r>
-          </a:p>
-        </p:txBody>
-      </p:sp>
-    </p:spTree>
-  </p:cSld>
-  <p:clrMapOvr>
-    <a:masterClrMapping/>
-  </p:clrMapOvr>
-  <p:timing>
-    <p:tnLst>
-      <p:par>
-        <p:cTn id="1" dur="indefinite" restart="never" nodeType="tmRoot">
-          <p:childTnLst>
-            <p:seq concurrent="1" nextAc="seek">
-              <p:cTn id="2" dur="indefinite" nodeType="mainSeq">
-                <p:childTnLst>
-                  <p:par>
-                    <p:cTn id="3" fill="hold">
-                      <p:stCondLst>
-                        <p:cond delay="indefinite"/>
-                      </p:stCondLst>
-                      <p:childTnLst>
-                        <p:par>
-                          <p:cTn id="4" fill="hold">
-                            <p:stCondLst>
-                              <p:cond delay="0"/>
-                            </p:stCondLst>
-                            <p:childTnLst>
-                              <p:par>
-                                <p:cTn id="5" presetID="1" presetClass="entr" presetSubtype="0" fill="hold" grpId="0" nodeType="clickEffect">
-                                  <p:stCondLst>
-                                    <p:cond delay="0"/>
-                                  </p:stCondLst>
-                                  <p:childTnLst>
-                                    <p:set>
-                                      <p:cBhvr>
-                                        <p:cTn id="6" dur="1" fill="hold">
-                                          <p:stCondLst>
-                                            <p:cond delay="0"/>
-                                          </p:stCondLst>
-                                        </p:cTn>
-                                        <p:tgtEl>
-                                          <p:spTgt spid="4"/>
-                                        </p:tgtEl>
-                                        <p:attrNameLst>
-                                          <p:attrName>style.visibility</p:attrName>
-                                        </p:attrNameLst>
-                                      </p:cBhvr>
-                                      <p:to>
-                                        <p:strVal val="visible"/>
-                                      </p:to>
-                                    </p:set>
-                                  </p:childTnLst>
-                                </p:cTn>
-                              </p:par>
-                            </p:childTnLst>
-                          </p:cTn>
-                        </p:par>
-                      </p:childTnLst>
-                    </p:cTn>
-                  </p:par>
-                </p:childTnLst>
-              </p:cTn>
-              <p:prevCondLst>
-                <p:cond evt="onPrev" delay="0">
-                  <p:tgtEl>
-                    <p:sldTgt/>
-                  </p:tgtEl>
-                </p:cond>
-              </p:prevCondLst>
-              <p:nextCondLst>
-                <p:cond evt="onNext" delay="0">
-                  <p:tgtEl>
-                    <p:sldTgt/>
-                  </p:tgtEl>
-                </p:cond>
-              </p:nextCondLst>
-            </p:seq>
-          </p:childTnLst>
-        </p:cTn>
-      </p:par>
-    </p:tnLst>
-    <p:bldLst>
-      <p:bldP spid="4" grpId="0"/>
-    </p:bldLst>
-  </p:timing>
-</p:sld>
-</file>
-
-<file path=ppt/slides/slide24.xml><?xml version="1.0" encoding="utf-8"?>
-<p:sld xmlns:a="http://schemas.openxmlformats.org/drawingml/2006/main" xmlns:r="http://schemas.openxmlformats.org/officeDocument/2006/relationships" xmlns:p="http://schemas.openxmlformats.org/presentationml/2006/main">
-  <p:cSld>
-    <p:spTree>
-      <p:nvGrpSpPr>
-        <p:cNvPr id="1" name=""/>
-        <p:cNvGrpSpPr/>
-        <p:nvPr/>
-      </p:nvGrpSpPr>
-      <p:grpSpPr>
-        <a:xfrm>
-          <a:off x="0" y="0"/>
-          <a:ext cx="0" cy="0"/>
-          <a:chOff x="0" y="0"/>
-          <a:chExt cx="0" cy="0"/>
-        </a:xfrm>
-      </p:grpSpPr>
-      <p:sp>
-        <p:nvSpPr>
           <p:cNvPr id="4" name="Footer Placeholder 3">
             <a:extLst>
               <a:ext uri="{FF2B5EF4-FFF2-40B4-BE49-F238E27FC236}">
@@ -23023,7 +23058,7 @@
 </p:sld>
 </file>
 
-<file path=ppt/slides/slide25.xml><?xml version="1.0" encoding="utf-8"?>
+<file path=ppt/slides/slide24.xml><?xml version="1.0" encoding="utf-8"?>
 <p:sld xmlns:a="http://schemas.openxmlformats.org/drawingml/2006/main" xmlns:r="http://schemas.openxmlformats.org/officeDocument/2006/relationships" xmlns:p="http://schemas.openxmlformats.org/presentationml/2006/main">
   <p:cSld>
     <p:spTree>
@@ -23558,7 +23593,7 @@
 </p:sld>
 </file>
 
-<file path=ppt/slides/slide26.xml><?xml version="1.0" encoding="utf-8"?>
+<file path=ppt/slides/slide25.xml><?xml version="1.0" encoding="utf-8"?>
 <p:sld xmlns:a="http://schemas.openxmlformats.org/drawingml/2006/main" xmlns:r="http://schemas.openxmlformats.org/officeDocument/2006/relationships" xmlns:p="http://schemas.openxmlformats.org/presentationml/2006/main">
   <p:cSld>
     <p:spTree>
@@ -24112,6 +24147,681 @@
         </p:txBody>
       </p:sp>
     </p:spTree>
+  </p:cSld>
+  <p:clrMapOvr>
+    <a:masterClrMapping/>
+  </p:clrMapOvr>
+  <p:timing>
+    <p:tnLst>
+      <p:par>
+        <p:cTn id="1" dur="indefinite" restart="never" nodeType="tmRoot">
+          <p:childTnLst>
+            <p:seq concurrent="1" nextAc="seek">
+              <p:cTn id="2" dur="indefinite" nodeType="mainSeq">
+                <p:childTnLst>
+                  <p:par>
+                    <p:cTn id="3" fill="hold">
+                      <p:stCondLst>
+                        <p:cond delay="indefinite"/>
+                      </p:stCondLst>
+                      <p:childTnLst>
+                        <p:par>
+                          <p:cTn id="4" fill="hold">
+                            <p:stCondLst>
+                              <p:cond delay="0"/>
+                            </p:stCondLst>
+                            <p:childTnLst>
+                              <p:par>
+                                <p:cTn id="5" presetID="1" presetClass="entr" presetSubtype="0" fill="hold" grpId="0" nodeType="clickEffect">
+                                  <p:stCondLst>
+                                    <p:cond delay="0"/>
+                                  </p:stCondLst>
+                                  <p:childTnLst>
+                                    <p:set>
+                                      <p:cBhvr>
+                                        <p:cTn id="6" dur="1" fill="hold">
+                                          <p:stCondLst>
+                                            <p:cond delay="0"/>
+                                          </p:stCondLst>
+                                        </p:cTn>
+                                        <p:tgtEl>
+                                          <p:spTgt spid="3"/>
+                                        </p:tgtEl>
+                                        <p:attrNameLst>
+                                          <p:attrName>style.visibility</p:attrName>
+                                        </p:attrNameLst>
+                                      </p:cBhvr>
+                                      <p:to>
+                                        <p:strVal val="visible"/>
+                                      </p:to>
+                                    </p:set>
+                                  </p:childTnLst>
+                                </p:cTn>
+                              </p:par>
+                            </p:childTnLst>
+                          </p:cTn>
+                        </p:par>
+                      </p:childTnLst>
+                    </p:cTn>
+                  </p:par>
+                </p:childTnLst>
+              </p:cTn>
+              <p:prevCondLst>
+                <p:cond evt="onPrev" delay="0">
+                  <p:tgtEl>
+                    <p:sldTgt/>
+                  </p:tgtEl>
+                </p:cond>
+              </p:prevCondLst>
+              <p:nextCondLst>
+                <p:cond evt="onNext" delay="0">
+                  <p:tgtEl>
+                    <p:sldTgt/>
+                  </p:tgtEl>
+                </p:cond>
+              </p:nextCondLst>
+            </p:seq>
+          </p:childTnLst>
+        </p:cTn>
+      </p:par>
+    </p:tnLst>
+    <p:bldLst>
+      <p:bldP spid="3" grpId="0"/>
+    </p:bldLst>
+  </p:timing>
+</p:sld>
+</file>
+
+<file path=ppt/slides/slide26.xml><?xml version="1.0" encoding="utf-8"?>
+<p:sld xmlns:a="http://schemas.openxmlformats.org/drawingml/2006/main" xmlns:r="http://schemas.openxmlformats.org/officeDocument/2006/relationships" xmlns:p="http://schemas.openxmlformats.org/presentationml/2006/main">
+  <p:cSld>
+    <p:spTree>
+      <p:nvGrpSpPr>
+        <p:cNvPr id="1" name=""/>
+        <p:cNvGrpSpPr/>
+        <p:nvPr/>
+      </p:nvGrpSpPr>
+      <p:grpSpPr>
+        <a:xfrm>
+          <a:off x="0" y="0"/>
+          <a:ext cx="0" cy="0"/>
+          <a:chOff x="0" y="0"/>
+          <a:chExt cx="0" cy="0"/>
+        </a:xfrm>
+      </p:grpSpPr>
+      <p:sp>
+        <p:nvSpPr>
+          <p:cNvPr id="5" name="Footer Placeholder 3">
+            <a:extLst>
+              <a:ext uri="{FF2B5EF4-FFF2-40B4-BE49-F238E27FC236}">
+                <a16:creationId xmlns:a16="http://schemas.microsoft.com/office/drawing/2014/main" id="{7189F3B2-DD47-4385-A057-7B442029312C}"/>
+              </a:ext>
+            </a:extLst>
+          </p:cNvPr>
+          <p:cNvSpPr>
+            <a:spLocks noGrp="1"/>
+          </p:cNvSpPr>
+          <p:nvPr>
+            <p:ph type="ftr" sz="quarter" idx="12"/>
+          </p:nvPr>
+        </p:nvSpPr>
+        <p:spPr>
+          <a:xfrm>
+            <a:off x="6019800" y="6300550"/>
+            <a:ext cx="2895600" cy="457200"/>
+          </a:xfrm>
+        </p:spPr>
+        <p:txBody>
+          <a:bodyPr/>
+          <a:lstStyle/>
+          <a:p>
+            <a:pPr>
+              <a:defRPr/>
+            </a:pPr>
+            <a:endParaRPr lang="en-US"/>
+          </a:p>
+          <a:p>
+            <a:pPr>
+              <a:defRPr/>
+            </a:pPr>
+            <a:endParaRPr lang="en-US" b="0">
+              <a:latin typeface="Tahoma" pitchFamily="34" charset="0"/>
+            </a:endParaRPr>
+          </a:p>
+          <a:p>
+            <a:pPr>
+              <a:defRPr/>
+            </a:pPr>
+            <a:endParaRPr lang="en-US">
+              <a:latin typeface="Tahoma" pitchFamily="34" charset="0"/>
+            </a:endParaRPr>
+          </a:p>
+          <a:p>
+            <a:pPr>
+              <a:defRPr/>
+            </a:pPr>
+            <a:r>
+              <a:rPr lang="en-US">
+                <a:latin typeface="Tahoma" pitchFamily="34" charset="0"/>
+              </a:rPr>
+              <a:t>© A+ Computer Science  -  www.apluscompsci.com</a:t>
+            </a:r>
+          </a:p>
+        </p:txBody>
+      </p:sp>
+      <p:sp>
+        <p:nvSpPr>
+          <p:cNvPr id="36867" name="Text Box 2">
+            <a:extLst>
+              <a:ext uri="{FF2B5EF4-FFF2-40B4-BE49-F238E27FC236}">
+                <a16:creationId xmlns:a16="http://schemas.microsoft.com/office/drawing/2014/main" id="{41046804-E7D4-449A-8EB2-1519FAFC372D}"/>
+              </a:ext>
+            </a:extLst>
+          </p:cNvPr>
+          <p:cNvSpPr txBox="1">
+            <a:spLocks noChangeArrowheads="1"/>
+          </p:cNvSpPr>
+          <p:nvPr/>
+        </p:nvSpPr>
+        <p:spPr bwMode="auto">
+          <a:xfrm>
+            <a:off x="1143000" y="1676400"/>
+            <a:ext cx="7696200" cy="3108543"/>
+          </a:xfrm>
+          <a:prstGeom prst="rect">
+            <a:avLst/>
+          </a:prstGeom>
+          <a:noFill/>
+          <a:ln>
+            <a:noFill/>
+          </a:ln>
+          <a:extLst>
+            <a:ext uri="{909E8E84-426E-40DD-AFC4-6F175D3DCCD1}">
+              <a14:hiddenFill xmlns:a14="http://schemas.microsoft.com/office/drawing/2010/main">
+                <a:solidFill>
+                  <a:srgbClr val="FFFFFF"/>
+                </a:solidFill>
+              </a14:hiddenFill>
+            </a:ext>
+            <a:ext uri="{91240B29-F687-4F45-9708-019B960494DF}">
+              <a14:hiddenLine xmlns:a14="http://schemas.microsoft.com/office/drawing/2010/main" w="12700">
+                <a:solidFill>
+                  <a:srgbClr val="000000"/>
+                </a:solidFill>
+                <a:miter lim="800000"/>
+                <a:headEnd type="none" w="sm" len="sm"/>
+                <a:tailEnd type="none" w="sm" len="sm"/>
+              </a14:hiddenLine>
+            </a:ext>
+          </a:extLst>
+        </p:spPr>
+        <p:txBody>
+          <a:bodyPr wrap="square">
+            <a:spAutoFit/>
+          </a:bodyPr>
+          <a:lstStyle>
+            <a:lvl1pPr>
+              <a:spcBef>
+                <a:spcPct val="20000"/>
+              </a:spcBef>
+              <a:buChar char="•"/>
+              <a:defRPr sz="3200">
+                <a:solidFill>
+                  <a:schemeClr val="tx1"/>
+                </a:solidFill>
+                <a:latin typeface="Times New Roman" panose="02020603050405020304" pitchFamily="18" charset="0"/>
+              </a:defRPr>
+            </a:lvl1pPr>
+            <a:lvl2pPr marL="742950" indent="-285750">
+              <a:spcBef>
+                <a:spcPct val="20000"/>
+              </a:spcBef>
+              <a:buChar char="–"/>
+              <a:defRPr sz="2800">
+                <a:solidFill>
+                  <a:schemeClr val="tx1"/>
+                </a:solidFill>
+                <a:latin typeface="Times New Roman" panose="02020603050405020304" pitchFamily="18" charset="0"/>
+              </a:defRPr>
+            </a:lvl2pPr>
+            <a:lvl3pPr marL="1143000" indent="-228600">
+              <a:spcBef>
+                <a:spcPct val="20000"/>
+              </a:spcBef>
+              <a:buChar char="•"/>
+              <a:defRPr sz="2400">
+                <a:solidFill>
+                  <a:schemeClr val="tx1"/>
+                </a:solidFill>
+                <a:latin typeface="Times New Roman" panose="02020603050405020304" pitchFamily="18" charset="0"/>
+              </a:defRPr>
+            </a:lvl3pPr>
+            <a:lvl4pPr marL="1600200" indent="-228600">
+              <a:spcBef>
+                <a:spcPct val="20000"/>
+              </a:spcBef>
+              <a:buChar char="–"/>
+              <a:defRPr sz="2000">
+                <a:solidFill>
+                  <a:schemeClr val="tx1"/>
+                </a:solidFill>
+                <a:latin typeface="Times New Roman" panose="02020603050405020304" pitchFamily="18" charset="0"/>
+              </a:defRPr>
+            </a:lvl4pPr>
+            <a:lvl5pPr marL="2057400" indent="-228600">
+              <a:spcBef>
+                <a:spcPct val="20000"/>
+              </a:spcBef>
+              <a:buChar char="•"/>
+              <a:defRPr sz="2000">
+                <a:solidFill>
+                  <a:schemeClr val="tx1"/>
+                </a:solidFill>
+                <a:latin typeface="Times New Roman" panose="02020603050405020304" pitchFamily="18" charset="0"/>
+              </a:defRPr>
+            </a:lvl5pPr>
+            <a:lvl6pPr marL="2514600" indent="-228600" eaLnBrk="0" fontAlgn="base" hangingPunct="0">
+              <a:spcBef>
+                <a:spcPct val="20000"/>
+              </a:spcBef>
+              <a:spcAft>
+                <a:spcPct val="0"/>
+              </a:spcAft>
+              <a:buChar char="•"/>
+              <a:defRPr sz="2000">
+                <a:solidFill>
+                  <a:schemeClr val="tx1"/>
+                </a:solidFill>
+                <a:latin typeface="Times New Roman" panose="02020603050405020304" pitchFamily="18" charset="0"/>
+              </a:defRPr>
+            </a:lvl6pPr>
+            <a:lvl7pPr marL="2971800" indent="-228600" eaLnBrk="0" fontAlgn="base" hangingPunct="0">
+              <a:spcBef>
+                <a:spcPct val="20000"/>
+              </a:spcBef>
+              <a:spcAft>
+                <a:spcPct val="0"/>
+              </a:spcAft>
+              <a:buChar char="•"/>
+              <a:defRPr sz="2000">
+                <a:solidFill>
+                  <a:schemeClr val="tx1"/>
+                </a:solidFill>
+                <a:latin typeface="Times New Roman" panose="02020603050405020304" pitchFamily="18" charset="0"/>
+              </a:defRPr>
+            </a:lvl7pPr>
+            <a:lvl8pPr marL="3429000" indent="-228600" eaLnBrk="0" fontAlgn="base" hangingPunct="0">
+              <a:spcBef>
+                <a:spcPct val="20000"/>
+              </a:spcBef>
+              <a:spcAft>
+                <a:spcPct val="0"/>
+              </a:spcAft>
+              <a:buChar char="•"/>
+              <a:defRPr sz="2000">
+                <a:solidFill>
+                  <a:schemeClr val="tx1"/>
+                </a:solidFill>
+                <a:latin typeface="Times New Roman" panose="02020603050405020304" pitchFamily="18" charset="0"/>
+              </a:defRPr>
+            </a:lvl8pPr>
+            <a:lvl9pPr marL="3886200" indent="-228600" eaLnBrk="0" fontAlgn="base" hangingPunct="0">
+              <a:spcBef>
+                <a:spcPct val="20000"/>
+              </a:spcBef>
+              <a:spcAft>
+                <a:spcPct val="0"/>
+              </a:spcAft>
+              <a:buChar char="•"/>
+              <a:defRPr sz="2000">
+                <a:solidFill>
+                  <a:schemeClr val="tx1"/>
+                </a:solidFill>
+                <a:latin typeface="Times New Roman" panose="02020603050405020304" pitchFamily="18" charset="0"/>
+              </a:defRPr>
+            </a:lvl9pPr>
+          </a:lstStyle>
+          <a:p>
+            <a:pPr>
+              <a:spcBef>
+                <a:spcPct val="0"/>
+              </a:spcBef>
+              <a:buFontTx/>
+              <a:buNone/>
+            </a:pPr>
+            <a:r>
+              <a:rPr lang="en-US" altLang="en-US" sz="2800" dirty="0">
+                <a:latin typeface="Arial" panose="020B0604020202020204" pitchFamily="34" charset="0"/>
+              </a:rPr>
+              <a:t>try{</a:t>
+            </a:r>
+          </a:p>
+          <a:p>
+            <a:pPr>
+              <a:spcBef>
+                <a:spcPct val="0"/>
+              </a:spcBef>
+              <a:buFontTx/>
+              <a:buNone/>
+            </a:pPr>
+            <a:r>
+              <a:rPr lang="en-US" altLang="en-US" sz="2800" dirty="0">
+                <a:latin typeface="Arial" panose="020B0604020202020204" pitchFamily="34" charset="0"/>
+              </a:rPr>
+              <a:t>   int num=3/0;</a:t>
+            </a:r>
+          </a:p>
+          <a:p>
+            <a:pPr>
+              <a:spcBef>
+                <a:spcPct val="0"/>
+              </a:spcBef>
+              <a:buFontTx/>
+              <a:buNone/>
+            </a:pPr>
+            <a:r>
+              <a:rPr lang="en-US" altLang="en-US" sz="2800" dirty="0">
+                <a:latin typeface="Arial" panose="020B0604020202020204" pitchFamily="34" charset="0"/>
+              </a:rPr>
+              <a:t>}</a:t>
+            </a:r>
+          </a:p>
+          <a:p>
+            <a:pPr>
+              <a:spcBef>
+                <a:spcPct val="0"/>
+              </a:spcBef>
+              <a:buFontTx/>
+              <a:buNone/>
+            </a:pPr>
+            <a:r>
+              <a:rPr lang="en-US" altLang="en-US" sz="2800" dirty="0">
+                <a:latin typeface="Arial" panose="020B0604020202020204" pitchFamily="34" charset="0"/>
+              </a:rPr>
+              <a:t>catch (</a:t>
+            </a:r>
+            <a:r>
+              <a:rPr lang="en-US" altLang="en-US" sz="2800" dirty="0" err="1">
+                <a:latin typeface="Arial" panose="020B0604020202020204" pitchFamily="34" charset="0"/>
+              </a:rPr>
+              <a:t>ArithmeticException</a:t>
+            </a:r>
+            <a:r>
+              <a:rPr lang="en-US" altLang="en-US" sz="2800" dirty="0">
+                <a:latin typeface="Arial" panose="020B0604020202020204" pitchFamily="34" charset="0"/>
+              </a:rPr>
+              <a:t> e) {</a:t>
+            </a:r>
+          </a:p>
+          <a:p>
+            <a:pPr>
+              <a:spcBef>
+                <a:spcPct val="0"/>
+              </a:spcBef>
+              <a:buFontTx/>
+              <a:buNone/>
+            </a:pPr>
+            <a:r>
+              <a:rPr lang="en-US" altLang="en-US" sz="2800" dirty="0">
+                <a:latin typeface="Arial" panose="020B0604020202020204" pitchFamily="34" charset="0"/>
+              </a:rPr>
+              <a:t>   </a:t>
+            </a:r>
+            <a:r>
+              <a:rPr lang="en-US" altLang="en-US" sz="2800" dirty="0" err="1">
+                <a:latin typeface="Arial" panose="020B0604020202020204" pitchFamily="34" charset="0"/>
+              </a:rPr>
+              <a:t>out.println</a:t>
+            </a:r>
+            <a:r>
+              <a:rPr lang="en-US" altLang="en-US" sz="2800" dirty="0">
+                <a:latin typeface="Arial" panose="020B0604020202020204" pitchFamily="34" charset="0"/>
+              </a:rPr>
+              <a:t>(</a:t>
+            </a:r>
+            <a:r>
+              <a:rPr lang="en-US" altLang="en-US" sz="2800" dirty="0" err="1">
+                <a:latin typeface="Arial" panose="020B0604020202020204" pitchFamily="34" charset="0"/>
+              </a:rPr>
+              <a:t>e.getMessage</a:t>
+            </a:r>
+            <a:r>
+              <a:rPr lang="en-US" altLang="en-US" sz="2800" dirty="0">
+                <a:latin typeface="Arial" panose="020B0604020202020204" pitchFamily="34" charset="0"/>
+              </a:rPr>
+              <a:t>());</a:t>
+            </a:r>
+          </a:p>
+          <a:p>
+            <a:pPr>
+              <a:spcBef>
+                <a:spcPct val="0"/>
+              </a:spcBef>
+              <a:buFontTx/>
+              <a:buNone/>
+            </a:pPr>
+            <a:r>
+              <a:rPr lang="en-US" altLang="en-US" sz="2800" dirty="0">
+                <a:latin typeface="Arial" panose="020B0604020202020204" pitchFamily="34" charset="0"/>
+              </a:rPr>
+              <a:t>}		</a:t>
+            </a:r>
+          </a:p>
+          <a:p>
+            <a:pPr>
+              <a:spcBef>
+                <a:spcPct val="0"/>
+              </a:spcBef>
+              <a:buFontTx/>
+              <a:buNone/>
+            </a:pPr>
+            <a:r>
+              <a:rPr lang="en-US" altLang="en-US" sz="2800" dirty="0" err="1">
+                <a:latin typeface="Arial" panose="020B0604020202020204" pitchFamily="34" charset="0"/>
+              </a:rPr>
+              <a:t>System.out.println</a:t>
+            </a:r>
+            <a:r>
+              <a:rPr lang="en-US" altLang="en-US" sz="2800" dirty="0">
+                <a:latin typeface="Arial" panose="020B0604020202020204" pitchFamily="34" charset="0"/>
+              </a:rPr>
+              <a:t>("</a:t>
+            </a:r>
+            <a:r>
+              <a:rPr lang="en-US" altLang="en-US" sz="2800" dirty="0" err="1">
+                <a:latin typeface="Arial" panose="020B0604020202020204" pitchFamily="34" charset="0"/>
+              </a:rPr>
+              <a:t>compsci</a:t>
+            </a:r>
+            <a:r>
+              <a:rPr lang="en-US" altLang="en-US" sz="2800" dirty="0">
+                <a:latin typeface="Arial" panose="020B0604020202020204" pitchFamily="34" charset="0"/>
+              </a:rPr>
+              <a:t>");</a:t>
+            </a:r>
+          </a:p>
+        </p:txBody>
+      </p:sp>
+      <p:sp>
+        <p:nvSpPr>
+          <p:cNvPr id="2" name="Rectangle 1">
+            <a:extLst>
+              <a:ext uri="{FF2B5EF4-FFF2-40B4-BE49-F238E27FC236}">
+                <a16:creationId xmlns:a16="http://schemas.microsoft.com/office/drawing/2014/main" id="{1AC1F49B-6B96-2E73-041B-DD489AD9F3BE}"/>
+              </a:ext>
+            </a:extLst>
+          </p:cNvPr>
+          <p:cNvSpPr/>
+          <p:nvPr/>
+        </p:nvSpPr>
+        <p:spPr>
+          <a:xfrm>
+            <a:off x="1935925" y="465676"/>
+            <a:ext cx="5372304" cy="923330"/>
+          </a:xfrm>
+          <a:prstGeom prst="rect">
+            <a:avLst/>
+          </a:prstGeom>
+          <a:noFill/>
+        </p:spPr>
+        <p:txBody>
+          <a:bodyPr wrap="none" lIns="91440" tIns="45720" rIns="91440" bIns="45720">
+            <a:spAutoFit/>
+          </a:bodyPr>
+          <a:lstStyle/>
+          <a:p>
+            <a:pPr algn="ctr"/>
+            <a:r>
+              <a:rPr lang="en-US" sz="5400" b="1" cap="none" spc="0" dirty="0">
+                <a:ln w="22225">
+                  <a:solidFill>
+                    <a:schemeClr val="accent2"/>
+                  </a:solidFill>
+                  <a:prstDash val="solid"/>
+                </a:ln>
+                <a:solidFill>
+                  <a:srgbClr val="0000CC"/>
+                </a:solidFill>
+                <a:effectLst>
+                  <a:outerShdw blurRad="50800" dist="38100" dir="10800000" algn="r" rotWithShape="0">
+                    <a:prstClr val="black">
+                      <a:alpha val="40000"/>
+                    </a:prstClr>
+                  </a:outerShdw>
+                </a:effectLst>
+              </a:rPr>
+              <a:t>Will it Compile?</a:t>
+            </a:r>
+          </a:p>
+        </p:txBody>
+      </p:sp>
+      <p:sp>
+        <p:nvSpPr>
+          <p:cNvPr id="3" name="TextBox 2">
+            <a:extLst>
+              <a:ext uri="{FF2B5EF4-FFF2-40B4-BE49-F238E27FC236}">
+                <a16:creationId xmlns:a16="http://schemas.microsoft.com/office/drawing/2014/main" id="{2A210FC7-08DF-41DF-E238-CE445564C628}"/>
+              </a:ext>
+            </a:extLst>
+          </p:cNvPr>
+          <p:cNvSpPr txBox="1"/>
+          <p:nvPr/>
+        </p:nvSpPr>
+        <p:spPr>
+          <a:xfrm>
+            <a:off x="1219200" y="5181600"/>
+            <a:ext cx="6324600" cy="1384995"/>
+          </a:xfrm>
+          <a:prstGeom prst="rect">
+            <a:avLst/>
+          </a:prstGeom>
+          <a:noFill/>
+        </p:spPr>
+        <p:txBody>
+          <a:bodyPr wrap="square">
+            <a:spAutoFit/>
+          </a:bodyPr>
+          <a:lstStyle/>
+          <a:p>
+            <a:r>
+              <a:rPr lang="en-US" altLang="en-US" sz="2800" dirty="0">
+                <a:solidFill>
+                  <a:schemeClr val="accent6">
+                    <a:lumMod val="75000"/>
+                  </a:schemeClr>
+                </a:solidFill>
+              </a:rPr>
+              <a:t>It compiles and prints:</a:t>
+            </a:r>
+          </a:p>
+          <a:p>
+            <a:r>
+              <a:rPr lang="en-US" altLang="en-US" sz="2800" dirty="0">
+                <a:solidFill>
+                  <a:schemeClr val="accent6">
+                    <a:lumMod val="75000"/>
+                  </a:schemeClr>
+                </a:solidFill>
+                <a:latin typeface="Consolas" panose="020B0609020204030204" pitchFamily="49" charset="0"/>
+              </a:rPr>
+              <a:t>  </a:t>
+            </a:r>
+            <a:r>
+              <a:rPr lang="en-US" altLang="en-US" sz="2800" dirty="0" err="1">
+                <a:solidFill>
+                  <a:schemeClr val="accent6">
+                    <a:lumMod val="75000"/>
+                  </a:schemeClr>
+                </a:solidFill>
+                <a:latin typeface="Consolas" panose="020B0609020204030204" pitchFamily="49" charset="0"/>
+              </a:rPr>
+              <a:t>ArithmeticException</a:t>
+            </a:r>
+            <a:r>
+              <a:rPr lang="en-US" altLang="en-US" sz="2800" dirty="0">
+                <a:solidFill>
+                  <a:schemeClr val="accent6">
+                    <a:lumMod val="75000"/>
+                  </a:schemeClr>
+                </a:solidFill>
+                <a:latin typeface="Consolas" panose="020B0609020204030204" pitchFamily="49" charset="0"/>
+              </a:rPr>
+              <a:t>:  / by 0</a:t>
+            </a:r>
+          </a:p>
+          <a:p>
+            <a:r>
+              <a:rPr lang="en-US" altLang="en-US" sz="2800" dirty="0">
+                <a:solidFill>
+                  <a:schemeClr val="accent6">
+                    <a:lumMod val="75000"/>
+                  </a:schemeClr>
+                </a:solidFill>
+                <a:latin typeface="Consolas" panose="020B0609020204030204" pitchFamily="49" charset="0"/>
+              </a:rPr>
+              <a:t>  </a:t>
+            </a:r>
+            <a:r>
+              <a:rPr lang="en-US" altLang="en-US" sz="2800" dirty="0" err="1">
+                <a:solidFill>
+                  <a:schemeClr val="accent6">
+                    <a:lumMod val="75000"/>
+                  </a:schemeClr>
+                </a:solidFill>
+                <a:latin typeface="Consolas" panose="020B0609020204030204" pitchFamily="49" charset="0"/>
+              </a:rPr>
+              <a:t>compsci</a:t>
+            </a:r>
+            <a:r>
+              <a:rPr lang="en-US" altLang="en-US" sz="2800" dirty="0">
+                <a:solidFill>
+                  <a:schemeClr val="accent6">
+                    <a:lumMod val="75000"/>
+                  </a:schemeClr>
+                </a:solidFill>
+                <a:latin typeface="Consolas" panose="020B0609020204030204" pitchFamily="49" charset="0"/>
+              </a:rPr>
+              <a:t> </a:t>
+            </a:r>
+            <a:r>
+              <a:rPr lang="en-US" altLang="en-US" sz="2800" dirty="0">
+                <a:solidFill>
+                  <a:schemeClr val="accent6">
+                    <a:lumMod val="75000"/>
+                  </a:schemeClr>
+                </a:solidFill>
+              </a:rPr>
+              <a:t>	</a:t>
+            </a:r>
+          </a:p>
+        </p:txBody>
+      </p:sp>
+    </p:spTree>
+    <p:extLst>
+      <p:ext uri="{BB962C8B-B14F-4D97-AF65-F5344CB8AC3E}">
+        <p14:creationId xmlns:p14="http://schemas.microsoft.com/office/powerpoint/2010/main" val="2559826445"/>
+      </p:ext>
+    </p:extLst>
   </p:cSld>
   <p:clrMapOvr>
     <a:masterClrMapping/>
@@ -24503,19 +25213,7 @@
               <a:rPr lang="en-US" altLang="en-US" sz="2800" dirty="0">
                 <a:latin typeface="Arial" panose="020B0604020202020204" pitchFamily="34" charset="0"/>
               </a:rPr>
-              <a:t>catch (</a:t>
-            </a:r>
-            <a:r>
-              <a:rPr lang="en-US" altLang="en-US" sz="2800" dirty="0" err="1">
-                <a:latin typeface="Arial" panose="020B0604020202020204" pitchFamily="34" charset="0"/>
-              </a:rPr>
-              <a:t>ArithmeticException</a:t>
-            </a:r>
-            <a:r>
-              <a:rPr lang="en-US" altLang="en-US" sz="2800" dirty="0">
-                <a:latin typeface="Arial" panose="020B0604020202020204" pitchFamily="34" charset="0"/>
-              </a:rPr>
-              <a:t> e) {</a:t>
+              <a:t>catch (Exception e) {</a:t>
             </a:r>
           </a:p>
           <a:p>
@@ -24674,7 +25372,7 @@
         </p:nvSpPr>
         <p:spPr>
           <a:xfrm>
-            <a:off x="1219200" y="5181600"/>
+            <a:off x="1459777" y="5257800"/>
             <a:ext cx="6324600" cy="1384995"/>
           </a:xfrm>
           <a:prstGeom prst="rect">
@@ -24688,6 +25386,13 @@
           </a:bodyPr>
           <a:lstStyle/>
           <a:p>
+            <a:pPr>
+              <a:spcBef>
+                <a:spcPct val="0"/>
+              </a:spcBef>
+              <a:buFontTx/>
+              <a:buNone/>
+            </a:pPr>
             <a:r>
               <a:rPr lang="en-US" altLang="en-US" sz="2800" dirty="0">
                 <a:solidFill>
@@ -24700,6 +25405,13 @@
             </a:r>
           </a:p>
           <a:p>
+            <a:pPr>
+              <a:spcBef>
+                <a:spcPct val="0"/>
+              </a:spcBef>
+              <a:buFontTx/>
+              <a:buNone/>
+            </a:pPr>
             <a:r>
               <a:rPr lang="en-US" altLang="en-US" sz="2800" dirty="0">
                 <a:solidFill>
@@ -24735,6 +25447,13 @@
             </a:r>
           </a:p>
           <a:p>
+            <a:pPr>
+              <a:spcBef>
+                <a:spcPct val="0"/>
+              </a:spcBef>
+              <a:buFontTx/>
+              <a:buNone/>
+            </a:pPr>
             <a:r>
               <a:rPr lang="en-US" altLang="en-US" sz="2800" dirty="0">
                 <a:solidFill>
@@ -24775,6 +25494,7 @@
                     <a:lumMod val="75000"/>
                   </a:schemeClr>
                 </a:solidFill>
+                <a:latin typeface="Arial" panose="020B0604020202020204" pitchFamily="34" charset="0"/>
               </a:rPr>
               <a:t>	</a:t>
             </a:r>
@@ -24784,7 +25504,7 @@
     </p:spTree>
     <p:extLst>
       <p:ext uri="{BB962C8B-B14F-4D97-AF65-F5344CB8AC3E}">
-        <p14:creationId xmlns:p14="http://schemas.microsoft.com/office/powerpoint/2010/main" val="2559826445"/>
+        <p14:creationId xmlns:p14="http://schemas.microsoft.com/office/powerpoint/2010/main" val="938094335"/>
       </p:ext>
     </p:extLst>
   </p:cSld>
@@ -25178,691 +25898,6 @@
               <a:rPr lang="en-US" altLang="en-US" sz="2800" dirty="0">
                 <a:latin typeface="Arial" panose="020B0604020202020204" pitchFamily="34" charset="0"/>
               </a:rPr>
-              <a:t>catch (Exception e) {</a:t>
-            </a:r>
-          </a:p>
-          <a:p>
-            <a:pPr>
-              <a:spcBef>
-                <a:spcPct val="0"/>
-              </a:spcBef>
-              <a:buFontTx/>
-              <a:buNone/>
-            </a:pPr>
-            <a:r>
-              <a:rPr lang="en-US" altLang="en-US" sz="2800" dirty="0">
-                <a:latin typeface="Arial" panose="020B0604020202020204" pitchFamily="34" charset="0"/>
-              </a:rPr>
-              <a:t>   </a:t>
-            </a:r>
-            <a:r>
-              <a:rPr lang="en-US" altLang="en-US" sz="2800" dirty="0" err="1">
-                <a:latin typeface="Arial" panose="020B0604020202020204" pitchFamily="34" charset="0"/>
-              </a:rPr>
-              <a:t>out.println</a:t>
-            </a:r>
-            <a:r>
-              <a:rPr lang="en-US" altLang="en-US" sz="2800" dirty="0">
-                <a:latin typeface="Arial" panose="020B0604020202020204" pitchFamily="34" charset="0"/>
-              </a:rPr>
-              <a:t>(</a:t>
-            </a:r>
-            <a:r>
-              <a:rPr lang="en-US" altLang="en-US" sz="2800" dirty="0" err="1">
-                <a:latin typeface="Arial" panose="020B0604020202020204" pitchFamily="34" charset="0"/>
-              </a:rPr>
-              <a:t>e.getMessage</a:t>
-            </a:r>
-            <a:r>
-              <a:rPr lang="en-US" altLang="en-US" sz="2800" dirty="0">
-                <a:latin typeface="Arial" panose="020B0604020202020204" pitchFamily="34" charset="0"/>
-              </a:rPr>
-              <a:t>());</a:t>
-            </a:r>
-          </a:p>
-          <a:p>
-            <a:pPr>
-              <a:spcBef>
-                <a:spcPct val="0"/>
-              </a:spcBef>
-              <a:buFontTx/>
-              <a:buNone/>
-            </a:pPr>
-            <a:r>
-              <a:rPr lang="en-US" altLang="en-US" sz="2800" dirty="0">
-                <a:latin typeface="Arial" panose="020B0604020202020204" pitchFamily="34" charset="0"/>
-              </a:rPr>
-              <a:t>}		</a:t>
-            </a:r>
-          </a:p>
-          <a:p>
-            <a:pPr>
-              <a:spcBef>
-                <a:spcPct val="0"/>
-              </a:spcBef>
-              <a:buFontTx/>
-              <a:buNone/>
-            </a:pPr>
-            <a:r>
-              <a:rPr lang="en-US" altLang="en-US" sz="2800" dirty="0" err="1">
-                <a:latin typeface="Arial" panose="020B0604020202020204" pitchFamily="34" charset="0"/>
-              </a:rPr>
-              <a:t>System.out.println</a:t>
-            </a:r>
-            <a:r>
-              <a:rPr lang="en-US" altLang="en-US" sz="2800" dirty="0">
-                <a:latin typeface="Arial" panose="020B0604020202020204" pitchFamily="34" charset="0"/>
-              </a:rPr>
-              <a:t>("</a:t>
-            </a:r>
-            <a:r>
-              <a:rPr lang="en-US" altLang="en-US" sz="2800" dirty="0" err="1">
-                <a:latin typeface="Arial" panose="020B0604020202020204" pitchFamily="34" charset="0"/>
-              </a:rPr>
-              <a:t>compsci</a:t>
-            </a:r>
-            <a:r>
-              <a:rPr lang="en-US" altLang="en-US" sz="2800" dirty="0">
-                <a:latin typeface="Arial" panose="020B0604020202020204" pitchFamily="34" charset="0"/>
-              </a:rPr>
-              <a:t>");</a:t>
-            </a:r>
-          </a:p>
-        </p:txBody>
-      </p:sp>
-      <p:sp>
-        <p:nvSpPr>
-          <p:cNvPr id="2" name="Rectangle 1">
-            <a:extLst>
-              <a:ext uri="{FF2B5EF4-FFF2-40B4-BE49-F238E27FC236}">
-                <a16:creationId xmlns:a16="http://schemas.microsoft.com/office/drawing/2014/main" id="{1AC1F49B-6B96-2E73-041B-DD489AD9F3BE}"/>
-              </a:ext>
-            </a:extLst>
-          </p:cNvPr>
-          <p:cNvSpPr/>
-          <p:nvPr/>
-        </p:nvSpPr>
-        <p:spPr>
-          <a:xfrm>
-            <a:off x="1935925" y="465676"/>
-            <a:ext cx="5372304" cy="923330"/>
-          </a:xfrm>
-          <a:prstGeom prst="rect">
-            <a:avLst/>
-          </a:prstGeom>
-          <a:noFill/>
-        </p:spPr>
-        <p:txBody>
-          <a:bodyPr wrap="none" lIns="91440" tIns="45720" rIns="91440" bIns="45720">
-            <a:spAutoFit/>
-          </a:bodyPr>
-          <a:lstStyle/>
-          <a:p>
-            <a:pPr algn="ctr"/>
-            <a:r>
-              <a:rPr lang="en-US" sz="5400" b="1" cap="none" spc="0" dirty="0">
-                <a:ln w="22225">
-                  <a:solidFill>
-                    <a:schemeClr val="accent2"/>
-                  </a:solidFill>
-                  <a:prstDash val="solid"/>
-                </a:ln>
-                <a:solidFill>
-                  <a:srgbClr val="0000CC"/>
-                </a:solidFill>
-                <a:effectLst>
-                  <a:outerShdw blurRad="50800" dist="38100" dir="10800000" algn="r" rotWithShape="0">
-                    <a:prstClr val="black">
-                      <a:alpha val="40000"/>
-                    </a:prstClr>
-                  </a:outerShdw>
-                </a:effectLst>
-              </a:rPr>
-              <a:t>Will it Compile?</a:t>
-            </a:r>
-          </a:p>
-        </p:txBody>
-      </p:sp>
-      <p:sp>
-        <p:nvSpPr>
-          <p:cNvPr id="3" name="TextBox 2">
-            <a:extLst>
-              <a:ext uri="{FF2B5EF4-FFF2-40B4-BE49-F238E27FC236}">
-                <a16:creationId xmlns:a16="http://schemas.microsoft.com/office/drawing/2014/main" id="{2A210FC7-08DF-41DF-E238-CE445564C628}"/>
-              </a:ext>
-            </a:extLst>
-          </p:cNvPr>
-          <p:cNvSpPr txBox="1"/>
-          <p:nvPr/>
-        </p:nvSpPr>
-        <p:spPr>
-          <a:xfrm>
-            <a:off x="1459777" y="5257800"/>
-            <a:ext cx="6324600" cy="1384995"/>
-          </a:xfrm>
-          <a:prstGeom prst="rect">
-            <a:avLst/>
-          </a:prstGeom>
-          <a:noFill/>
-        </p:spPr>
-        <p:txBody>
-          <a:bodyPr wrap="square">
-            <a:spAutoFit/>
-          </a:bodyPr>
-          <a:lstStyle/>
-          <a:p>
-            <a:pPr>
-              <a:spcBef>
-                <a:spcPct val="0"/>
-              </a:spcBef>
-              <a:buFontTx/>
-              <a:buNone/>
-            </a:pPr>
-            <a:r>
-              <a:rPr lang="en-US" altLang="en-US" sz="2800" dirty="0">
-                <a:solidFill>
-                  <a:schemeClr val="accent6">
-                    <a:lumMod val="75000"/>
-                  </a:schemeClr>
-                </a:solidFill>
-              </a:rPr>
-              <a:t>It compiles and prints:</a:t>
-            </a:r>
-          </a:p>
-          <a:p>
-            <a:pPr>
-              <a:spcBef>
-                <a:spcPct val="0"/>
-              </a:spcBef>
-              <a:buFontTx/>
-              <a:buNone/>
-            </a:pPr>
-            <a:r>
-              <a:rPr lang="en-US" altLang="en-US" sz="2800" dirty="0">
-                <a:solidFill>
-                  <a:schemeClr val="accent6">
-                    <a:lumMod val="75000"/>
-                  </a:schemeClr>
-                </a:solidFill>
-                <a:latin typeface="Consolas" panose="020B0609020204030204" pitchFamily="49" charset="0"/>
-              </a:rPr>
-              <a:t>  </a:t>
-            </a:r>
-            <a:r>
-              <a:rPr lang="en-US" altLang="en-US" sz="2800" dirty="0" err="1">
-                <a:solidFill>
-                  <a:schemeClr val="accent6">
-                    <a:lumMod val="75000"/>
-                  </a:schemeClr>
-                </a:solidFill>
-                <a:latin typeface="Consolas" panose="020B0609020204030204" pitchFamily="49" charset="0"/>
-              </a:rPr>
-              <a:t>ArithmeticException</a:t>
-            </a:r>
-            <a:r>
-              <a:rPr lang="en-US" altLang="en-US" sz="2800" dirty="0">
-                <a:solidFill>
-                  <a:schemeClr val="accent6">
-                    <a:lumMod val="75000"/>
-                  </a:schemeClr>
-                </a:solidFill>
-                <a:latin typeface="Consolas" panose="020B0609020204030204" pitchFamily="49" charset="0"/>
-              </a:rPr>
-              <a:t>:  / by 0</a:t>
-            </a:r>
-          </a:p>
-          <a:p>
-            <a:pPr>
-              <a:spcBef>
-                <a:spcPct val="0"/>
-              </a:spcBef>
-              <a:buFontTx/>
-              <a:buNone/>
-            </a:pPr>
-            <a:r>
-              <a:rPr lang="en-US" altLang="en-US" sz="2800" dirty="0">
-                <a:solidFill>
-                  <a:schemeClr val="accent6">
-                    <a:lumMod val="75000"/>
-                  </a:schemeClr>
-                </a:solidFill>
-                <a:latin typeface="Consolas" panose="020B0609020204030204" pitchFamily="49" charset="0"/>
-              </a:rPr>
-              <a:t>  </a:t>
-            </a:r>
-            <a:r>
-              <a:rPr lang="en-US" altLang="en-US" sz="2800" dirty="0" err="1">
-                <a:solidFill>
-                  <a:schemeClr val="accent6">
-                    <a:lumMod val="75000"/>
-                  </a:schemeClr>
-                </a:solidFill>
-                <a:latin typeface="Consolas" panose="020B0609020204030204" pitchFamily="49" charset="0"/>
-              </a:rPr>
-              <a:t>compsci</a:t>
-            </a:r>
-            <a:r>
-              <a:rPr lang="en-US" altLang="en-US" sz="2800" dirty="0">
-                <a:solidFill>
-                  <a:schemeClr val="accent6">
-                    <a:lumMod val="75000"/>
-                  </a:schemeClr>
-                </a:solidFill>
-                <a:latin typeface="Consolas" panose="020B0609020204030204" pitchFamily="49" charset="0"/>
-              </a:rPr>
-              <a:t> </a:t>
-            </a:r>
-            <a:r>
-              <a:rPr lang="en-US" altLang="en-US" sz="2800" dirty="0">
-                <a:solidFill>
-                  <a:schemeClr val="accent6">
-                    <a:lumMod val="75000"/>
-                  </a:schemeClr>
-                </a:solidFill>
-                <a:latin typeface="Arial" panose="020B0604020202020204" pitchFamily="34" charset="0"/>
-              </a:rPr>
-              <a:t>	</a:t>
-            </a:r>
-          </a:p>
-        </p:txBody>
-      </p:sp>
-    </p:spTree>
-    <p:extLst>
-      <p:ext uri="{BB962C8B-B14F-4D97-AF65-F5344CB8AC3E}">
-        <p14:creationId xmlns:p14="http://schemas.microsoft.com/office/powerpoint/2010/main" val="938094335"/>
-      </p:ext>
-    </p:extLst>
-  </p:cSld>
-  <p:clrMapOvr>
-    <a:masterClrMapping/>
-  </p:clrMapOvr>
-  <p:timing>
-    <p:tnLst>
-      <p:par>
-        <p:cTn id="1" dur="indefinite" restart="never" nodeType="tmRoot">
-          <p:childTnLst>
-            <p:seq concurrent="1" nextAc="seek">
-              <p:cTn id="2" dur="indefinite" nodeType="mainSeq">
-                <p:childTnLst>
-                  <p:par>
-                    <p:cTn id="3" fill="hold">
-                      <p:stCondLst>
-                        <p:cond delay="indefinite"/>
-                      </p:stCondLst>
-                      <p:childTnLst>
-                        <p:par>
-                          <p:cTn id="4" fill="hold">
-                            <p:stCondLst>
-                              <p:cond delay="0"/>
-                            </p:stCondLst>
-                            <p:childTnLst>
-                              <p:par>
-                                <p:cTn id="5" presetID="1" presetClass="entr" presetSubtype="0" fill="hold" grpId="0" nodeType="clickEffect">
-                                  <p:stCondLst>
-                                    <p:cond delay="0"/>
-                                  </p:stCondLst>
-                                  <p:childTnLst>
-                                    <p:set>
-                                      <p:cBhvr>
-                                        <p:cTn id="6" dur="1" fill="hold">
-                                          <p:stCondLst>
-                                            <p:cond delay="0"/>
-                                          </p:stCondLst>
-                                        </p:cTn>
-                                        <p:tgtEl>
-                                          <p:spTgt spid="3"/>
-                                        </p:tgtEl>
-                                        <p:attrNameLst>
-                                          <p:attrName>style.visibility</p:attrName>
-                                        </p:attrNameLst>
-                                      </p:cBhvr>
-                                      <p:to>
-                                        <p:strVal val="visible"/>
-                                      </p:to>
-                                    </p:set>
-                                  </p:childTnLst>
-                                </p:cTn>
-                              </p:par>
-                            </p:childTnLst>
-                          </p:cTn>
-                        </p:par>
-                      </p:childTnLst>
-                    </p:cTn>
-                  </p:par>
-                </p:childTnLst>
-              </p:cTn>
-              <p:prevCondLst>
-                <p:cond evt="onPrev" delay="0">
-                  <p:tgtEl>
-                    <p:sldTgt/>
-                  </p:tgtEl>
-                </p:cond>
-              </p:prevCondLst>
-              <p:nextCondLst>
-                <p:cond evt="onNext" delay="0">
-                  <p:tgtEl>
-                    <p:sldTgt/>
-                  </p:tgtEl>
-                </p:cond>
-              </p:nextCondLst>
-            </p:seq>
-          </p:childTnLst>
-        </p:cTn>
-      </p:par>
-    </p:tnLst>
-    <p:bldLst>
-      <p:bldP spid="3" grpId="0"/>
-    </p:bldLst>
-  </p:timing>
-</p:sld>
-</file>
-
-<file path=ppt/slides/slide29.xml><?xml version="1.0" encoding="utf-8"?>
-<p:sld xmlns:a="http://schemas.openxmlformats.org/drawingml/2006/main" xmlns:r="http://schemas.openxmlformats.org/officeDocument/2006/relationships" xmlns:p="http://schemas.openxmlformats.org/presentationml/2006/main">
-  <p:cSld>
-    <p:spTree>
-      <p:nvGrpSpPr>
-        <p:cNvPr id="1" name=""/>
-        <p:cNvGrpSpPr/>
-        <p:nvPr/>
-      </p:nvGrpSpPr>
-      <p:grpSpPr>
-        <a:xfrm>
-          <a:off x="0" y="0"/>
-          <a:ext cx="0" cy="0"/>
-          <a:chOff x="0" y="0"/>
-          <a:chExt cx="0" cy="0"/>
-        </a:xfrm>
-      </p:grpSpPr>
-      <p:sp>
-        <p:nvSpPr>
-          <p:cNvPr id="5" name="Footer Placeholder 3">
-            <a:extLst>
-              <a:ext uri="{FF2B5EF4-FFF2-40B4-BE49-F238E27FC236}">
-                <a16:creationId xmlns:a16="http://schemas.microsoft.com/office/drawing/2014/main" id="{7189F3B2-DD47-4385-A057-7B442029312C}"/>
-              </a:ext>
-            </a:extLst>
-          </p:cNvPr>
-          <p:cNvSpPr>
-            <a:spLocks noGrp="1"/>
-          </p:cNvSpPr>
-          <p:nvPr>
-            <p:ph type="ftr" sz="quarter" idx="12"/>
-          </p:nvPr>
-        </p:nvSpPr>
-        <p:spPr>
-          <a:xfrm>
-            <a:off x="6019800" y="6300550"/>
-            <a:ext cx="2895600" cy="457200"/>
-          </a:xfrm>
-        </p:spPr>
-        <p:txBody>
-          <a:bodyPr/>
-          <a:lstStyle/>
-          <a:p>
-            <a:pPr>
-              <a:defRPr/>
-            </a:pPr>
-            <a:endParaRPr lang="en-US"/>
-          </a:p>
-          <a:p>
-            <a:pPr>
-              <a:defRPr/>
-            </a:pPr>
-            <a:endParaRPr lang="en-US" b="0">
-              <a:latin typeface="Tahoma" pitchFamily="34" charset="0"/>
-            </a:endParaRPr>
-          </a:p>
-          <a:p>
-            <a:pPr>
-              <a:defRPr/>
-            </a:pPr>
-            <a:endParaRPr lang="en-US">
-              <a:latin typeface="Tahoma" pitchFamily="34" charset="0"/>
-            </a:endParaRPr>
-          </a:p>
-          <a:p>
-            <a:pPr>
-              <a:defRPr/>
-            </a:pPr>
-            <a:r>
-              <a:rPr lang="en-US">
-                <a:latin typeface="Tahoma" pitchFamily="34" charset="0"/>
-              </a:rPr>
-              <a:t>© A+ Computer Science  -  www.apluscompsci.com</a:t>
-            </a:r>
-          </a:p>
-        </p:txBody>
-      </p:sp>
-      <p:sp>
-        <p:nvSpPr>
-          <p:cNvPr id="36867" name="Text Box 2">
-            <a:extLst>
-              <a:ext uri="{FF2B5EF4-FFF2-40B4-BE49-F238E27FC236}">
-                <a16:creationId xmlns:a16="http://schemas.microsoft.com/office/drawing/2014/main" id="{41046804-E7D4-449A-8EB2-1519FAFC372D}"/>
-              </a:ext>
-            </a:extLst>
-          </p:cNvPr>
-          <p:cNvSpPr txBox="1">
-            <a:spLocks noChangeArrowheads="1"/>
-          </p:cNvSpPr>
-          <p:nvPr/>
-        </p:nvSpPr>
-        <p:spPr bwMode="auto">
-          <a:xfrm>
-            <a:off x="1143000" y="1676400"/>
-            <a:ext cx="7696200" cy="3108543"/>
-          </a:xfrm>
-          <a:prstGeom prst="rect">
-            <a:avLst/>
-          </a:prstGeom>
-          <a:noFill/>
-          <a:ln>
-            <a:noFill/>
-          </a:ln>
-          <a:extLst>
-            <a:ext uri="{909E8E84-426E-40DD-AFC4-6F175D3DCCD1}">
-              <a14:hiddenFill xmlns:a14="http://schemas.microsoft.com/office/drawing/2010/main">
-                <a:solidFill>
-                  <a:srgbClr val="FFFFFF"/>
-                </a:solidFill>
-              </a14:hiddenFill>
-            </a:ext>
-            <a:ext uri="{91240B29-F687-4F45-9708-019B960494DF}">
-              <a14:hiddenLine xmlns:a14="http://schemas.microsoft.com/office/drawing/2010/main" w="12700">
-                <a:solidFill>
-                  <a:srgbClr val="000000"/>
-                </a:solidFill>
-                <a:miter lim="800000"/>
-                <a:headEnd type="none" w="sm" len="sm"/>
-                <a:tailEnd type="none" w="sm" len="sm"/>
-              </a14:hiddenLine>
-            </a:ext>
-          </a:extLst>
-        </p:spPr>
-        <p:txBody>
-          <a:bodyPr wrap="square">
-            <a:spAutoFit/>
-          </a:bodyPr>
-          <a:lstStyle>
-            <a:lvl1pPr>
-              <a:spcBef>
-                <a:spcPct val="20000"/>
-              </a:spcBef>
-              <a:buChar char="•"/>
-              <a:defRPr sz="3200">
-                <a:solidFill>
-                  <a:schemeClr val="tx1"/>
-                </a:solidFill>
-                <a:latin typeface="Times New Roman" panose="02020603050405020304" pitchFamily="18" charset="0"/>
-              </a:defRPr>
-            </a:lvl1pPr>
-            <a:lvl2pPr marL="742950" indent="-285750">
-              <a:spcBef>
-                <a:spcPct val="20000"/>
-              </a:spcBef>
-              <a:buChar char="–"/>
-              <a:defRPr sz="2800">
-                <a:solidFill>
-                  <a:schemeClr val="tx1"/>
-                </a:solidFill>
-                <a:latin typeface="Times New Roman" panose="02020603050405020304" pitchFamily="18" charset="0"/>
-              </a:defRPr>
-            </a:lvl2pPr>
-            <a:lvl3pPr marL="1143000" indent="-228600">
-              <a:spcBef>
-                <a:spcPct val="20000"/>
-              </a:spcBef>
-              <a:buChar char="•"/>
-              <a:defRPr sz="2400">
-                <a:solidFill>
-                  <a:schemeClr val="tx1"/>
-                </a:solidFill>
-                <a:latin typeface="Times New Roman" panose="02020603050405020304" pitchFamily="18" charset="0"/>
-              </a:defRPr>
-            </a:lvl3pPr>
-            <a:lvl4pPr marL="1600200" indent="-228600">
-              <a:spcBef>
-                <a:spcPct val="20000"/>
-              </a:spcBef>
-              <a:buChar char="–"/>
-              <a:defRPr sz="2000">
-                <a:solidFill>
-                  <a:schemeClr val="tx1"/>
-                </a:solidFill>
-                <a:latin typeface="Times New Roman" panose="02020603050405020304" pitchFamily="18" charset="0"/>
-              </a:defRPr>
-            </a:lvl4pPr>
-            <a:lvl5pPr marL="2057400" indent="-228600">
-              <a:spcBef>
-                <a:spcPct val="20000"/>
-              </a:spcBef>
-              <a:buChar char="•"/>
-              <a:defRPr sz="2000">
-                <a:solidFill>
-                  <a:schemeClr val="tx1"/>
-                </a:solidFill>
-                <a:latin typeface="Times New Roman" panose="02020603050405020304" pitchFamily="18" charset="0"/>
-              </a:defRPr>
-            </a:lvl5pPr>
-            <a:lvl6pPr marL="2514600" indent="-228600" eaLnBrk="0" fontAlgn="base" hangingPunct="0">
-              <a:spcBef>
-                <a:spcPct val="20000"/>
-              </a:spcBef>
-              <a:spcAft>
-                <a:spcPct val="0"/>
-              </a:spcAft>
-              <a:buChar char="•"/>
-              <a:defRPr sz="2000">
-                <a:solidFill>
-                  <a:schemeClr val="tx1"/>
-                </a:solidFill>
-                <a:latin typeface="Times New Roman" panose="02020603050405020304" pitchFamily="18" charset="0"/>
-              </a:defRPr>
-            </a:lvl6pPr>
-            <a:lvl7pPr marL="2971800" indent="-228600" eaLnBrk="0" fontAlgn="base" hangingPunct="0">
-              <a:spcBef>
-                <a:spcPct val="20000"/>
-              </a:spcBef>
-              <a:spcAft>
-                <a:spcPct val="0"/>
-              </a:spcAft>
-              <a:buChar char="•"/>
-              <a:defRPr sz="2000">
-                <a:solidFill>
-                  <a:schemeClr val="tx1"/>
-                </a:solidFill>
-                <a:latin typeface="Times New Roman" panose="02020603050405020304" pitchFamily="18" charset="0"/>
-              </a:defRPr>
-            </a:lvl7pPr>
-            <a:lvl8pPr marL="3429000" indent="-228600" eaLnBrk="0" fontAlgn="base" hangingPunct="0">
-              <a:spcBef>
-                <a:spcPct val="20000"/>
-              </a:spcBef>
-              <a:spcAft>
-                <a:spcPct val="0"/>
-              </a:spcAft>
-              <a:buChar char="•"/>
-              <a:defRPr sz="2000">
-                <a:solidFill>
-                  <a:schemeClr val="tx1"/>
-                </a:solidFill>
-                <a:latin typeface="Times New Roman" panose="02020603050405020304" pitchFamily="18" charset="0"/>
-              </a:defRPr>
-            </a:lvl8pPr>
-            <a:lvl9pPr marL="3886200" indent="-228600" eaLnBrk="0" fontAlgn="base" hangingPunct="0">
-              <a:spcBef>
-                <a:spcPct val="20000"/>
-              </a:spcBef>
-              <a:spcAft>
-                <a:spcPct val="0"/>
-              </a:spcAft>
-              <a:buChar char="•"/>
-              <a:defRPr sz="2000">
-                <a:solidFill>
-                  <a:schemeClr val="tx1"/>
-                </a:solidFill>
-                <a:latin typeface="Times New Roman" panose="02020603050405020304" pitchFamily="18" charset="0"/>
-              </a:defRPr>
-            </a:lvl9pPr>
-          </a:lstStyle>
-          <a:p>
-            <a:pPr>
-              <a:spcBef>
-                <a:spcPct val="0"/>
-              </a:spcBef>
-              <a:buFontTx/>
-              <a:buNone/>
-            </a:pPr>
-            <a:r>
-              <a:rPr lang="en-US" altLang="en-US" sz="2800" dirty="0">
-                <a:latin typeface="Arial" panose="020B0604020202020204" pitchFamily="34" charset="0"/>
-              </a:rPr>
-              <a:t>try{</a:t>
-            </a:r>
-          </a:p>
-          <a:p>
-            <a:pPr>
-              <a:spcBef>
-                <a:spcPct val="0"/>
-              </a:spcBef>
-              <a:buFontTx/>
-              <a:buNone/>
-            </a:pPr>
-            <a:r>
-              <a:rPr lang="en-US" altLang="en-US" sz="2800" dirty="0">
-                <a:latin typeface="Arial" panose="020B0604020202020204" pitchFamily="34" charset="0"/>
-              </a:rPr>
-              <a:t>   int num=3/0;</a:t>
-            </a:r>
-          </a:p>
-          <a:p>
-            <a:pPr>
-              <a:spcBef>
-                <a:spcPct val="0"/>
-              </a:spcBef>
-              <a:buFontTx/>
-              <a:buNone/>
-            </a:pPr>
-            <a:r>
-              <a:rPr lang="en-US" altLang="en-US" sz="2800" dirty="0">
-                <a:latin typeface="Arial" panose="020B0604020202020204" pitchFamily="34" charset="0"/>
-              </a:rPr>
-              <a:t>}</a:t>
-            </a:r>
-          </a:p>
-          <a:p>
-            <a:pPr>
-              <a:spcBef>
-                <a:spcPct val="0"/>
-              </a:spcBef>
-              <a:buFontTx/>
-              <a:buNone/>
-            </a:pPr>
-            <a:r>
-              <a:rPr lang="en-US" altLang="en-US" sz="2800" dirty="0">
-                <a:latin typeface="Arial" panose="020B0604020202020204" pitchFamily="34" charset="0"/>
-              </a:rPr>
               <a:t>catch (</a:t>
             </a:r>
             <a:r>
@@ -26174,6 +26209,474 @@
 </p:sld>
 </file>
 
+<file path=ppt/slides/slide29.xml><?xml version="1.0" encoding="utf-8"?>
+<p:sld xmlns:a="http://schemas.openxmlformats.org/drawingml/2006/main" xmlns:r="http://schemas.openxmlformats.org/officeDocument/2006/relationships" xmlns:p="http://schemas.openxmlformats.org/presentationml/2006/main" showMasterPhAnim="0">
+  <p:cSld>
+    <p:bg>
+      <p:bgPr>
+        <a:solidFill>
+          <a:schemeClr val="bg1"/>
+        </a:solidFill>
+        <a:effectLst/>
+      </p:bgPr>
+    </p:bg>
+    <p:spTree>
+      <p:nvGrpSpPr>
+        <p:cNvPr id="1" name=""/>
+        <p:cNvGrpSpPr/>
+        <p:nvPr/>
+      </p:nvGrpSpPr>
+      <p:grpSpPr>
+        <a:xfrm>
+          <a:off x="0" y="0"/>
+          <a:ext cx="0" cy="0"/>
+          <a:chOff x="0" y="0"/>
+          <a:chExt cx="0" cy="0"/>
+        </a:xfrm>
+      </p:grpSpPr>
+      <p:sp>
+        <p:nvSpPr>
+          <p:cNvPr id="61442" name="AutoShape 2">
+            <a:extLst>
+              <a:ext uri="{FF2B5EF4-FFF2-40B4-BE49-F238E27FC236}">
+                <a16:creationId xmlns:a16="http://schemas.microsoft.com/office/drawing/2014/main" id="{3CF3877A-1EB1-AD12-D78C-7A2712F8DFBA}"/>
+              </a:ext>
+            </a:extLst>
+          </p:cNvPr>
+          <p:cNvSpPr>
+            <a:spLocks noGrp="1" noChangeArrowheads="1"/>
+          </p:cNvSpPr>
+          <p:nvPr>
+            <p:ph type="title"/>
+          </p:nvPr>
+        </p:nvSpPr>
+        <p:spPr>
+          <a:xfrm>
+            <a:off x="867638" y="137284"/>
+            <a:ext cx="7416372" cy="657638"/>
+          </a:xfrm>
+        </p:spPr>
+        <p:txBody>
+          <a:bodyPr anchor="t">
+            <a:normAutofit/>
+          </a:bodyPr>
+          <a:lstStyle/>
+          <a:p>
+            <a:pPr eaLnBrk="1" hangingPunct="1"/>
+            <a:r>
+              <a:rPr lang="en-US" altLang="en-US" sz="3600" b="1" dirty="0">
+                <a:solidFill>
+                  <a:schemeClr val="tx1"/>
+                </a:solidFill>
+                <a:latin typeface="Abadi" panose="020B0604020104020204" pitchFamily="34" charset="0"/>
+              </a:rPr>
+              <a:t>Execution of try catch blocks</a:t>
+            </a:r>
+          </a:p>
+        </p:txBody>
+      </p:sp>
+      <p:sp>
+        <p:nvSpPr>
+          <p:cNvPr id="2" name="Rectangle 1">
+            <a:extLst>
+              <a:ext uri="{FF2B5EF4-FFF2-40B4-BE49-F238E27FC236}">
+                <a16:creationId xmlns:a16="http://schemas.microsoft.com/office/drawing/2014/main" id="{0C6D35CE-B18C-ECF2-5A61-46B6F57C2CA2}"/>
+              </a:ext>
+            </a:extLst>
+          </p:cNvPr>
+          <p:cNvSpPr/>
+          <p:nvPr/>
+        </p:nvSpPr>
+        <p:spPr bwMode="auto">
+          <a:xfrm>
+            <a:off x="410438" y="1892763"/>
+            <a:ext cx="914400" cy="159943"/>
+          </a:xfrm>
+          <a:prstGeom prst="rect">
+            <a:avLst/>
+          </a:prstGeom>
+          <a:solidFill>
+            <a:srgbClr val="F2F2F2"/>
+          </a:solidFill>
+          <a:ln w="12700" cap="flat" cmpd="sng" algn="ctr">
+            <a:noFill/>
+            <a:prstDash val="solid"/>
+            <a:round/>
+            <a:headEnd type="none" w="sm" len="sm"/>
+            <a:tailEnd type="none" w="sm" len="sm"/>
+          </a:ln>
+          <a:effectLst/>
+        </p:spPr>
+        <p:txBody>
+          <a:bodyPr vert="horz" wrap="square" lIns="91440" tIns="45720" rIns="91440" bIns="45720" numCol="1" rtlCol="0" anchor="t" anchorCtr="0" compatLnSpc="1">
+            <a:prstTxWarp prst="textNoShape">
+              <a:avLst/>
+            </a:prstTxWarp>
+          </a:bodyPr>
+          <a:lstStyle/>
+          <a:p>
+            <a:pPr marL="0" marR="0" indent="0" algn="l" defTabSz="914400" rtl="0" eaLnBrk="0" fontAlgn="base" latinLnBrk="0" hangingPunct="0">
+              <a:lnSpc>
+                <a:spcPct val="100000"/>
+              </a:lnSpc>
+              <a:spcBef>
+                <a:spcPct val="0"/>
+              </a:spcBef>
+              <a:spcAft>
+                <a:spcPct val="0"/>
+              </a:spcAft>
+              <a:buClrTx/>
+              <a:buSzTx/>
+              <a:buFontTx/>
+              <a:buNone/>
+              <a:tabLst/>
+            </a:pPr>
+            <a:endParaRPr kumimoji="0" lang="en-US" sz="2400" b="1" i="0" u="none" strike="noStrike" cap="none" normalizeH="0" baseline="0">
+              <a:ln>
+                <a:noFill/>
+              </a:ln>
+              <a:solidFill>
+                <a:schemeClr val="tx1"/>
+              </a:solidFill>
+              <a:effectLst/>
+              <a:latin typeface="Arial" charset="0"/>
+            </a:endParaRPr>
+          </a:p>
+        </p:txBody>
+      </p:sp>
+      <p:sp>
+        <p:nvSpPr>
+          <p:cNvPr id="4" name="Rectangle 3">
+            <a:extLst>
+              <a:ext uri="{FF2B5EF4-FFF2-40B4-BE49-F238E27FC236}">
+                <a16:creationId xmlns:a16="http://schemas.microsoft.com/office/drawing/2014/main" id="{49730982-C786-8484-70B1-1282EFA37AE7}"/>
+              </a:ext>
+            </a:extLst>
+          </p:cNvPr>
+          <p:cNvSpPr txBox="1">
+            <a:spLocks noChangeArrowheads="1"/>
+          </p:cNvSpPr>
+          <p:nvPr/>
+        </p:nvSpPr>
+        <p:spPr bwMode="auto">
+          <a:xfrm>
+            <a:off x="152400" y="941656"/>
+            <a:ext cx="8763000" cy="5916344"/>
+          </a:xfrm>
+          <a:prstGeom prst="rect">
+            <a:avLst/>
+          </a:prstGeom>
+          <a:noFill/>
+          <a:ln>
+            <a:noFill/>
+          </a:ln>
+          <a:extLst>
+            <a:ext uri="{909E8E84-426E-40DD-AFC4-6F175D3DCCD1}">
+              <a14:hiddenFill xmlns:a14="http://schemas.microsoft.com/office/drawing/2010/main">
+                <a:solidFill>
+                  <a:srgbClr val="FFFFFF"/>
+                </a:solidFill>
+              </a14:hiddenFill>
+            </a:ext>
+            <a:ext uri="{91240B29-F687-4F45-9708-019B960494DF}">
+              <a14:hiddenLine xmlns:a14="http://schemas.microsoft.com/office/drawing/2010/main" w="9525">
+                <a:solidFill>
+                  <a:srgbClr val="000000"/>
+                </a:solidFill>
+                <a:miter lim="800000"/>
+                <a:headEnd/>
+                <a:tailEnd/>
+              </a14:hiddenLine>
+            </a:ext>
+          </a:extLst>
+        </p:spPr>
+        <p:txBody>
+          <a:bodyPr vert="horz" wrap="square" lIns="92075" tIns="46038" rIns="92075" bIns="46038" numCol="1" anchor="t" anchorCtr="0" compatLnSpc="1">
+            <a:prstTxWarp prst="textNoShape">
+              <a:avLst/>
+            </a:prstTxWarp>
+            <a:noAutofit/>
+          </a:bodyPr>
+          <a:lstStyle>
+            <a:lvl1pPr marL="342900" indent="-342900" algn="l" rtl="0" eaLnBrk="0" fontAlgn="base" hangingPunct="0">
+              <a:spcBef>
+                <a:spcPct val="20000"/>
+              </a:spcBef>
+              <a:spcAft>
+                <a:spcPct val="0"/>
+              </a:spcAft>
+              <a:buChar char="•"/>
+              <a:defRPr sz="3200">
+                <a:solidFill>
+                  <a:schemeClr val="tx1"/>
+                </a:solidFill>
+                <a:latin typeface="+mn-lt"/>
+                <a:ea typeface="+mn-ea"/>
+                <a:cs typeface="+mn-cs"/>
+              </a:defRPr>
+            </a:lvl1pPr>
+            <a:lvl2pPr marL="742950" indent="-285750" algn="l" rtl="0" eaLnBrk="0" fontAlgn="base" hangingPunct="0">
+              <a:spcBef>
+                <a:spcPct val="20000"/>
+              </a:spcBef>
+              <a:spcAft>
+                <a:spcPct val="0"/>
+              </a:spcAft>
+              <a:buChar char="–"/>
+              <a:defRPr sz="2800">
+                <a:solidFill>
+                  <a:schemeClr val="tx1"/>
+                </a:solidFill>
+                <a:latin typeface="+mn-lt"/>
+              </a:defRPr>
+            </a:lvl2pPr>
+            <a:lvl3pPr marL="1143000" indent="-228600" algn="l" rtl="0" eaLnBrk="0" fontAlgn="base" hangingPunct="0">
+              <a:spcBef>
+                <a:spcPct val="20000"/>
+              </a:spcBef>
+              <a:spcAft>
+                <a:spcPct val="0"/>
+              </a:spcAft>
+              <a:buChar char="•"/>
+              <a:defRPr sz="2400">
+                <a:solidFill>
+                  <a:schemeClr val="tx1"/>
+                </a:solidFill>
+                <a:latin typeface="+mn-lt"/>
+              </a:defRPr>
+            </a:lvl3pPr>
+            <a:lvl4pPr marL="1600200" indent="-228600" algn="l" rtl="0" eaLnBrk="0" fontAlgn="base" hangingPunct="0">
+              <a:spcBef>
+                <a:spcPct val="20000"/>
+              </a:spcBef>
+              <a:spcAft>
+                <a:spcPct val="0"/>
+              </a:spcAft>
+              <a:buChar char="–"/>
+              <a:defRPr sz="2000">
+                <a:solidFill>
+                  <a:schemeClr val="tx1"/>
+                </a:solidFill>
+                <a:latin typeface="+mn-lt"/>
+              </a:defRPr>
+            </a:lvl4pPr>
+            <a:lvl5pPr marL="2057400" indent="-228600" algn="l" rtl="0" eaLnBrk="0" fontAlgn="base" hangingPunct="0">
+              <a:spcBef>
+                <a:spcPct val="20000"/>
+              </a:spcBef>
+              <a:spcAft>
+                <a:spcPct val="0"/>
+              </a:spcAft>
+              <a:buChar char="•"/>
+              <a:defRPr sz="2000">
+                <a:solidFill>
+                  <a:schemeClr val="tx1"/>
+                </a:solidFill>
+                <a:latin typeface="+mn-lt"/>
+              </a:defRPr>
+            </a:lvl5pPr>
+            <a:lvl6pPr marL="2514600" indent="-228600" algn="l" rtl="0" eaLnBrk="0" fontAlgn="base" hangingPunct="0">
+              <a:spcBef>
+                <a:spcPct val="20000"/>
+              </a:spcBef>
+              <a:spcAft>
+                <a:spcPct val="0"/>
+              </a:spcAft>
+              <a:buChar char="•"/>
+              <a:defRPr sz="2000">
+                <a:solidFill>
+                  <a:schemeClr val="tx1"/>
+                </a:solidFill>
+                <a:latin typeface="+mn-lt"/>
+              </a:defRPr>
+            </a:lvl6pPr>
+            <a:lvl7pPr marL="2971800" indent="-228600" algn="l" rtl="0" eaLnBrk="0" fontAlgn="base" hangingPunct="0">
+              <a:spcBef>
+                <a:spcPct val="20000"/>
+              </a:spcBef>
+              <a:spcAft>
+                <a:spcPct val="0"/>
+              </a:spcAft>
+              <a:buChar char="•"/>
+              <a:defRPr sz="2000">
+                <a:solidFill>
+                  <a:schemeClr val="tx1"/>
+                </a:solidFill>
+                <a:latin typeface="+mn-lt"/>
+              </a:defRPr>
+            </a:lvl7pPr>
+            <a:lvl8pPr marL="3429000" indent="-228600" algn="l" rtl="0" eaLnBrk="0" fontAlgn="base" hangingPunct="0">
+              <a:spcBef>
+                <a:spcPct val="20000"/>
+              </a:spcBef>
+              <a:spcAft>
+                <a:spcPct val="0"/>
+              </a:spcAft>
+              <a:buChar char="•"/>
+              <a:defRPr sz="2000">
+                <a:solidFill>
+                  <a:schemeClr val="tx1"/>
+                </a:solidFill>
+                <a:latin typeface="+mn-lt"/>
+              </a:defRPr>
+            </a:lvl8pPr>
+            <a:lvl9pPr marL="3886200" indent="-228600" algn="l" rtl="0" eaLnBrk="0" fontAlgn="base" hangingPunct="0">
+              <a:spcBef>
+                <a:spcPct val="20000"/>
+              </a:spcBef>
+              <a:spcAft>
+                <a:spcPct val="0"/>
+              </a:spcAft>
+              <a:buChar char="•"/>
+              <a:defRPr sz="2000">
+                <a:solidFill>
+                  <a:schemeClr val="tx1"/>
+                </a:solidFill>
+                <a:latin typeface="+mn-lt"/>
+              </a:defRPr>
+            </a:lvl9pPr>
+          </a:lstStyle>
+          <a:p>
+            <a:pPr marL="0" indent="0" eaLnBrk="1" hangingPunct="1">
+              <a:lnSpc>
+                <a:spcPct val="90000"/>
+              </a:lnSpc>
+              <a:buFontTx/>
+              <a:buNone/>
+            </a:pPr>
+            <a:r>
+              <a:rPr lang="en-US" altLang="en-US" sz="2800" kern="0" dirty="0">
+                <a:latin typeface="Abadi" panose="020B0604020104020204" pitchFamily="34" charset="0"/>
+              </a:rPr>
+              <a:t>1) Normal execution:</a:t>
+            </a:r>
+          </a:p>
+          <a:p>
+            <a:pPr marL="457200" lvl="1" indent="0" eaLnBrk="1" hangingPunct="1">
+              <a:lnSpc>
+                <a:spcPct val="90000"/>
+              </a:lnSpc>
+              <a:buNone/>
+            </a:pPr>
+            <a:r>
+              <a:rPr lang="en-US" altLang="en-US" b="0" kern="0" dirty="0">
+                <a:latin typeface="Abadi" panose="020B0604020104020204" pitchFamily="34" charset="0"/>
+              </a:rPr>
+              <a:t>No exception thrown. Nothing needs to be caught.</a:t>
+            </a:r>
+          </a:p>
+          <a:p>
+            <a:pPr marL="0" indent="0" eaLnBrk="1" hangingPunct="1">
+              <a:lnSpc>
+                <a:spcPct val="90000"/>
+              </a:lnSpc>
+              <a:buFontTx/>
+              <a:buNone/>
+            </a:pPr>
+            <a:r>
+              <a:rPr lang="en-US" altLang="en-US" sz="2800" kern="0" dirty="0">
+                <a:latin typeface="Abadi" panose="020B0604020104020204" pitchFamily="34" charset="0"/>
+              </a:rPr>
+              <a:t>When an error is caught …</a:t>
+            </a:r>
+          </a:p>
+          <a:p>
+            <a:pPr marL="0" indent="0" eaLnBrk="1" hangingPunct="1">
+              <a:lnSpc>
+                <a:spcPct val="90000"/>
+              </a:lnSpc>
+              <a:buFontTx/>
+              <a:buNone/>
+            </a:pPr>
+            <a:r>
+              <a:rPr lang="en-US" altLang="en-US" sz="2800" kern="0" dirty="0">
+                <a:latin typeface="Abadi" panose="020B0604020104020204" pitchFamily="34" charset="0"/>
+              </a:rPr>
+              <a:t>2) and catch block does not throw a new exception:</a:t>
+            </a:r>
+          </a:p>
+          <a:p>
+            <a:pPr marL="457200" lvl="1" indent="0" eaLnBrk="1" hangingPunct="1">
+              <a:lnSpc>
+                <a:spcPct val="90000"/>
+              </a:lnSpc>
+              <a:buNone/>
+            </a:pPr>
+            <a:r>
+              <a:rPr lang="en-US" altLang="en-US" b="0" kern="0" dirty="0">
+                <a:latin typeface="Abadi" panose="020B0604020104020204" pitchFamily="34" charset="0"/>
+              </a:rPr>
+              <a:t>It’s possible to handle the exceptional situation at this level of abstraction.</a:t>
+            </a:r>
+          </a:p>
+          <a:p>
+            <a:pPr marL="0" indent="0" eaLnBrk="1" hangingPunct="1">
+              <a:lnSpc>
+                <a:spcPct val="90000"/>
+              </a:lnSpc>
+              <a:buFontTx/>
+              <a:buNone/>
+            </a:pPr>
+            <a:r>
+              <a:rPr lang="en-US" altLang="en-US" sz="2800" kern="0" dirty="0">
+                <a:latin typeface="Abadi" panose="020B0604020104020204" pitchFamily="34" charset="0"/>
+              </a:rPr>
+              <a:t>3) and the catch block throws a new exception:</a:t>
+            </a:r>
+          </a:p>
+          <a:p>
+            <a:pPr marL="457200" lvl="1" indent="0" eaLnBrk="1" hangingPunct="1">
+              <a:lnSpc>
+                <a:spcPct val="90000"/>
+              </a:lnSpc>
+              <a:buNone/>
+            </a:pPr>
+            <a:r>
+              <a:rPr lang="en-US" altLang="en-US" b="0" kern="0" dirty="0">
+                <a:latin typeface="Abadi" panose="020B0604020104020204" pitchFamily="34" charset="0"/>
+              </a:rPr>
+              <a:t>It’s not possible to handle the exceptional situation at this level, but you want to add information to the error message.</a:t>
+            </a:r>
+          </a:p>
+          <a:p>
+            <a:pPr marL="0" indent="0" eaLnBrk="1" hangingPunct="1">
+              <a:lnSpc>
+                <a:spcPct val="90000"/>
+              </a:lnSpc>
+              <a:buFontTx/>
+              <a:buNone/>
+            </a:pPr>
+            <a:r>
+              <a:rPr lang="en-US" altLang="en-US" sz="2800" kern="0" dirty="0">
+                <a:latin typeface="Abadi" panose="020B0604020104020204" pitchFamily="34" charset="0"/>
+              </a:rPr>
+              <a:t>4) When an error occurs that is not caught:</a:t>
+            </a:r>
+          </a:p>
+          <a:p>
+            <a:pPr marL="457200" lvl="1" indent="0" eaLnBrk="1" hangingPunct="1">
+              <a:lnSpc>
+                <a:spcPct val="90000"/>
+              </a:lnSpc>
+              <a:buNone/>
+            </a:pPr>
+            <a:r>
+              <a:rPr lang="en-US" altLang="en-US" b="0" kern="0" dirty="0">
+                <a:latin typeface="Abadi" panose="020B0604020104020204" pitchFamily="34" charset="0"/>
+              </a:rPr>
+              <a:t>It’s not possible to handle the exceptional situation at this level and the original error message is fine.</a:t>
+            </a:r>
+          </a:p>
+        </p:txBody>
+      </p:sp>
+    </p:spTree>
+  </p:cSld>
+  <p:clrMapOvr>
+    <a:masterClrMapping/>
+  </p:clrMapOvr>
+</p:sld>
+</file>
+
 <file path=ppt/slides/slide3.xml><?xml version="1.0" encoding="utf-8"?>
 <p:sld xmlns:a="http://schemas.openxmlformats.org/drawingml/2006/main" xmlns:r="http://schemas.openxmlformats.org/officeDocument/2006/relationships" xmlns:p="http://schemas.openxmlformats.org/presentationml/2006/main">
   <p:cSld>
@@ -26905,7 +27408,7 @@
               <a:rPr lang="en-US" altLang="en-US" sz="2800" kern="0" dirty="0">
                 <a:latin typeface="Abadi" panose="020B0604020104020204" pitchFamily="34" charset="0"/>
               </a:rPr>
-              <a:t>Normal execution:</a:t>
+              <a:t>1) Normal execution:</a:t>
             </a:r>
           </a:p>
           <a:p>
@@ -26966,7 +27469,7 @@
               <a:rPr lang="en-US" altLang="en-US" sz="2800" kern="0" dirty="0">
                 <a:latin typeface="Abadi" panose="020B0604020104020204" pitchFamily="34" charset="0"/>
               </a:rPr>
-              <a:t>and catch block doesn’t throw an exception or return:</a:t>
+              <a:t>2) and catch block doesn’t throw an exception or return:</a:t>
             </a:r>
           </a:p>
           <a:p>
@@ -27012,7 +27515,7 @@
               <a:rPr lang="en-US" altLang="en-US" sz="2800" kern="0" dirty="0">
                 <a:latin typeface="Abadi" panose="020B0604020104020204" pitchFamily="34" charset="0"/>
               </a:rPr>
-              <a:t>and the catch block throws an exception or returns:</a:t>
+              <a:t>3) and the catch block throws an exception or returns:</a:t>
             </a:r>
           </a:p>
           <a:p>
@@ -27047,7 +27550,7 @@
               <a:rPr lang="en-US" altLang="en-US" sz="2800" kern="0" dirty="0">
                 <a:latin typeface="Abadi" panose="020B0604020104020204" pitchFamily="34" charset="0"/>
               </a:rPr>
-              <a:t>When an error occurs that is not caught:</a:t>
+              <a:t>4) When an error occurs that is not caught:</a:t>
             </a:r>
           </a:p>
           <a:p>
@@ -27073,677 +27576,15 @@
         </p:txBody>
       </p:sp>
     </p:spTree>
+    <p:extLst>
+      <p:ext uri="{BB962C8B-B14F-4D97-AF65-F5344CB8AC3E}">
+        <p14:creationId xmlns:p14="http://schemas.microsoft.com/office/powerpoint/2010/main" val="2819375045"/>
+      </p:ext>
+    </p:extLst>
   </p:cSld>
   <p:clrMapOvr>
     <a:masterClrMapping/>
   </p:clrMapOvr>
-  <p:timing>
-    <p:tnLst>
-      <p:par>
-        <p:cTn id="1" dur="indefinite" restart="never" nodeType="tmRoot">
-          <p:childTnLst>
-            <p:seq concurrent="1" nextAc="seek">
-              <p:cTn id="2" dur="indefinite" nodeType="mainSeq">
-                <p:childTnLst>
-                  <p:par>
-                    <p:cTn id="3" fill="hold" nodeType="clickPar">
-                      <p:stCondLst>
-                        <p:cond delay="indefinite"/>
-                        <p:cond evt="onBegin" delay="0">
-                          <p:tn val="2"/>
-                        </p:cond>
-                      </p:stCondLst>
-                      <p:childTnLst>
-                        <p:par>
-                          <p:cTn id="4" fill="hold" nodeType="withGroup">
-                            <p:stCondLst>
-                              <p:cond delay="0"/>
-                            </p:stCondLst>
-                            <p:childTnLst>
-                              <p:par>
-                                <p:cTn id="5" presetID="53" presetClass="entr" presetSubtype="0" fill="hold" nodeType="withEffect">
-                                  <p:stCondLst>
-                                    <p:cond delay="0"/>
-                                  </p:stCondLst>
-                                  <p:childTnLst>
-                                    <p:set>
-                                      <p:cBhvr>
-                                        <p:cTn id="6" dur="1" fill="hold">
-                                          <p:stCondLst>
-                                            <p:cond delay="0"/>
-                                          </p:stCondLst>
-                                        </p:cTn>
-                                        <p:tgtEl>
-                                          <p:spTgt spid="61442"/>
-                                        </p:tgtEl>
-                                        <p:attrNameLst>
-                                          <p:attrName>style.visibility</p:attrName>
-                                        </p:attrNameLst>
-                                      </p:cBhvr>
-                                      <p:to>
-                                        <p:strVal val="visible"/>
-                                      </p:to>
-                                    </p:set>
-                                    <p:anim calcmode="lin" valueType="num">
-                                      <p:cBhvr>
-                                        <p:cTn id="7" dur="500" fill="hold"/>
-                                        <p:tgtEl>
-                                          <p:spTgt spid="61442"/>
-                                        </p:tgtEl>
-                                        <p:attrNameLst>
-                                          <p:attrName>ppt_w</p:attrName>
-                                        </p:attrNameLst>
-                                      </p:cBhvr>
-                                      <p:tavLst>
-                                        <p:tav tm="0">
-                                          <p:val>
-                                            <p:fltVal val="0"/>
-                                          </p:val>
-                                        </p:tav>
-                                        <p:tav tm="100000">
-                                          <p:val>
-                                            <p:strVal val="#ppt_w"/>
-                                          </p:val>
-                                        </p:tav>
-                                      </p:tavLst>
-                                    </p:anim>
-                                    <p:anim calcmode="lin" valueType="num">
-                                      <p:cBhvr>
-                                        <p:cTn id="8" dur="500" fill="hold"/>
-                                        <p:tgtEl>
-                                          <p:spTgt spid="61442"/>
-                                        </p:tgtEl>
-                                        <p:attrNameLst>
-                                          <p:attrName>ppt_h</p:attrName>
-                                        </p:attrNameLst>
-                                      </p:cBhvr>
-                                      <p:tavLst>
-                                        <p:tav tm="0">
-                                          <p:val>
-                                            <p:fltVal val="0"/>
-                                          </p:val>
-                                        </p:tav>
-                                        <p:tav tm="100000">
-                                          <p:val>
-                                            <p:strVal val="#ppt_h"/>
-                                          </p:val>
-                                        </p:tav>
-                                      </p:tavLst>
-                                    </p:anim>
-                                    <p:animEffect transition="in" filter="fade">
-                                      <p:cBhvr>
-                                        <p:cTn id="9" dur="500"/>
-                                        <p:tgtEl>
-                                          <p:spTgt spid="61442"/>
-                                        </p:tgtEl>
-                                      </p:cBhvr>
-                                    </p:animEffect>
-                                  </p:childTnLst>
-                                </p:cTn>
-                              </p:par>
-                            </p:childTnLst>
-                          </p:cTn>
-                        </p:par>
-                      </p:childTnLst>
-                    </p:cTn>
-                  </p:par>
-                  <p:par>
-                    <p:cTn id="10" fill="hold">
-                      <p:stCondLst>
-                        <p:cond delay="indefinite"/>
-                      </p:stCondLst>
-                      <p:childTnLst>
-                        <p:par>
-                          <p:cTn id="11" fill="hold">
-                            <p:stCondLst>
-                              <p:cond delay="0"/>
-                            </p:stCondLst>
-                            <p:childTnLst>
-                              <p:par>
-                                <p:cTn id="12" presetID="10" presetClass="entr" presetSubtype="0" fill="hold" nodeType="clickEffect">
-                                  <p:stCondLst>
-                                    <p:cond delay="0"/>
-                                  </p:stCondLst>
-                                  <p:childTnLst>
-                                    <p:set>
-                                      <p:cBhvr>
-                                        <p:cTn id="13" dur="1" fill="hold">
-                                          <p:stCondLst>
-                                            <p:cond delay="0"/>
-                                          </p:stCondLst>
-                                        </p:cTn>
-                                        <p:tgtEl>
-                                          <p:spTgt spid="4">
-                                            <p:txEl>
-                                              <p:pRg st="0" end="0"/>
-                                            </p:txEl>
-                                          </p:spTgt>
-                                        </p:tgtEl>
-                                        <p:attrNameLst>
-                                          <p:attrName>style.visibility</p:attrName>
-                                        </p:attrNameLst>
-                                      </p:cBhvr>
-                                      <p:to>
-                                        <p:strVal val="visible"/>
-                                      </p:to>
-                                    </p:set>
-                                    <p:animEffect transition="in" filter="fade">
-                                      <p:cBhvr>
-                                        <p:cTn id="14" dur="1000">
-                                          <p:stCondLst>
-                                            <p:cond delay="0"/>
-                                          </p:stCondLst>
-                                        </p:cTn>
-                                        <p:tgtEl>
-                                          <p:spTgt spid="4">
-                                            <p:txEl>
-                                              <p:pRg st="0" end="0"/>
-                                            </p:txEl>
-                                          </p:spTgt>
-                                        </p:tgtEl>
-                                      </p:cBhvr>
-                                    </p:animEffect>
-                                  </p:childTnLst>
-                                </p:cTn>
-                              </p:par>
-                              <p:par>
-                                <p:cTn id="15" presetID="10" presetClass="entr" presetSubtype="0" fill="hold" nodeType="withEffect">
-                                  <p:stCondLst>
-                                    <p:cond delay="0"/>
-                                  </p:stCondLst>
-                                  <p:childTnLst>
-                                    <p:set>
-                                      <p:cBhvr>
-                                        <p:cTn id="16" dur="1" fill="hold">
-                                          <p:stCondLst>
-                                            <p:cond delay="0"/>
-                                          </p:stCondLst>
-                                        </p:cTn>
-                                        <p:tgtEl>
-                                          <p:spTgt spid="4">
-                                            <p:txEl>
-                                              <p:pRg st="1" end="1"/>
-                                            </p:txEl>
-                                          </p:spTgt>
-                                        </p:tgtEl>
-                                        <p:attrNameLst>
-                                          <p:attrName>style.visibility</p:attrName>
-                                        </p:attrNameLst>
-                                      </p:cBhvr>
-                                      <p:to>
-                                        <p:strVal val="visible"/>
-                                      </p:to>
-                                    </p:set>
-                                    <p:animEffect transition="in" filter="fade">
-                                      <p:cBhvr>
-                                        <p:cTn id="17" dur="1000">
-                                          <p:stCondLst>
-                                            <p:cond delay="0"/>
-                                          </p:stCondLst>
-                                        </p:cTn>
-                                        <p:tgtEl>
-                                          <p:spTgt spid="4">
-                                            <p:txEl>
-                                              <p:pRg st="1" end="1"/>
-                                            </p:txEl>
-                                          </p:spTgt>
-                                        </p:tgtEl>
-                                      </p:cBhvr>
-                                    </p:animEffect>
-                                  </p:childTnLst>
-                                </p:cTn>
-                              </p:par>
-                            </p:childTnLst>
-                          </p:cTn>
-                        </p:par>
-                      </p:childTnLst>
-                    </p:cTn>
-                  </p:par>
-                  <p:par>
-                    <p:cTn id="18" fill="hold">
-                      <p:stCondLst>
-                        <p:cond delay="indefinite"/>
-                      </p:stCondLst>
-                      <p:childTnLst>
-                        <p:par>
-                          <p:cTn id="19" fill="hold">
-                            <p:stCondLst>
-                              <p:cond delay="0"/>
-                            </p:stCondLst>
-                            <p:childTnLst>
-                              <p:par>
-                                <p:cTn id="20" presetID="10" presetClass="entr" presetSubtype="0" fill="hold" nodeType="clickEffect">
-                                  <p:stCondLst>
-                                    <p:cond delay="0"/>
-                                  </p:stCondLst>
-                                  <p:childTnLst>
-                                    <p:set>
-                                      <p:cBhvr>
-                                        <p:cTn id="21" dur="1" fill="hold">
-                                          <p:stCondLst>
-                                            <p:cond delay="0"/>
-                                          </p:stCondLst>
-                                        </p:cTn>
-                                        <p:tgtEl>
-                                          <p:spTgt spid="4">
-                                            <p:txEl>
-                                              <p:pRg st="2" end="2"/>
-                                            </p:txEl>
-                                          </p:spTgt>
-                                        </p:tgtEl>
-                                        <p:attrNameLst>
-                                          <p:attrName>style.visibility</p:attrName>
-                                        </p:attrNameLst>
-                                      </p:cBhvr>
-                                      <p:to>
-                                        <p:strVal val="visible"/>
-                                      </p:to>
-                                    </p:set>
-                                    <p:animEffect transition="in" filter="fade">
-                                      <p:cBhvr>
-                                        <p:cTn id="22" dur="1000">
-                                          <p:stCondLst>
-                                            <p:cond delay="0"/>
-                                          </p:stCondLst>
-                                        </p:cTn>
-                                        <p:tgtEl>
-                                          <p:spTgt spid="4">
-                                            <p:txEl>
-                                              <p:pRg st="2" end="2"/>
-                                            </p:txEl>
-                                          </p:spTgt>
-                                        </p:tgtEl>
-                                      </p:cBhvr>
-                                    </p:animEffect>
-                                  </p:childTnLst>
-                                </p:cTn>
-                              </p:par>
-                            </p:childTnLst>
-                          </p:cTn>
-                        </p:par>
-                      </p:childTnLst>
-                    </p:cTn>
-                  </p:par>
-                  <p:par>
-                    <p:cTn id="23" fill="hold">
-                      <p:stCondLst>
-                        <p:cond delay="indefinite"/>
-                      </p:stCondLst>
-                      <p:childTnLst>
-                        <p:par>
-                          <p:cTn id="24" fill="hold">
-                            <p:stCondLst>
-                              <p:cond delay="0"/>
-                            </p:stCondLst>
-                            <p:childTnLst>
-                              <p:par>
-                                <p:cTn id="25" presetID="10" presetClass="entr" presetSubtype="0" fill="hold" nodeType="clickEffect">
-                                  <p:stCondLst>
-                                    <p:cond delay="0"/>
-                                  </p:stCondLst>
-                                  <p:childTnLst>
-                                    <p:set>
-                                      <p:cBhvr>
-                                        <p:cTn id="26" dur="1" fill="hold">
-                                          <p:stCondLst>
-                                            <p:cond delay="0"/>
-                                          </p:stCondLst>
-                                        </p:cTn>
-                                        <p:tgtEl>
-                                          <p:spTgt spid="4">
-                                            <p:txEl>
-                                              <p:pRg st="5" end="5"/>
-                                            </p:txEl>
-                                          </p:spTgt>
-                                        </p:tgtEl>
-                                        <p:attrNameLst>
-                                          <p:attrName>style.visibility</p:attrName>
-                                        </p:attrNameLst>
-                                      </p:cBhvr>
-                                      <p:to>
-                                        <p:strVal val="visible"/>
-                                      </p:to>
-                                    </p:set>
-                                    <p:animEffect transition="in" filter="fade">
-                                      <p:cBhvr>
-                                        <p:cTn id="27" dur="1000">
-                                          <p:stCondLst>
-                                            <p:cond delay="0"/>
-                                          </p:stCondLst>
-                                        </p:cTn>
-                                        <p:tgtEl>
-                                          <p:spTgt spid="4">
-                                            <p:txEl>
-                                              <p:pRg st="5" end="5"/>
-                                            </p:txEl>
-                                          </p:spTgt>
-                                        </p:tgtEl>
-                                      </p:cBhvr>
-                                    </p:animEffect>
-                                  </p:childTnLst>
-                                </p:cTn>
-                              </p:par>
-                            </p:childTnLst>
-                          </p:cTn>
-                        </p:par>
-                      </p:childTnLst>
-                    </p:cTn>
-                  </p:par>
-                  <p:par>
-                    <p:cTn id="28" fill="hold">
-                      <p:stCondLst>
-                        <p:cond delay="indefinite"/>
-                      </p:stCondLst>
-                      <p:childTnLst>
-                        <p:par>
-                          <p:cTn id="29" fill="hold">
-                            <p:stCondLst>
-                              <p:cond delay="0"/>
-                            </p:stCondLst>
-                            <p:childTnLst>
-                              <p:par>
-                                <p:cTn id="30" presetID="10" presetClass="entr" presetSubtype="0" fill="hold" nodeType="clickEffect">
-                                  <p:stCondLst>
-                                    <p:cond delay="0"/>
-                                  </p:stCondLst>
-                                  <p:childTnLst>
-                                    <p:set>
-                                      <p:cBhvr>
-                                        <p:cTn id="31" dur="1" fill="hold">
-                                          <p:stCondLst>
-                                            <p:cond delay="0"/>
-                                          </p:stCondLst>
-                                        </p:cTn>
-                                        <p:tgtEl>
-                                          <p:spTgt spid="4">
-                                            <p:txEl>
-                                              <p:pRg st="3" end="3"/>
-                                            </p:txEl>
-                                          </p:spTgt>
-                                        </p:tgtEl>
-                                        <p:attrNameLst>
-                                          <p:attrName>style.visibility</p:attrName>
-                                        </p:attrNameLst>
-                                      </p:cBhvr>
-                                      <p:to>
-                                        <p:strVal val="visible"/>
-                                      </p:to>
-                                    </p:set>
-                                    <p:animEffect transition="in" filter="fade">
-                                      <p:cBhvr>
-                                        <p:cTn id="32" dur="1000">
-                                          <p:stCondLst>
-                                            <p:cond delay="0"/>
-                                          </p:stCondLst>
-                                        </p:cTn>
-                                        <p:tgtEl>
-                                          <p:spTgt spid="4">
-                                            <p:txEl>
-                                              <p:pRg st="3" end="3"/>
-                                            </p:txEl>
-                                          </p:spTgt>
-                                        </p:tgtEl>
-                                      </p:cBhvr>
-                                    </p:animEffect>
-                                  </p:childTnLst>
-                                </p:cTn>
-                              </p:par>
-                            </p:childTnLst>
-                          </p:cTn>
-                        </p:par>
-                      </p:childTnLst>
-                    </p:cTn>
-                  </p:par>
-                  <p:par>
-                    <p:cTn id="33" fill="hold">
-                      <p:stCondLst>
-                        <p:cond delay="indefinite"/>
-                      </p:stCondLst>
-                      <p:childTnLst>
-                        <p:par>
-                          <p:cTn id="34" fill="hold">
-                            <p:stCondLst>
-                              <p:cond delay="0"/>
-                            </p:stCondLst>
-                            <p:childTnLst>
-                              <p:par>
-                                <p:cTn id="35" presetID="10" presetClass="entr" presetSubtype="0" fill="hold" nodeType="clickEffect">
-                                  <p:stCondLst>
-                                    <p:cond delay="0"/>
-                                  </p:stCondLst>
-                                  <p:childTnLst>
-                                    <p:set>
-                                      <p:cBhvr>
-                                        <p:cTn id="36" dur="1" fill="hold">
-                                          <p:stCondLst>
-                                            <p:cond delay="0"/>
-                                          </p:stCondLst>
-                                        </p:cTn>
-                                        <p:tgtEl>
-                                          <p:spTgt spid="4">
-                                            <p:txEl>
-                                              <p:pRg st="4" end="4"/>
-                                            </p:txEl>
-                                          </p:spTgt>
-                                        </p:tgtEl>
-                                        <p:attrNameLst>
-                                          <p:attrName>style.visibility</p:attrName>
-                                        </p:attrNameLst>
-                                      </p:cBhvr>
-                                      <p:to>
-                                        <p:strVal val="visible"/>
-                                      </p:to>
-                                    </p:set>
-                                    <p:animEffect transition="in" filter="fade">
-                                      <p:cBhvr>
-                                        <p:cTn id="37" dur="1000">
-                                          <p:stCondLst>
-                                            <p:cond delay="0"/>
-                                          </p:stCondLst>
-                                        </p:cTn>
-                                        <p:tgtEl>
-                                          <p:spTgt spid="4">
-                                            <p:txEl>
-                                              <p:pRg st="4" end="4"/>
-                                            </p:txEl>
-                                          </p:spTgt>
-                                        </p:tgtEl>
-                                      </p:cBhvr>
-                                    </p:animEffect>
-                                  </p:childTnLst>
-                                </p:cTn>
-                              </p:par>
-                              <p:par>
-                                <p:cTn id="38" presetID="10" presetClass="entr" presetSubtype="0" fill="hold" nodeType="withEffect">
-                                  <p:stCondLst>
-                                    <p:cond delay="0"/>
-                                  </p:stCondLst>
-                                  <p:childTnLst>
-                                    <p:set>
-                                      <p:cBhvr>
-                                        <p:cTn id="39" dur="1" fill="hold">
-                                          <p:stCondLst>
-                                            <p:cond delay="0"/>
-                                          </p:stCondLst>
-                                        </p:cTn>
-                                        <p:tgtEl>
-                                          <p:spTgt spid="4">
-                                            <p:txEl>
-                                              <p:pRg st="6" end="6"/>
-                                            </p:txEl>
-                                          </p:spTgt>
-                                        </p:tgtEl>
-                                        <p:attrNameLst>
-                                          <p:attrName>style.visibility</p:attrName>
-                                        </p:attrNameLst>
-                                      </p:cBhvr>
-                                      <p:to>
-                                        <p:strVal val="visible"/>
-                                      </p:to>
-                                    </p:set>
-                                    <p:animEffect transition="in" filter="fade">
-                                      <p:cBhvr>
-                                        <p:cTn id="40" dur="1000">
-                                          <p:stCondLst>
-                                            <p:cond delay="0"/>
-                                          </p:stCondLst>
-                                        </p:cTn>
-                                        <p:tgtEl>
-                                          <p:spTgt spid="4">
-                                            <p:txEl>
-                                              <p:pRg st="6" end="6"/>
-                                            </p:txEl>
-                                          </p:spTgt>
-                                        </p:tgtEl>
-                                      </p:cBhvr>
-                                    </p:animEffect>
-                                  </p:childTnLst>
-                                </p:cTn>
-                              </p:par>
-                            </p:childTnLst>
-                          </p:cTn>
-                        </p:par>
-                      </p:childTnLst>
-                    </p:cTn>
-                  </p:par>
-                  <p:par>
-                    <p:cTn id="41" fill="hold">
-                      <p:stCondLst>
-                        <p:cond delay="indefinite"/>
-                      </p:stCondLst>
-                      <p:childTnLst>
-                        <p:par>
-                          <p:cTn id="42" fill="hold">
-                            <p:stCondLst>
-                              <p:cond delay="0"/>
-                            </p:stCondLst>
-                            <p:childTnLst>
-                              <p:par>
-                                <p:cTn id="43" presetID="10" presetClass="entr" presetSubtype="0" fill="hold" nodeType="clickEffect">
-                                  <p:stCondLst>
-                                    <p:cond delay="0"/>
-                                  </p:stCondLst>
-                                  <p:childTnLst>
-                                    <p:set>
-                                      <p:cBhvr>
-                                        <p:cTn id="44" dur="1" fill="hold">
-                                          <p:stCondLst>
-                                            <p:cond delay="0"/>
-                                          </p:stCondLst>
-                                        </p:cTn>
-                                        <p:tgtEl>
-                                          <p:spTgt spid="4">
-                                            <p:txEl>
-                                              <p:pRg st="7" end="7"/>
-                                            </p:txEl>
-                                          </p:spTgt>
-                                        </p:tgtEl>
-                                        <p:attrNameLst>
-                                          <p:attrName>style.visibility</p:attrName>
-                                        </p:attrNameLst>
-                                      </p:cBhvr>
-                                      <p:to>
-                                        <p:strVal val="visible"/>
-                                      </p:to>
-                                    </p:set>
-                                    <p:animEffect transition="in" filter="fade">
-                                      <p:cBhvr>
-                                        <p:cTn id="45" dur="1000">
-                                          <p:stCondLst>
-                                            <p:cond delay="0"/>
-                                          </p:stCondLst>
-                                        </p:cTn>
-                                        <p:tgtEl>
-                                          <p:spTgt spid="4">
-                                            <p:txEl>
-                                              <p:pRg st="7" end="7"/>
-                                            </p:txEl>
-                                          </p:spTgt>
-                                        </p:tgtEl>
-                                      </p:cBhvr>
-                                    </p:animEffect>
-                                  </p:childTnLst>
-                                </p:cTn>
-                              </p:par>
-                              <p:par>
-                                <p:cTn id="46" presetID="10" presetClass="entr" presetSubtype="0" fill="hold" nodeType="withEffect">
-                                  <p:stCondLst>
-                                    <p:cond delay="0"/>
-                                  </p:stCondLst>
-                                  <p:childTnLst>
-                                    <p:set>
-                                      <p:cBhvr>
-                                        <p:cTn id="47" dur="1" fill="hold">
-                                          <p:stCondLst>
-                                            <p:cond delay="0"/>
-                                          </p:stCondLst>
-                                        </p:cTn>
-                                        <p:tgtEl>
-                                          <p:spTgt spid="4">
-                                            <p:txEl>
-                                              <p:pRg st="8" end="8"/>
-                                            </p:txEl>
-                                          </p:spTgt>
-                                        </p:tgtEl>
-                                        <p:attrNameLst>
-                                          <p:attrName>style.visibility</p:attrName>
-                                        </p:attrNameLst>
-                                      </p:cBhvr>
-                                      <p:to>
-                                        <p:strVal val="visible"/>
-                                      </p:to>
-                                    </p:set>
-                                    <p:animEffect transition="in" filter="fade">
-                                      <p:cBhvr>
-                                        <p:cTn id="48" dur="1000">
-                                          <p:stCondLst>
-                                            <p:cond delay="0"/>
-                                          </p:stCondLst>
-                                        </p:cTn>
-                                        <p:tgtEl>
-                                          <p:spTgt spid="4">
-                                            <p:txEl>
-                                              <p:pRg st="8" end="8"/>
-                                            </p:txEl>
-                                          </p:spTgt>
-                                        </p:tgtEl>
-                                      </p:cBhvr>
-                                    </p:animEffect>
-                                  </p:childTnLst>
-                                </p:cTn>
-                              </p:par>
-                            </p:childTnLst>
-                          </p:cTn>
-                        </p:par>
-                      </p:childTnLst>
-                    </p:cTn>
-                  </p:par>
-                </p:childTnLst>
-              </p:cTn>
-              <p:prevCondLst>
-                <p:cond evt="onPrev" delay="0">
-                  <p:tgtEl>
-                    <p:sldTgt/>
-                  </p:tgtEl>
-                </p:cond>
-              </p:prevCondLst>
-              <p:nextCondLst>
-                <p:cond evt="onNext" delay="0">
-                  <p:tgtEl>
-                    <p:sldTgt/>
-                  </p:tgtEl>
-                </p:cond>
-              </p:nextCondLst>
-            </p:seq>
-          </p:childTnLst>
-        </p:cTn>
-      </p:par>
-    </p:tnLst>
-    <p:bldLst>
-      <p:bldP spid="61442" grpId="0"/>
-      <p:bldP spid="4" grpId="0" build="p"/>
-    </p:bldLst>
-  </p:timing>
 </p:sld>
 </file>
 
@@ -34080,6 +33921,260 @@
       </p:grpSpPr>
       <p:sp>
         <p:nvSpPr>
+          <p:cNvPr id="2" name="Rectangle 1">
+            <a:extLst>
+              <a:ext uri="{FF2B5EF4-FFF2-40B4-BE49-F238E27FC236}">
+                <a16:creationId xmlns:a16="http://schemas.microsoft.com/office/drawing/2014/main" id="{C284C093-F663-F78D-2926-FAD1F5D143C9}"/>
+              </a:ext>
+            </a:extLst>
+          </p:cNvPr>
+          <p:cNvSpPr/>
+          <p:nvPr/>
+        </p:nvSpPr>
+        <p:spPr>
+          <a:xfrm>
+            <a:off x="2140788" y="1219200"/>
+            <a:ext cx="4682051" cy="3416320"/>
+          </a:xfrm>
+          <a:prstGeom prst="rect">
+            <a:avLst/>
+          </a:prstGeom>
+          <a:noFill/>
+        </p:spPr>
+        <p:txBody>
+          <a:bodyPr wrap="none" lIns="91440" tIns="45720" rIns="91440" bIns="45720">
+            <a:spAutoFit/>
+          </a:bodyPr>
+          <a:lstStyle/>
+          <a:p>
+            <a:pPr algn="ctr"/>
+            <a:r>
+              <a:rPr lang="en-US" sz="7200" b="1" cap="none" spc="0" dirty="0">
+                <a:ln w="22225">
+                  <a:solidFill>
+                    <a:schemeClr val="accent2"/>
+                  </a:solidFill>
+                  <a:prstDash val="solid"/>
+                </a:ln>
+                <a:solidFill>
+                  <a:srgbClr val="0000CC"/>
+                </a:solidFill>
+                <a:effectLst>
+                  <a:outerShdw blurRad="50800" dist="38100" dir="10800000" algn="r" rotWithShape="0">
+                    <a:prstClr val="black">
+                      <a:alpha val="40000"/>
+                    </a:prstClr>
+                  </a:outerShdw>
+                </a:effectLst>
+              </a:rPr>
+              <a:t>Best</a:t>
+            </a:r>
+          </a:p>
+          <a:p>
+            <a:pPr algn="ctr"/>
+            <a:r>
+              <a:rPr lang="en-US" sz="7200" b="1" cap="none" spc="0" dirty="0">
+                <a:ln w="22225">
+                  <a:solidFill>
+                    <a:schemeClr val="accent2"/>
+                  </a:solidFill>
+                  <a:prstDash val="solid"/>
+                </a:ln>
+                <a:solidFill>
+                  <a:srgbClr val="0000CC"/>
+                </a:solidFill>
+                <a:effectLst>
+                  <a:outerShdw blurRad="50800" dist="38100" dir="10800000" algn="r" rotWithShape="0">
+                    <a:prstClr val="black">
+                      <a:alpha val="40000"/>
+                    </a:prstClr>
+                  </a:outerShdw>
+                </a:effectLst>
+              </a:rPr>
+              <a:t>and Worst</a:t>
+            </a:r>
+          </a:p>
+          <a:p>
+            <a:pPr algn="ctr"/>
+            <a:r>
+              <a:rPr lang="en-US" sz="7200" b="1" cap="none" spc="0" dirty="0">
+                <a:ln w="22225">
+                  <a:solidFill>
+                    <a:schemeClr val="accent2"/>
+                  </a:solidFill>
+                  <a:prstDash val="solid"/>
+                </a:ln>
+                <a:solidFill>
+                  <a:srgbClr val="0000CC"/>
+                </a:solidFill>
+                <a:effectLst>
+                  <a:outerShdw blurRad="50800" dist="38100" dir="10800000" algn="r" rotWithShape="0">
+                    <a:prstClr val="black">
+                      <a:alpha val="40000"/>
+                    </a:prstClr>
+                  </a:outerShdw>
+                </a:effectLst>
+              </a:rPr>
+              <a:t>Practices</a:t>
+            </a:r>
+          </a:p>
+        </p:txBody>
+      </p:sp>
+    </p:spTree>
+  </p:cSld>
+  <p:clrMapOvr>
+    <a:masterClrMapping/>
+  </p:clrMapOvr>
+</p:sld>
+</file>
+
+<file path=ppt/slides/slide4.xml><?xml version="1.0" encoding="utf-8"?>
+<p:sld xmlns:a="http://schemas.openxmlformats.org/drawingml/2006/main" xmlns:r="http://schemas.openxmlformats.org/officeDocument/2006/relationships" xmlns:p="http://schemas.openxmlformats.org/presentationml/2006/main">
+  <p:cSld>
+    <p:spTree>
+      <p:nvGrpSpPr>
+        <p:cNvPr id="1" name=""/>
+        <p:cNvGrpSpPr/>
+        <p:nvPr/>
+      </p:nvGrpSpPr>
+      <p:grpSpPr>
+        <a:xfrm>
+          <a:off x="0" y="0"/>
+          <a:ext cx="0" cy="0"/>
+          <a:chOff x="0" y="0"/>
+          <a:chExt cx="0" cy="0"/>
+        </a:xfrm>
+      </p:grpSpPr>
+      <p:sp>
+        <p:nvSpPr>
+          <p:cNvPr id="40963" name="Rectangle 2">
+            <a:extLst>
+              <a:ext uri="{FF2B5EF4-FFF2-40B4-BE49-F238E27FC236}">
+                <a16:creationId xmlns:a16="http://schemas.microsoft.com/office/drawing/2014/main" id="{CBC85881-43C9-FD0C-D813-C7B2BDAF0C55}"/>
+              </a:ext>
+            </a:extLst>
+          </p:cNvPr>
+          <p:cNvSpPr>
+            <a:spLocks noGrp="1" noChangeArrowheads="1"/>
+          </p:cNvSpPr>
+          <p:nvPr>
+            <p:ph type="title"/>
+          </p:nvPr>
+        </p:nvSpPr>
+        <p:spPr>
+          <a:xfrm>
+            <a:off x="609600" y="190500"/>
+            <a:ext cx="7772400" cy="1143000"/>
+          </a:xfrm>
+        </p:spPr>
+        <p:txBody>
+          <a:bodyPr/>
+          <a:lstStyle/>
+          <a:p>
+            <a:pPr eaLnBrk="1" hangingPunct="1"/>
+            <a:r>
+              <a:rPr lang="en-GB" altLang="en-US" dirty="0">
+                <a:solidFill>
+                  <a:schemeClr val="tx1"/>
+                </a:solidFill>
+              </a:rPr>
+              <a:t>Exceptions Explained</a:t>
+            </a:r>
+          </a:p>
+        </p:txBody>
+      </p:sp>
+      <p:sp>
+        <p:nvSpPr>
+          <p:cNvPr id="40964" name="Content Placeholder 1">
+            <a:extLst>
+              <a:ext uri="{FF2B5EF4-FFF2-40B4-BE49-F238E27FC236}">
+                <a16:creationId xmlns:a16="http://schemas.microsoft.com/office/drawing/2014/main" id="{9EF8A25E-5982-1B54-FA83-A7146B33A4B5}"/>
+              </a:ext>
+            </a:extLst>
+          </p:cNvPr>
+          <p:cNvSpPr>
+            <a:spLocks noGrp="1"/>
+          </p:cNvSpPr>
+          <p:nvPr>
+            <p:ph idx="1"/>
+          </p:nvPr>
+        </p:nvSpPr>
+        <p:spPr>
+          <a:xfrm>
+            <a:off x="457200" y="1600200"/>
+            <a:ext cx="8458200" cy="3962400"/>
+          </a:xfrm>
+        </p:spPr>
+        <p:txBody>
+          <a:bodyPr/>
+          <a:lstStyle/>
+          <a:p>
+            <a:pPr marL="0" indent="0">
+              <a:buFontTx/>
+              <a:buNone/>
+            </a:pPr>
+            <a:r>
+              <a:rPr lang="en-US" altLang="en-US" dirty="0">
+                <a:solidFill>
+                  <a:schemeClr val="tx1"/>
+                </a:solidFill>
+              </a:rPr>
+              <a:t>An </a:t>
+            </a:r>
+            <a:r>
+              <a:rPr lang="en-US" altLang="en-US" i="1" dirty="0">
+                <a:solidFill>
+                  <a:schemeClr val="tx1"/>
+                </a:solidFill>
+              </a:rPr>
+              <a:t>exceptional condition</a:t>
+            </a:r>
+            <a:r>
+              <a:rPr lang="en-US" altLang="en-US" dirty="0">
+                <a:solidFill>
+                  <a:schemeClr val="tx1"/>
+                </a:solidFill>
+              </a:rPr>
+              <a:t> is a problem that prevents the continuation of the current method or scope.  An exceptional problem is not the same as a normal problem, in which you have enough information in the current context to somehow cope with the difficulty.  With an exceptional problem, all you can do is jump out of the current context and relegate the problem to a higher context.  This is what happens when you throw an exception.</a:t>
+            </a:r>
+          </a:p>
+        </p:txBody>
+      </p:sp>
+    </p:spTree>
+  </p:cSld>
+  <p:clrMapOvr>
+    <a:masterClrMapping/>
+  </p:clrMapOvr>
+  <mc:AlternateContent xmlns:mc="http://schemas.openxmlformats.org/markup-compatibility/2006" xmlns:p14="http://schemas.microsoft.com/office/powerpoint/2010/main">
+    <mc:Choice Requires="p14">
+      <p:transition spd="slow" p14:dur="2000" advTm="1000"/>
+    </mc:Choice>
+    <mc:Fallback xmlns="">
+      <p:transition spd="slow" advTm="1000"/>
+    </mc:Fallback>
+  </mc:AlternateContent>
+</p:sld>
+</file>
+
+<file path=ppt/slides/slide40.xml><?xml version="1.0" encoding="utf-8"?>
+<p:sld xmlns:a="http://schemas.openxmlformats.org/drawingml/2006/main" xmlns:r="http://schemas.openxmlformats.org/officeDocument/2006/relationships" xmlns:p="http://schemas.openxmlformats.org/presentationml/2006/main">
+  <p:cSld>
+    <p:spTree>
+      <p:nvGrpSpPr>
+        <p:cNvPr id="1" name=""/>
+        <p:cNvGrpSpPr/>
+        <p:nvPr/>
+      </p:nvGrpSpPr>
+      <p:grpSpPr>
+        <a:xfrm>
+          <a:off x="0" y="0"/>
+          <a:ext cx="0" cy="0"/>
+          <a:chOff x="0" y="0"/>
+          <a:chExt cx="0" cy="0"/>
+        </a:xfrm>
+      </p:grpSpPr>
+      <p:sp>
+        <p:nvSpPr>
           <p:cNvPr id="43010" name="Text Box 2">
             <a:extLst>
               <a:ext uri="{FF2B5EF4-FFF2-40B4-BE49-F238E27FC236}">
@@ -34864,6 +34959,11 @@
         </p:txBody>
       </p:sp>
     </p:spTree>
+    <p:extLst>
+      <p:ext uri="{BB962C8B-B14F-4D97-AF65-F5344CB8AC3E}">
+        <p14:creationId xmlns:p14="http://schemas.microsoft.com/office/powerpoint/2010/main" val="3441496849"/>
+      </p:ext>
+    </p:extLst>
   </p:cSld>
   <p:clrMapOvr>
     <a:masterClrMapping/>
@@ -34871,135 +34971,7 @@
 </p:sld>
 </file>
 
-<file path=ppt/slides/slide4.xml><?xml version="1.0" encoding="utf-8"?>
-<p:sld xmlns:a="http://schemas.openxmlformats.org/drawingml/2006/main" xmlns:r="http://schemas.openxmlformats.org/officeDocument/2006/relationships" xmlns:p="http://schemas.openxmlformats.org/presentationml/2006/main">
-  <p:cSld>
-    <p:spTree>
-      <p:nvGrpSpPr>
-        <p:cNvPr id="1" name=""/>
-        <p:cNvGrpSpPr/>
-        <p:nvPr/>
-      </p:nvGrpSpPr>
-      <p:grpSpPr>
-        <a:xfrm>
-          <a:off x="0" y="0"/>
-          <a:ext cx="0" cy="0"/>
-          <a:chOff x="0" y="0"/>
-          <a:chExt cx="0" cy="0"/>
-        </a:xfrm>
-      </p:grpSpPr>
-      <p:sp>
-        <p:nvSpPr>
-          <p:cNvPr id="40963" name="Rectangle 2">
-            <a:extLst>
-              <a:ext uri="{FF2B5EF4-FFF2-40B4-BE49-F238E27FC236}">
-                <a16:creationId xmlns:a16="http://schemas.microsoft.com/office/drawing/2014/main" id="{CBC85881-43C9-FD0C-D813-C7B2BDAF0C55}"/>
-              </a:ext>
-            </a:extLst>
-          </p:cNvPr>
-          <p:cNvSpPr>
-            <a:spLocks noGrp="1" noChangeArrowheads="1"/>
-          </p:cNvSpPr>
-          <p:nvPr>
-            <p:ph type="title"/>
-          </p:nvPr>
-        </p:nvSpPr>
-        <p:spPr>
-          <a:xfrm>
-            <a:off x="609600" y="190500"/>
-            <a:ext cx="7772400" cy="1143000"/>
-          </a:xfrm>
-        </p:spPr>
-        <p:txBody>
-          <a:bodyPr/>
-          <a:lstStyle/>
-          <a:p>
-            <a:pPr eaLnBrk="1" hangingPunct="1"/>
-            <a:r>
-              <a:rPr lang="en-GB" altLang="en-US" dirty="0">
-                <a:solidFill>
-                  <a:schemeClr val="tx1"/>
-                </a:solidFill>
-              </a:rPr>
-              <a:t>Exceptions Explained</a:t>
-            </a:r>
-          </a:p>
-        </p:txBody>
-      </p:sp>
-      <p:sp>
-        <p:nvSpPr>
-          <p:cNvPr id="40964" name="Content Placeholder 1">
-            <a:extLst>
-              <a:ext uri="{FF2B5EF4-FFF2-40B4-BE49-F238E27FC236}">
-                <a16:creationId xmlns:a16="http://schemas.microsoft.com/office/drawing/2014/main" id="{9EF8A25E-5982-1B54-FA83-A7146B33A4B5}"/>
-              </a:ext>
-            </a:extLst>
-          </p:cNvPr>
-          <p:cNvSpPr>
-            <a:spLocks noGrp="1"/>
-          </p:cNvSpPr>
-          <p:nvPr>
-            <p:ph idx="1"/>
-          </p:nvPr>
-        </p:nvSpPr>
-        <p:spPr>
-          <a:xfrm>
-            <a:off x="457200" y="1600200"/>
-            <a:ext cx="8458200" cy="3962400"/>
-          </a:xfrm>
-        </p:spPr>
-        <p:txBody>
-          <a:bodyPr/>
-          <a:lstStyle/>
-          <a:p>
-            <a:pPr marL="0" indent="0">
-              <a:buFontTx/>
-              <a:buNone/>
-            </a:pPr>
-            <a:r>
-              <a:rPr lang="en-US" altLang="en-US" dirty="0">
-                <a:solidFill>
-                  <a:schemeClr val="tx1"/>
-                </a:solidFill>
-              </a:rPr>
-              <a:t>An </a:t>
-            </a:r>
-            <a:r>
-              <a:rPr lang="en-US" altLang="en-US" i="1" dirty="0">
-                <a:solidFill>
-                  <a:schemeClr val="tx1"/>
-                </a:solidFill>
-              </a:rPr>
-              <a:t>exceptional condition</a:t>
-            </a:r>
-            <a:r>
-              <a:rPr lang="en-US" altLang="en-US" dirty="0">
-                <a:solidFill>
-                  <a:schemeClr val="tx1"/>
-                </a:solidFill>
-              </a:rPr>
-              <a:t> is a problem that prevents the continuation of the current method or scope.  An exceptional problem is not the same as a normal problem, in which you have enough information in the current context to somehow cope with the difficulty.  With an exceptional problem, all you can do is jump out of the current context and relegate the problem to a higher context.  This is what happens when you throw an exception.</a:t>
-            </a:r>
-          </a:p>
-        </p:txBody>
-      </p:sp>
-    </p:spTree>
-  </p:cSld>
-  <p:clrMapOvr>
-    <a:masterClrMapping/>
-  </p:clrMapOvr>
-  <mc:AlternateContent xmlns:mc="http://schemas.openxmlformats.org/markup-compatibility/2006" xmlns:p14="http://schemas.microsoft.com/office/powerpoint/2010/main">
-    <mc:Choice Requires="p14">
-      <p:transition spd="slow" p14:dur="2000" advTm="1000"/>
-    </mc:Choice>
-    <mc:Fallback xmlns="">
-      <p:transition spd="slow" advTm="1000"/>
-    </mc:Fallback>
-  </mc:AlternateContent>
-</p:sld>
-</file>
-
-<file path=ppt/slides/slide40.xml><?xml version="1.0" encoding="utf-8"?>
+<file path=ppt/slides/slide41.xml><?xml version="1.0" encoding="utf-8"?>
 <p:sld xmlns:a="http://schemas.openxmlformats.org/drawingml/2006/main" xmlns:r="http://schemas.openxmlformats.org/officeDocument/2006/relationships" xmlns:p="http://schemas.openxmlformats.org/presentationml/2006/main">
   <p:cSld>
     <p:spTree>
@@ -35655,7 +35627,7 @@
 </p:sld>
 </file>
 
-<file path=ppt/slides/slide41.xml><?xml version="1.0" encoding="utf-8"?>
+<file path=ppt/slides/slide42.xml><?xml version="1.0" encoding="utf-8"?>
 <p:sld xmlns:a="http://schemas.openxmlformats.org/drawingml/2006/main" xmlns:r="http://schemas.openxmlformats.org/officeDocument/2006/relationships" xmlns:p="http://schemas.openxmlformats.org/presentationml/2006/main">
   <p:cSld>
     <p:spTree>
@@ -36499,9 +36471,20 @@
 </p:sld>
 </file>
 
-<file path=ppt/slides/slide42.xml><?xml version="1.0" encoding="utf-8"?>
+<file path=ppt/slides/slide43.xml><?xml version="1.0" encoding="utf-8"?>
 <p:sld xmlns:a="http://schemas.openxmlformats.org/drawingml/2006/main" xmlns:r="http://schemas.openxmlformats.org/officeDocument/2006/relationships" xmlns:p="http://schemas.openxmlformats.org/presentationml/2006/main">
   <p:cSld>
+    <p:bg>
+      <p:bgPr>
+        <a:solidFill>
+          <a:schemeClr val="accent1">
+            <a:lumMod val="20000"/>
+            <a:lumOff val="80000"/>
+          </a:schemeClr>
+        </a:solidFill>
+        <a:effectLst/>
+      </p:bgPr>
+    </p:bg>
     <p:spTree>
       <p:nvGrpSpPr>
         <p:cNvPr id="1" name=""/>
@@ -36548,7 +36531,7 @@
               <a:rPr lang="en-US" altLang="en-US" dirty="0">
                 <a:latin typeface="Bahnschrift" panose="020B0502040204020203" pitchFamily="34" charset="0"/>
               </a:rPr>
-              <a:t>Don’t Ignore Exceptions</a:t>
+              <a:t>Don’t Eat Exceptions</a:t>
             </a:r>
           </a:p>
         </p:txBody>
@@ -36652,7 +36635,41 @@
                 <a:latin typeface="Courier New" panose="02070309020205020404" pitchFamily="49" charset="0"/>
                 <a:cs typeface="Courier New" panose="02070309020205020404" pitchFamily="49" charset="0"/>
               </a:rPr>
-              <a:t>}catch(Exception e){ } </a:t>
+              <a:t>}catch(Exception e)</a:t>
+            </a:r>
+            <a:r>
+              <a:rPr lang="en-US" altLang="en-US" b="1" dirty="0">
+                <a:solidFill>
+                  <a:srgbClr val="C00000"/>
+                </a:solidFill>
+                <a:latin typeface="Courier New" panose="02070309020205020404" pitchFamily="49" charset="0"/>
+                <a:cs typeface="Courier New" panose="02070309020205020404" pitchFamily="49" charset="0"/>
+              </a:rPr>
+              <a:t>{</a:t>
+            </a:r>
+            <a:r>
+              <a:rPr lang="en-US" altLang="en-US" b="1" dirty="0">
+                <a:latin typeface="Courier New" panose="02070309020205020404" pitchFamily="49" charset="0"/>
+                <a:cs typeface="Courier New" panose="02070309020205020404" pitchFamily="49" charset="0"/>
+              </a:rPr>
+              <a:t> </a:t>
+            </a:r>
+            <a:r>
+              <a:rPr lang="en-US" altLang="en-US" b="1" dirty="0">
+                <a:solidFill>
+                  <a:srgbClr val="C00000"/>
+                </a:solidFill>
+                <a:latin typeface="Courier New" panose="02070309020205020404" pitchFamily="49" charset="0"/>
+                <a:cs typeface="Courier New" panose="02070309020205020404" pitchFamily="49" charset="0"/>
+              </a:rPr>
+              <a:t>}</a:t>
+            </a:r>
+            <a:r>
+              <a:rPr lang="en-US" altLang="en-US" b="1" dirty="0">
+                <a:latin typeface="Courier New" panose="02070309020205020404" pitchFamily="49" charset="0"/>
+                <a:cs typeface="Courier New" panose="02070309020205020404" pitchFamily="49" charset="0"/>
+              </a:rPr>
+              <a:t> </a:t>
             </a:r>
           </a:p>
           <a:p>
@@ -36687,26 +36704,7 @@
                 <a:latin typeface="Bahnschrift" panose="020B0502040204020203" pitchFamily="34" charset="0"/>
                 <a:cs typeface="Courier New" panose="02070309020205020404" pitchFamily="49" charset="0"/>
               </a:rPr>
-              <a:t>Tempting since an empty catch block won’t raise complaints from compiler.</a:t>
-            </a:r>
-          </a:p>
-          <a:p>
-            <a:pPr marL="0" indent="0" algn="ctr" eaLnBrk="1" hangingPunct="1">
-              <a:lnSpc>
-                <a:spcPct val="90000"/>
-              </a:lnSpc>
-              <a:buFont typeface="Wingdings" panose="05000000000000000000" pitchFamily="2" charset="2"/>
-              <a:buNone/>
-            </a:pPr>
-            <a:r>
-              <a:rPr lang="en-US" altLang="en-US" dirty="0">
-                <a:solidFill>
-                  <a:srgbClr val="006666"/>
-                </a:solidFill>
-                <a:latin typeface="Bahnschrift" panose="020B0502040204020203" pitchFamily="34" charset="0"/>
-                <a:cs typeface="Courier New" panose="02070309020205020404" pitchFamily="49" charset="0"/>
-              </a:rPr>
-              <a:t>Don’t do this!</a:t>
+              <a:t>There is no indication that an exception occurred, and processing continues as if nothing happened!</a:t>
             </a:r>
           </a:p>
         </p:txBody>
@@ -36719,9 +36717,20 @@
 </p:sld>
 </file>
 
-<file path=ppt/slides/slide43.xml><?xml version="1.0" encoding="utf-8"?>
+<file path=ppt/slides/slide44.xml><?xml version="1.0" encoding="utf-8"?>
 <p:sld xmlns:a="http://schemas.openxmlformats.org/drawingml/2006/main" xmlns:r="http://schemas.openxmlformats.org/officeDocument/2006/relationships" xmlns:p="http://schemas.openxmlformats.org/presentationml/2006/main">
   <p:cSld>
+    <p:bg>
+      <p:bgPr>
+        <a:solidFill>
+          <a:schemeClr val="accent1">
+            <a:lumMod val="20000"/>
+            <a:lumOff val="80000"/>
+          </a:schemeClr>
+        </a:solidFill>
+        <a:effectLst/>
+      </p:bgPr>
+    </p:bg>
     <p:spTree>
       <p:nvGrpSpPr>
         <p:cNvPr id="1" name=""/>
@@ -36738,10 +36747,10 @@
       </p:grpSpPr>
       <p:sp>
         <p:nvSpPr>
-          <p:cNvPr id="24578" name="Rectangle 2">
+          <p:cNvPr id="23554" name="Rectangle 4">
             <a:extLst>
               <a:ext uri="{FF2B5EF4-FFF2-40B4-BE49-F238E27FC236}">
-                <a16:creationId xmlns:a16="http://schemas.microsoft.com/office/drawing/2014/main" id="{815281DB-9FCB-1874-4EAC-BC292A08E282}"/>
+                <a16:creationId xmlns:a16="http://schemas.microsoft.com/office/drawing/2014/main" id="{AD77BF86-6636-B96D-922E-5C70B36D5F07}"/>
               </a:ext>
             </a:extLst>
           </p:cNvPr>
@@ -36754,9 +36763,10 @@
         </p:nvSpPr>
         <p:spPr>
           <a:xfrm>
-            <a:off x="685800" y="457200"/>
+            <a:off x="685800" y="76200"/>
             <a:ext cx="7772400" cy="1143000"/>
           </a:xfrm>
+          <a:noFill/>
         </p:spPr>
         <p:txBody>
           <a:bodyPr/>
@@ -36767,18 +36777,17 @@
               <a:rPr lang="en-US" altLang="en-US" dirty="0">
                 <a:latin typeface="Bahnschrift" panose="020B0502040204020203" pitchFamily="34" charset="0"/>
               </a:rPr>
-              <a:t>Don’t Ignore Exceptions</a:t>
-            </a:r>
-            <a:endParaRPr lang="en-US" altLang="en-US" dirty="0"/>
+              <a:t>Don’t Eat Exceptions</a:t>
+            </a:r>
           </a:p>
         </p:txBody>
       </p:sp>
       <p:sp>
         <p:nvSpPr>
-          <p:cNvPr id="24579" name="Rectangle 3">
+          <p:cNvPr id="23555" name="Rectangle 5">
             <a:extLst>
               <a:ext uri="{FF2B5EF4-FFF2-40B4-BE49-F238E27FC236}">
-                <a16:creationId xmlns:a16="http://schemas.microsoft.com/office/drawing/2014/main" id="{87E50506-D65E-9AB8-FF2E-52596FD91236}"/>
+                <a16:creationId xmlns:a16="http://schemas.microsoft.com/office/drawing/2014/main" id="{507924F2-6D87-FF24-5A25-B7B45FFFD1FD}"/>
               </a:ext>
             </a:extLst>
           </p:cNvPr>
@@ -36789,44 +36798,228 @@
             <p:ph idx="1"/>
           </p:nvPr>
         </p:nvSpPr>
-        <p:spPr/>
+        <p:spPr>
+          <a:xfrm>
+            <a:off x="457200" y="1447800"/>
+            <a:ext cx="8686800" cy="5257800"/>
+          </a:xfrm>
+          <a:noFill/>
+        </p:spPr>
         <p:txBody>
           <a:bodyPr/>
           <a:lstStyle/>
           <a:p>
-            <a:pPr eaLnBrk="1" hangingPunct="1"/>
+            <a:pPr eaLnBrk="1" hangingPunct="1">
+              <a:lnSpc>
+                <a:spcPct val="90000"/>
+              </a:lnSpc>
+              <a:buFont typeface="Wingdings" panose="05000000000000000000" pitchFamily="2" charset="2"/>
+              <a:buNone/>
+            </a:pPr>
+            <a:r>
+              <a:rPr lang="en-US" altLang="en-US" b="1" dirty="0">
+                <a:latin typeface="Courier New" panose="02070309020205020404" pitchFamily="49" charset="0"/>
+                <a:cs typeface="Courier New" panose="02070309020205020404" pitchFamily="49" charset="0"/>
+              </a:rPr>
+              <a:t>try{</a:t>
+            </a:r>
+          </a:p>
+          <a:p>
+            <a:pPr eaLnBrk="1" hangingPunct="1">
+              <a:lnSpc>
+                <a:spcPct val="90000"/>
+              </a:lnSpc>
+              <a:buFont typeface="Wingdings" panose="05000000000000000000" pitchFamily="2" charset="2"/>
+              <a:buNone/>
+            </a:pPr>
+            <a:r>
+              <a:rPr lang="en-US" altLang="en-US" b="1" dirty="0">
+                <a:latin typeface="Courier New" panose="02070309020205020404" pitchFamily="49" charset="0"/>
+                <a:cs typeface="Courier New" panose="02070309020205020404" pitchFamily="49" charset="0"/>
+              </a:rPr>
+              <a:t> ...</a:t>
+            </a:r>
+          </a:p>
+          <a:p>
+            <a:pPr eaLnBrk="1" hangingPunct="1">
+              <a:lnSpc>
+                <a:spcPct val="90000"/>
+              </a:lnSpc>
+              <a:buFont typeface="Wingdings" panose="05000000000000000000" pitchFamily="2" charset="2"/>
+              <a:buNone/>
+            </a:pPr>
+            <a:r>
+              <a:rPr lang="en-US" altLang="en-US" b="1" dirty="0">
+                <a:latin typeface="Courier New" panose="02070309020205020404" pitchFamily="49" charset="0"/>
+                <a:cs typeface="Courier New" panose="02070309020205020404" pitchFamily="49" charset="0"/>
+              </a:rPr>
+              <a:t>}catch(Exception e)</a:t>
+            </a:r>
+            <a:r>
+              <a:rPr lang="en-US" altLang="en-US" b="1" dirty="0">
+                <a:solidFill>
+                  <a:srgbClr val="C00000"/>
+                </a:solidFill>
+                <a:latin typeface="Courier New" panose="02070309020205020404" pitchFamily="49" charset="0"/>
+                <a:cs typeface="Courier New" panose="02070309020205020404" pitchFamily="49" charset="0"/>
+              </a:rPr>
+              <a:t>{</a:t>
+            </a:r>
+          </a:p>
+          <a:p>
+            <a:pPr eaLnBrk="1" hangingPunct="1">
+              <a:lnSpc>
+                <a:spcPct val="90000"/>
+              </a:lnSpc>
+              <a:buFont typeface="Wingdings" panose="05000000000000000000" pitchFamily="2" charset="2"/>
+              <a:buNone/>
+            </a:pPr>
+            <a:r>
+              <a:rPr lang="en-US" altLang="en-US" b="1" dirty="0">
+                <a:solidFill>
+                  <a:srgbClr val="C00000"/>
+                </a:solidFill>
+                <a:latin typeface="Courier New" panose="02070309020205020404" pitchFamily="49" charset="0"/>
+                <a:cs typeface="Courier New" panose="02070309020205020404" pitchFamily="49" charset="0"/>
+              </a:rPr>
+              <a:t>  </a:t>
+            </a:r>
+            <a:r>
+              <a:rPr lang="en-US" altLang="en-US" b="1" dirty="0" err="1">
+                <a:solidFill>
+                  <a:srgbClr val="C00000"/>
+                </a:solidFill>
+                <a:latin typeface="Courier New" panose="02070309020205020404" pitchFamily="49" charset="0"/>
+                <a:cs typeface="Courier New" panose="02070309020205020404" pitchFamily="49" charset="0"/>
+              </a:rPr>
+              <a:t>err.println</a:t>
+            </a:r>
+            <a:r>
+              <a:rPr lang="en-US" altLang="en-US" b="1" dirty="0">
+                <a:solidFill>
+                  <a:srgbClr val="C00000"/>
+                </a:solidFill>
+                <a:latin typeface="Courier New" panose="02070309020205020404" pitchFamily="49" charset="0"/>
+                <a:cs typeface="Courier New" panose="02070309020205020404" pitchFamily="49" charset="0"/>
+              </a:rPr>
+              <a:t>("Error: " +</a:t>
+            </a:r>
+          </a:p>
+          <a:p>
+            <a:pPr eaLnBrk="1" hangingPunct="1">
+              <a:lnSpc>
+                <a:spcPct val="90000"/>
+              </a:lnSpc>
+              <a:buFont typeface="Wingdings" panose="05000000000000000000" pitchFamily="2" charset="2"/>
+              <a:buNone/>
+            </a:pPr>
+            <a:r>
+              <a:rPr lang="en-US" altLang="en-US" b="1" dirty="0">
+                <a:solidFill>
+                  <a:srgbClr val="C00000"/>
+                </a:solidFill>
+                <a:latin typeface="Courier New" panose="02070309020205020404" pitchFamily="49" charset="0"/>
+                <a:cs typeface="Courier New" panose="02070309020205020404" pitchFamily="49" charset="0"/>
+              </a:rPr>
+              <a:t>                  </a:t>
+            </a:r>
+            <a:r>
+              <a:rPr lang="en-US" altLang="en-US" b="1" dirty="0" err="1">
+                <a:solidFill>
+                  <a:srgbClr val="C00000"/>
+                </a:solidFill>
+                <a:latin typeface="Courier New" panose="02070309020205020404" pitchFamily="49" charset="0"/>
+                <a:cs typeface="Courier New" panose="02070309020205020404" pitchFamily="49" charset="0"/>
+              </a:rPr>
+              <a:t>e.getMessage</a:t>
+            </a:r>
+            <a:r>
+              <a:rPr lang="en-US" altLang="en-US" b="1" dirty="0">
+                <a:solidFill>
+                  <a:srgbClr val="C00000"/>
+                </a:solidFill>
+                <a:latin typeface="Courier New" panose="02070309020205020404" pitchFamily="49" charset="0"/>
+                <a:cs typeface="Courier New" panose="02070309020205020404" pitchFamily="49" charset="0"/>
+              </a:rPr>
+              <a:t>()); </a:t>
+            </a:r>
+          </a:p>
+          <a:p>
+            <a:pPr eaLnBrk="1" hangingPunct="1">
+              <a:lnSpc>
+                <a:spcPct val="90000"/>
+              </a:lnSpc>
+              <a:buFont typeface="Wingdings" panose="05000000000000000000" pitchFamily="2" charset="2"/>
+              <a:buNone/>
+            </a:pPr>
+            <a:r>
+              <a:rPr lang="en-US" altLang="en-US" b="1" dirty="0">
+                <a:latin typeface="Courier New" panose="02070309020205020404" pitchFamily="49" charset="0"/>
+                <a:cs typeface="Courier New" panose="02070309020205020404" pitchFamily="49" charset="0"/>
+              </a:rPr>
+              <a:t> </a:t>
+            </a:r>
+            <a:r>
+              <a:rPr lang="en-US" altLang="en-US" b="1" dirty="0">
+                <a:solidFill>
+                  <a:srgbClr val="C00000"/>
+                </a:solidFill>
+                <a:latin typeface="Courier New" panose="02070309020205020404" pitchFamily="49" charset="0"/>
+                <a:cs typeface="Courier New" panose="02070309020205020404" pitchFamily="49" charset="0"/>
+              </a:rPr>
+              <a:t>}</a:t>
+            </a:r>
+            <a:r>
+              <a:rPr lang="en-US" altLang="en-US" b="1" dirty="0">
+                <a:latin typeface="Courier New" panose="02070309020205020404" pitchFamily="49" charset="0"/>
+                <a:cs typeface="Courier New" panose="02070309020205020404" pitchFamily="49" charset="0"/>
+              </a:rPr>
+              <a:t> </a:t>
+            </a:r>
+          </a:p>
+          <a:p>
+            <a:pPr eaLnBrk="1" hangingPunct="1">
+              <a:lnSpc>
+                <a:spcPct val="90000"/>
+              </a:lnSpc>
+              <a:buFont typeface="Wingdings" panose="05000000000000000000" pitchFamily="2" charset="2"/>
+              <a:buNone/>
+            </a:pPr>
+            <a:endParaRPr lang="en-US" altLang="en-US" sz="1400" dirty="0">
+              <a:solidFill>
+                <a:srgbClr val="006666"/>
+              </a:solidFill>
+              <a:latin typeface="Courier New" panose="02070309020205020404" pitchFamily="49" charset="0"/>
+              <a:cs typeface="Courier New" panose="02070309020205020404" pitchFamily="49" charset="0"/>
+            </a:endParaRPr>
+          </a:p>
+          <a:p>
+            <a:pPr marL="0" indent="0" algn="ctr" eaLnBrk="1" hangingPunct="1">
+              <a:lnSpc>
+                <a:spcPct val="90000"/>
+              </a:lnSpc>
+              <a:buFont typeface="Wingdings" panose="05000000000000000000" pitchFamily="2" charset="2"/>
+              <a:buNone/>
+            </a:pPr>
             <a:r>
               <a:rPr lang="en-US" altLang="en-US" dirty="0">
+                <a:solidFill>
+                  <a:srgbClr val="006666"/>
+                </a:solidFill>
                 <a:latin typeface="Bahnschrift" panose="020B0502040204020203" pitchFamily="34" charset="0"/>
-              </a:rPr>
-              <a:t>If its empty, its highly suspect</a:t>
-            </a:r>
-          </a:p>
-          <a:p>
-            <a:pPr lvl="1" eaLnBrk="1" hangingPunct="1">
-              <a:spcAft>
-                <a:spcPts val="1200"/>
-              </a:spcAft>
-            </a:pPr>
-            <a:r>
-              <a:rPr lang="en-US" altLang="en-US" dirty="0">
-                <a:latin typeface="Bahnschrift" panose="020B0502040204020203" pitchFamily="34" charset="0"/>
-              </a:rPr>
-              <a:t>The purpose of exception is to force programmers handle exceptional conditions</a:t>
-            </a:r>
-          </a:p>
-          <a:p>
-            <a:pPr eaLnBrk="1" hangingPunct="1"/>
-            <a:r>
-              <a:rPr lang="en-US" altLang="en-US" dirty="0">
-                <a:latin typeface="Bahnschrift" panose="020B0502040204020203" pitchFamily="34" charset="0"/>
-              </a:rPr>
-              <a:t>At least have a comment which explains why its ok to ignore this exception</a:t>
+                <a:cs typeface="Courier New" panose="02070309020205020404" pitchFamily="49" charset="0"/>
+              </a:rPr>
+              <a:t>There is an indication that an exception occurred, but there’s no stack trace, and processing continues.</a:t>
             </a:r>
           </a:p>
         </p:txBody>
       </p:sp>
     </p:spTree>
+    <p:extLst>
+      <p:ext uri="{BB962C8B-B14F-4D97-AF65-F5344CB8AC3E}">
+        <p14:creationId xmlns:p14="http://schemas.microsoft.com/office/powerpoint/2010/main" val="1779749363"/>
+      </p:ext>
+    </p:extLst>
   </p:cSld>
   <p:clrMapOvr>
     <a:masterClrMapping/>
@@ -36834,7 +37027,724 @@
 </p:sld>
 </file>
 
-<file path=ppt/slides/slide44.xml><?xml version="1.0" encoding="utf-8"?>
+<file path=ppt/slides/slide45.xml><?xml version="1.0" encoding="utf-8"?>
+<p:sld xmlns:a="http://schemas.openxmlformats.org/drawingml/2006/main" xmlns:r="http://schemas.openxmlformats.org/officeDocument/2006/relationships" xmlns:p="http://schemas.openxmlformats.org/presentationml/2006/main">
+  <p:cSld>
+    <p:bg>
+      <p:bgPr>
+        <a:solidFill>
+          <a:schemeClr val="accent1">
+            <a:lumMod val="20000"/>
+            <a:lumOff val="80000"/>
+          </a:schemeClr>
+        </a:solidFill>
+        <a:effectLst/>
+      </p:bgPr>
+    </p:bg>
+    <p:spTree>
+      <p:nvGrpSpPr>
+        <p:cNvPr id="1" name=""/>
+        <p:cNvGrpSpPr/>
+        <p:nvPr/>
+      </p:nvGrpSpPr>
+      <p:grpSpPr>
+        <a:xfrm>
+          <a:off x="0" y="0"/>
+          <a:ext cx="0" cy="0"/>
+          <a:chOff x="0" y="0"/>
+          <a:chExt cx="0" cy="0"/>
+        </a:xfrm>
+      </p:grpSpPr>
+      <p:sp>
+        <p:nvSpPr>
+          <p:cNvPr id="23554" name="Rectangle 4">
+            <a:extLst>
+              <a:ext uri="{FF2B5EF4-FFF2-40B4-BE49-F238E27FC236}">
+                <a16:creationId xmlns:a16="http://schemas.microsoft.com/office/drawing/2014/main" id="{AD77BF86-6636-B96D-922E-5C70B36D5F07}"/>
+              </a:ext>
+            </a:extLst>
+          </p:cNvPr>
+          <p:cNvSpPr>
+            <a:spLocks noGrp="1" noChangeArrowheads="1"/>
+          </p:cNvSpPr>
+          <p:nvPr>
+            <p:ph type="title"/>
+          </p:nvPr>
+        </p:nvSpPr>
+        <p:spPr>
+          <a:xfrm>
+            <a:off x="2486891" y="277091"/>
+            <a:ext cx="6629400" cy="1143000"/>
+          </a:xfrm>
+          <a:noFill/>
+        </p:spPr>
+        <p:txBody>
+          <a:bodyPr/>
+          <a:lstStyle/>
+          <a:p>
+            <a:pPr eaLnBrk="1" hangingPunct="1"/>
+            <a:r>
+              <a:rPr lang="en-US" altLang="en-US" dirty="0">
+                <a:latin typeface="Bahnschrift" panose="020B0502040204020203" pitchFamily="34" charset="0"/>
+              </a:rPr>
+              <a:t>The Wrong Way to Replace Exceptions</a:t>
+            </a:r>
+          </a:p>
+        </p:txBody>
+      </p:sp>
+      <p:sp>
+        <p:nvSpPr>
+          <p:cNvPr id="23555" name="Rectangle 5">
+            <a:extLst>
+              <a:ext uri="{FF2B5EF4-FFF2-40B4-BE49-F238E27FC236}">
+                <a16:creationId xmlns:a16="http://schemas.microsoft.com/office/drawing/2014/main" id="{507924F2-6D87-FF24-5A25-B7B45FFFD1FD}"/>
+              </a:ext>
+            </a:extLst>
+          </p:cNvPr>
+          <p:cNvSpPr>
+            <a:spLocks noGrp="1" noChangeArrowheads="1"/>
+          </p:cNvSpPr>
+          <p:nvPr>
+            <p:ph idx="1"/>
+          </p:nvPr>
+        </p:nvSpPr>
+        <p:spPr>
+          <a:xfrm>
+            <a:off x="457200" y="1447800"/>
+            <a:ext cx="8686800" cy="5257800"/>
+          </a:xfrm>
+          <a:noFill/>
+        </p:spPr>
+        <p:txBody>
+          <a:bodyPr/>
+          <a:lstStyle/>
+          <a:p>
+            <a:pPr eaLnBrk="1" hangingPunct="1">
+              <a:lnSpc>
+                <a:spcPct val="90000"/>
+              </a:lnSpc>
+              <a:buFont typeface="Wingdings" panose="05000000000000000000" pitchFamily="2" charset="2"/>
+              <a:buNone/>
+            </a:pPr>
+            <a:r>
+              <a:rPr lang="en-US" altLang="en-US" b="1" dirty="0">
+                <a:latin typeface="Courier New" panose="02070309020205020404" pitchFamily="49" charset="0"/>
+                <a:cs typeface="Courier New" panose="02070309020205020404" pitchFamily="49" charset="0"/>
+              </a:rPr>
+              <a:t>try{</a:t>
+            </a:r>
+          </a:p>
+          <a:p>
+            <a:pPr eaLnBrk="1" hangingPunct="1">
+              <a:lnSpc>
+                <a:spcPct val="90000"/>
+              </a:lnSpc>
+              <a:buFont typeface="Wingdings" panose="05000000000000000000" pitchFamily="2" charset="2"/>
+              <a:buNone/>
+            </a:pPr>
+            <a:r>
+              <a:rPr lang="en-US" altLang="en-US" b="1" dirty="0">
+                <a:latin typeface="Courier New" panose="02070309020205020404" pitchFamily="49" charset="0"/>
+                <a:cs typeface="Courier New" panose="02070309020205020404" pitchFamily="49" charset="0"/>
+              </a:rPr>
+              <a:t> ...</a:t>
+            </a:r>
+          </a:p>
+          <a:p>
+            <a:pPr eaLnBrk="1" hangingPunct="1">
+              <a:lnSpc>
+                <a:spcPct val="90000"/>
+              </a:lnSpc>
+              <a:buFont typeface="Wingdings" panose="05000000000000000000" pitchFamily="2" charset="2"/>
+              <a:buNone/>
+            </a:pPr>
+            <a:r>
+              <a:rPr lang="en-US" altLang="en-US" b="1" dirty="0">
+                <a:latin typeface="Courier New" panose="02070309020205020404" pitchFamily="49" charset="0"/>
+                <a:cs typeface="Courier New" panose="02070309020205020404" pitchFamily="49" charset="0"/>
+              </a:rPr>
+              <a:t>}catch(Exception e)</a:t>
+            </a:r>
+            <a:r>
+              <a:rPr lang="en-US" altLang="en-US" b="1" dirty="0">
+                <a:solidFill>
+                  <a:srgbClr val="C00000"/>
+                </a:solidFill>
+                <a:latin typeface="Courier New" panose="02070309020205020404" pitchFamily="49" charset="0"/>
+                <a:cs typeface="Courier New" panose="02070309020205020404" pitchFamily="49" charset="0"/>
+              </a:rPr>
+              <a:t>{</a:t>
+            </a:r>
+          </a:p>
+          <a:p>
+            <a:pPr eaLnBrk="1" hangingPunct="1">
+              <a:lnSpc>
+                <a:spcPct val="90000"/>
+              </a:lnSpc>
+              <a:buFont typeface="Wingdings" panose="05000000000000000000" pitchFamily="2" charset="2"/>
+              <a:buNone/>
+            </a:pPr>
+            <a:r>
+              <a:rPr lang="en-US" altLang="en-US" b="1" dirty="0">
+                <a:solidFill>
+                  <a:srgbClr val="C00000"/>
+                </a:solidFill>
+                <a:latin typeface="Courier New" panose="02070309020205020404" pitchFamily="49" charset="0"/>
+                <a:cs typeface="Courier New" panose="02070309020205020404" pitchFamily="49" charset="0"/>
+              </a:rPr>
+              <a:t>  throw new </a:t>
+            </a:r>
+            <a:r>
+              <a:rPr lang="en-US" altLang="en-US" b="1" dirty="0" err="1">
+                <a:solidFill>
+                  <a:srgbClr val="C00000"/>
+                </a:solidFill>
+                <a:latin typeface="Courier New" panose="02070309020205020404" pitchFamily="49" charset="0"/>
+                <a:cs typeface="Courier New" panose="02070309020205020404" pitchFamily="49" charset="0"/>
+              </a:rPr>
+              <a:t>MyException</a:t>
+            </a:r>
+            <a:r>
+              <a:rPr lang="en-US" altLang="en-US" b="1" dirty="0">
+                <a:solidFill>
+                  <a:srgbClr val="C00000"/>
+                </a:solidFill>
+                <a:latin typeface="Courier New" panose="02070309020205020404" pitchFamily="49" charset="0"/>
+                <a:cs typeface="Courier New" panose="02070309020205020404" pitchFamily="49" charset="0"/>
+              </a:rPr>
+              <a:t>("Error: " </a:t>
+            </a:r>
+          </a:p>
+          <a:p>
+            <a:pPr eaLnBrk="1" hangingPunct="1">
+              <a:lnSpc>
+                <a:spcPct val="90000"/>
+              </a:lnSpc>
+              <a:buFont typeface="Wingdings" panose="05000000000000000000" pitchFamily="2" charset="2"/>
+              <a:buNone/>
+            </a:pPr>
+            <a:r>
+              <a:rPr lang="en-US" altLang="en-US" b="1" dirty="0">
+                <a:solidFill>
+                  <a:srgbClr val="C00000"/>
+                </a:solidFill>
+                <a:latin typeface="Courier New" panose="02070309020205020404" pitchFamily="49" charset="0"/>
+                <a:cs typeface="Courier New" panose="02070309020205020404" pitchFamily="49" charset="0"/>
+              </a:rPr>
+              <a:t>                + </a:t>
+            </a:r>
+            <a:r>
+              <a:rPr lang="en-US" altLang="en-US" b="1" dirty="0" err="1">
+                <a:solidFill>
+                  <a:srgbClr val="C00000"/>
+                </a:solidFill>
+                <a:latin typeface="Courier New" panose="02070309020205020404" pitchFamily="49" charset="0"/>
+                <a:cs typeface="Courier New" panose="02070309020205020404" pitchFamily="49" charset="0"/>
+              </a:rPr>
+              <a:t>e.getMessage</a:t>
+            </a:r>
+            <a:r>
+              <a:rPr lang="en-US" altLang="en-US" b="1" dirty="0">
+                <a:solidFill>
+                  <a:srgbClr val="C00000"/>
+                </a:solidFill>
+                <a:latin typeface="Courier New" panose="02070309020205020404" pitchFamily="49" charset="0"/>
+                <a:cs typeface="Courier New" panose="02070309020205020404" pitchFamily="49" charset="0"/>
+              </a:rPr>
+              <a:t>()); </a:t>
+            </a:r>
+          </a:p>
+          <a:p>
+            <a:pPr eaLnBrk="1" hangingPunct="1">
+              <a:lnSpc>
+                <a:spcPct val="90000"/>
+              </a:lnSpc>
+              <a:buFont typeface="Wingdings" panose="05000000000000000000" pitchFamily="2" charset="2"/>
+              <a:buNone/>
+            </a:pPr>
+            <a:r>
+              <a:rPr lang="en-US" altLang="en-US" b="1" dirty="0">
+                <a:latin typeface="Courier New" panose="02070309020205020404" pitchFamily="49" charset="0"/>
+                <a:cs typeface="Courier New" panose="02070309020205020404" pitchFamily="49" charset="0"/>
+              </a:rPr>
+              <a:t> </a:t>
+            </a:r>
+            <a:r>
+              <a:rPr lang="en-US" altLang="en-US" b="1" dirty="0">
+                <a:solidFill>
+                  <a:srgbClr val="C00000"/>
+                </a:solidFill>
+                <a:latin typeface="Courier New" panose="02070309020205020404" pitchFamily="49" charset="0"/>
+                <a:cs typeface="Courier New" panose="02070309020205020404" pitchFamily="49" charset="0"/>
+              </a:rPr>
+              <a:t>}</a:t>
+            </a:r>
+            <a:r>
+              <a:rPr lang="en-US" altLang="en-US" b="1" dirty="0">
+                <a:latin typeface="Courier New" panose="02070309020205020404" pitchFamily="49" charset="0"/>
+                <a:cs typeface="Courier New" panose="02070309020205020404" pitchFamily="49" charset="0"/>
+              </a:rPr>
+              <a:t> </a:t>
+            </a:r>
+          </a:p>
+          <a:p>
+            <a:pPr eaLnBrk="1" hangingPunct="1">
+              <a:lnSpc>
+                <a:spcPct val="90000"/>
+              </a:lnSpc>
+              <a:buFont typeface="Wingdings" panose="05000000000000000000" pitchFamily="2" charset="2"/>
+              <a:buNone/>
+            </a:pPr>
+            <a:endParaRPr lang="en-US" altLang="en-US" sz="1400" dirty="0">
+              <a:solidFill>
+                <a:srgbClr val="006666"/>
+              </a:solidFill>
+              <a:latin typeface="Courier New" panose="02070309020205020404" pitchFamily="49" charset="0"/>
+              <a:cs typeface="Courier New" panose="02070309020205020404" pitchFamily="49" charset="0"/>
+            </a:endParaRPr>
+          </a:p>
+          <a:p>
+            <a:pPr marL="0" indent="0" algn="ctr" eaLnBrk="1" hangingPunct="1">
+              <a:lnSpc>
+                <a:spcPct val="90000"/>
+              </a:lnSpc>
+              <a:buFont typeface="Wingdings" panose="05000000000000000000" pitchFamily="2" charset="2"/>
+              <a:buNone/>
+            </a:pPr>
+            <a:r>
+              <a:rPr lang="en-US" altLang="en-US" dirty="0">
+                <a:solidFill>
+                  <a:srgbClr val="006666"/>
+                </a:solidFill>
+                <a:latin typeface="Bahnschrift" panose="020B0502040204020203" pitchFamily="34" charset="0"/>
+                <a:cs typeface="Courier New" panose="02070309020205020404" pitchFamily="49" charset="0"/>
+              </a:rPr>
+              <a:t>The stack trace of the original exception is lost. And the original message might be a blank string or otherwise not helpful.</a:t>
+            </a:r>
+          </a:p>
+        </p:txBody>
+      </p:sp>
+    </p:spTree>
+    <p:extLst>
+      <p:ext uri="{BB962C8B-B14F-4D97-AF65-F5344CB8AC3E}">
+        <p14:creationId xmlns:p14="http://schemas.microsoft.com/office/powerpoint/2010/main" val="400062511"/>
+      </p:ext>
+    </p:extLst>
+  </p:cSld>
+  <p:clrMapOvr>
+    <a:masterClrMapping/>
+  </p:clrMapOvr>
+</p:sld>
+</file>
+
+<file path=ppt/slides/slide46.xml><?xml version="1.0" encoding="utf-8"?>
+<p:sld xmlns:a="http://schemas.openxmlformats.org/drawingml/2006/main" xmlns:r="http://schemas.openxmlformats.org/officeDocument/2006/relationships" xmlns:p="http://schemas.openxmlformats.org/presentationml/2006/main">
+  <p:cSld>
+    <p:bg>
+      <p:bgPr>
+        <a:solidFill>
+          <a:schemeClr val="accent1">
+            <a:lumMod val="20000"/>
+            <a:lumOff val="80000"/>
+          </a:schemeClr>
+        </a:solidFill>
+        <a:effectLst/>
+      </p:bgPr>
+    </p:bg>
+    <p:spTree>
+      <p:nvGrpSpPr>
+        <p:cNvPr id="1" name=""/>
+        <p:cNvGrpSpPr/>
+        <p:nvPr/>
+      </p:nvGrpSpPr>
+      <p:grpSpPr>
+        <a:xfrm>
+          <a:off x="0" y="0"/>
+          <a:ext cx="0" cy="0"/>
+          <a:chOff x="0" y="0"/>
+          <a:chExt cx="0" cy="0"/>
+        </a:xfrm>
+      </p:grpSpPr>
+      <p:sp>
+        <p:nvSpPr>
+          <p:cNvPr id="23554" name="Rectangle 4">
+            <a:extLst>
+              <a:ext uri="{FF2B5EF4-FFF2-40B4-BE49-F238E27FC236}">
+                <a16:creationId xmlns:a16="http://schemas.microsoft.com/office/drawing/2014/main" id="{AD77BF86-6636-B96D-922E-5C70B36D5F07}"/>
+              </a:ext>
+            </a:extLst>
+          </p:cNvPr>
+          <p:cNvSpPr>
+            <a:spLocks noGrp="1" noChangeArrowheads="1"/>
+          </p:cNvSpPr>
+          <p:nvPr>
+            <p:ph type="title"/>
+          </p:nvPr>
+        </p:nvSpPr>
+        <p:spPr>
+          <a:xfrm>
+            <a:off x="2486891" y="277091"/>
+            <a:ext cx="6629400" cy="1143000"/>
+          </a:xfrm>
+          <a:noFill/>
+        </p:spPr>
+        <p:txBody>
+          <a:bodyPr/>
+          <a:lstStyle/>
+          <a:p>
+            <a:pPr eaLnBrk="1" hangingPunct="1"/>
+            <a:r>
+              <a:rPr lang="en-US" altLang="en-US" dirty="0">
+                <a:latin typeface="Bahnschrift" panose="020B0502040204020203" pitchFamily="34" charset="0"/>
+              </a:rPr>
+              <a:t>The Right Way to Replace Exceptions</a:t>
+            </a:r>
+          </a:p>
+        </p:txBody>
+      </p:sp>
+      <p:sp>
+        <p:nvSpPr>
+          <p:cNvPr id="23555" name="Rectangle 5">
+            <a:extLst>
+              <a:ext uri="{FF2B5EF4-FFF2-40B4-BE49-F238E27FC236}">
+                <a16:creationId xmlns:a16="http://schemas.microsoft.com/office/drawing/2014/main" id="{507924F2-6D87-FF24-5A25-B7B45FFFD1FD}"/>
+              </a:ext>
+            </a:extLst>
+          </p:cNvPr>
+          <p:cNvSpPr>
+            <a:spLocks noGrp="1" noChangeArrowheads="1"/>
+          </p:cNvSpPr>
+          <p:nvPr>
+            <p:ph idx="1"/>
+          </p:nvPr>
+        </p:nvSpPr>
+        <p:spPr>
+          <a:xfrm>
+            <a:off x="457200" y="1447800"/>
+            <a:ext cx="8686800" cy="5257800"/>
+          </a:xfrm>
+          <a:noFill/>
+        </p:spPr>
+        <p:txBody>
+          <a:bodyPr/>
+          <a:lstStyle/>
+          <a:p>
+            <a:pPr eaLnBrk="1" hangingPunct="1">
+              <a:lnSpc>
+                <a:spcPct val="90000"/>
+              </a:lnSpc>
+              <a:buFont typeface="Wingdings" panose="05000000000000000000" pitchFamily="2" charset="2"/>
+              <a:buNone/>
+            </a:pPr>
+            <a:r>
+              <a:rPr lang="en-US" altLang="en-US" b="1" dirty="0">
+                <a:latin typeface="Courier New" panose="02070309020205020404" pitchFamily="49" charset="0"/>
+                <a:cs typeface="Courier New" panose="02070309020205020404" pitchFamily="49" charset="0"/>
+              </a:rPr>
+              <a:t>try{</a:t>
+            </a:r>
+          </a:p>
+          <a:p>
+            <a:pPr eaLnBrk="1" hangingPunct="1">
+              <a:lnSpc>
+                <a:spcPct val="90000"/>
+              </a:lnSpc>
+              <a:buFont typeface="Wingdings" panose="05000000000000000000" pitchFamily="2" charset="2"/>
+              <a:buNone/>
+            </a:pPr>
+            <a:r>
+              <a:rPr lang="en-US" altLang="en-US" b="1" dirty="0">
+                <a:latin typeface="Courier New" panose="02070309020205020404" pitchFamily="49" charset="0"/>
+                <a:cs typeface="Courier New" panose="02070309020205020404" pitchFamily="49" charset="0"/>
+              </a:rPr>
+              <a:t> ...</a:t>
+            </a:r>
+          </a:p>
+          <a:p>
+            <a:pPr eaLnBrk="1" hangingPunct="1">
+              <a:lnSpc>
+                <a:spcPct val="90000"/>
+              </a:lnSpc>
+              <a:buFont typeface="Wingdings" panose="05000000000000000000" pitchFamily="2" charset="2"/>
+              <a:buNone/>
+            </a:pPr>
+            <a:r>
+              <a:rPr lang="en-US" altLang="en-US" b="1" dirty="0">
+                <a:latin typeface="Courier New" panose="02070309020205020404" pitchFamily="49" charset="0"/>
+                <a:cs typeface="Courier New" panose="02070309020205020404" pitchFamily="49" charset="0"/>
+              </a:rPr>
+              <a:t>}catch(Exception e</a:t>
+            </a:r>
+            <a:r>
+              <a:rPr lang="en-US" altLang="en-US" b="1" dirty="0">
+                <a:solidFill>
+                  <a:srgbClr val="006600"/>
+                </a:solidFill>
+                <a:latin typeface="Courier New" panose="02070309020205020404" pitchFamily="49" charset="0"/>
+                <a:cs typeface="Courier New" panose="02070309020205020404" pitchFamily="49" charset="0"/>
+              </a:rPr>
+              <a:t>){</a:t>
+            </a:r>
+          </a:p>
+          <a:p>
+            <a:pPr eaLnBrk="1" hangingPunct="1">
+              <a:lnSpc>
+                <a:spcPct val="90000"/>
+              </a:lnSpc>
+              <a:buFont typeface="Wingdings" panose="05000000000000000000" pitchFamily="2" charset="2"/>
+              <a:buNone/>
+            </a:pPr>
+            <a:r>
+              <a:rPr lang="en-US" altLang="en-US" b="1" dirty="0">
+                <a:solidFill>
+                  <a:srgbClr val="006600"/>
+                </a:solidFill>
+                <a:latin typeface="Courier New" panose="02070309020205020404" pitchFamily="49" charset="0"/>
+                <a:cs typeface="Courier New" panose="02070309020205020404" pitchFamily="49" charset="0"/>
+              </a:rPr>
+              <a:t>  throw new </a:t>
+            </a:r>
+            <a:r>
+              <a:rPr lang="en-US" altLang="en-US" b="1" dirty="0" err="1">
+                <a:solidFill>
+                  <a:srgbClr val="006600"/>
+                </a:solidFill>
+                <a:latin typeface="Courier New" panose="02070309020205020404" pitchFamily="49" charset="0"/>
+                <a:cs typeface="Courier New" panose="02070309020205020404" pitchFamily="49" charset="0"/>
+              </a:rPr>
+              <a:t>MyException</a:t>
+            </a:r>
+            <a:r>
+              <a:rPr lang="en-US" altLang="en-US" b="1" dirty="0">
+                <a:solidFill>
+                  <a:srgbClr val="006600"/>
+                </a:solidFill>
+                <a:latin typeface="Courier New" panose="02070309020205020404" pitchFamily="49" charset="0"/>
+                <a:cs typeface="Courier New" panose="02070309020205020404" pitchFamily="49" charset="0"/>
+              </a:rPr>
+              <a:t>("new error</a:t>
+            </a:r>
+          </a:p>
+          <a:p>
+            <a:pPr eaLnBrk="1" hangingPunct="1">
+              <a:lnSpc>
+                <a:spcPct val="90000"/>
+              </a:lnSpc>
+              <a:buFont typeface="Wingdings" panose="05000000000000000000" pitchFamily="2" charset="2"/>
+              <a:buNone/>
+            </a:pPr>
+            <a:r>
+              <a:rPr lang="en-US" altLang="en-US" b="1" dirty="0">
+                <a:solidFill>
+                  <a:srgbClr val="006600"/>
+                </a:solidFill>
+                <a:latin typeface="Courier New" panose="02070309020205020404" pitchFamily="49" charset="0"/>
+                <a:cs typeface="Courier New" panose="02070309020205020404" pitchFamily="49" charset="0"/>
+              </a:rPr>
+              <a:t>  </a:t>
+            </a:r>
+            <a:r>
+              <a:rPr lang="en-US" altLang="en-US" sz="1100" b="1" dirty="0">
+                <a:solidFill>
+                  <a:srgbClr val="006600"/>
+                </a:solidFill>
+                <a:latin typeface="Courier New" panose="02070309020205020404" pitchFamily="49" charset="0"/>
+                <a:cs typeface="Courier New" panose="02070309020205020404" pitchFamily="49" charset="0"/>
+              </a:rPr>
+              <a:t> </a:t>
+            </a:r>
+            <a:r>
+              <a:rPr lang="en-US" altLang="en-US" sz="3200" b="1" dirty="0">
+                <a:solidFill>
+                  <a:srgbClr val="006600"/>
+                </a:solidFill>
+                <a:latin typeface="Courier New" panose="02070309020205020404" pitchFamily="49" charset="0"/>
+                <a:cs typeface="Courier New" panose="02070309020205020404" pitchFamily="49" charset="0"/>
+              </a:rPr>
+              <a:t> </a:t>
+            </a:r>
+            <a:r>
+              <a:rPr lang="en-US" altLang="en-US" b="1" dirty="0">
+                <a:solidFill>
+                  <a:srgbClr val="006600"/>
+                </a:solidFill>
+                <a:latin typeface="Courier New" panose="02070309020205020404" pitchFamily="49" charset="0"/>
+                <a:cs typeface="Courier New" panose="02070309020205020404" pitchFamily="49" charset="0"/>
+              </a:rPr>
+              <a:t> message“ + </a:t>
+            </a:r>
+            <a:r>
+              <a:rPr lang="en-US" altLang="en-US" b="1" dirty="0" err="1">
+                <a:solidFill>
+                  <a:srgbClr val="006600"/>
+                </a:solidFill>
+                <a:latin typeface="Courier New" panose="02070309020205020404" pitchFamily="49" charset="0"/>
+                <a:cs typeface="Courier New" panose="02070309020205020404" pitchFamily="49" charset="0"/>
+              </a:rPr>
+              <a:t>e.getMessage</a:t>
+            </a:r>
+            <a:r>
+              <a:rPr lang="en-US" altLang="en-US" b="1" dirty="0">
+                <a:solidFill>
+                  <a:srgbClr val="006600"/>
+                </a:solidFill>
+                <a:latin typeface="Courier New" panose="02070309020205020404" pitchFamily="49" charset="0"/>
+                <a:cs typeface="Courier New" panose="02070309020205020404" pitchFamily="49" charset="0"/>
+              </a:rPr>
+              <a:t>()</a:t>
+            </a:r>
+            <a:r>
+              <a:rPr lang="en-US" altLang="en-US" b="1" dirty="0">
+                <a:solidFill>
+                  <a:srgbClr val="006600"/>
+                </a:solidFill>
+                <a:highlight>
+                  <a:srgbClr val="FFFF00"/>
+                </a:highlight>
+                <a:latin typeface="Courier New" panose="02070309020205020404" pitchFamily="49" charset="0"/>
+                <a:cs typeface="Courier New" panose="02070309020205020404" pitchFamily="49" charset="0"/>
+              </a:rPr>
+              <a:t>, e)</a:t>
+            </a:r>
+            <a:r>
+              <a:rPr lang="en-US" altLang="en-US" b="1" dirty="0">
+                <a:solidFill>
+                  <a:srgbClr val="006600"/>
+                </a:solidFill>
+                <a:latin typeface="Courier New" panose="02070309020205020404" pitchFamily="49" charset="0"/>
+                <a:cs typeface="Courier New" panose="02070309020205020404" pitchFamily="49" charset="0"/>
+              </a:rPr>
+              <a:t>; </a:t>
+            </a:r>
+          </a:p>
+          <a:p>
+            <a:pPr eaLnBrk="1" hangingPunct="1">
+              <a:lnSpc>
+                <a:spcPct val="90000"/>
+              </a:lnSpc>
+              <a:buFont typeface="Wingdings" panose="05000000000000000000" pitchFamily="2" charset="2"/>
+              <a:buNone/>
+            </a:pPr>
+            <a:r>
+              <a:rPr lang="en-US" altLang="en-US" b="1" dirty="0">
+                <a:solidFill>
+                  <a:srgbClr val="006600"/>
+                </a:solidFill>
+                <a:latin typeface="Courier New" panose="02070309020205020404" pitchFamily="49" charset="0"/>
+                <a:cs typeface="Courier New" panose="02070309020205020404" pitchFamily="49" charset="0"/>
+              </a:rPr>
+              <a:t> } </a:t>
+            </a:r>
+          </a:p>
+          <a:p>
+            <a:pPr eaLnBrk="1" hangingPunct="1">
+              <a:lnSpc>
+                <a:spcPct val="90000"/>
+              </a:lnSpc>
+              <a:buFont typeface="Wingdings" panose="05000000000000000000" pitchFamily="2" charset="2"/>
+              <a:buNone/>
+            </a:pPr>
+            <a:endParaRPr lang="en-US" altLang="en-US" sz="1400" dirty="0">
+              <a:solidFill>
+                <a:srgbClr val="006666"/>
+              </a:solidFill>
+              <a:latin typeface="Courier New" panose="02070309020205020404" pitchFamily="49" charset="0"/>
+              <a:cs typeface="Courier New" panose="02070309020205020404" pitchFamily="49" charset="0"/>
+            </a:endParaRPr>
+          </a:p>
+          <a:p>
+            <a:pPr marL="0" indent="0" algn="ctr" eaLnBrk="1" hangingPunct="1">
+              <a:lnSpc>
+                <a:spcPct val="90000"/>
+              </a:lnSpc>
+              <a:buFont typeface="Wingdings" panose="05000000000000000000" pitchFamily="2" charset="2"/>
+              <a:buNone/>
+            </a:pPr>
+            <a:r>
+              <a:rPr lang="en-US" altLang="en-US" dirty="0">
+                <a:solidFill>
+                  <a:srgbClr val="006666"/>
+                </a:solidFill>
+                <a:latin typeface="Bahnschrift" panose="020B0502040204020203" pitchFamily="34" charset="0"/>
+                <a:cs typeface="Courier New" panose="02070309020205020404" pitchFamily="49" charset="0"/>
+              </a:rPr>
+              <a:t>Pass the caught exception object as </a:t>
+            </a:r>
+            <a:br>
+              <a:rPr lang="en-US" altLang="en-US" dirty="0">
+                <a:solidFill>
+                  <a:srgbClr val="006666"/>
+                </a:solidFill>
+                <a:latin typeface="Bahnschrift" panose="020B0502040204020203" pitchFamily="34" charset="0"/>
+                <a:cs typeface="Courier New" panose="02070309020205020404" pitchFamily="49" charset="0"/>
+              </a:rPr>
+            </a:br>
+            <a:r>
+              <a:rPr lang="en-US" altLang="en-US" dirty="0">
+                <a:solidFill>
+                  <a:srgbClr val="006666"/>
+                </a:solidFill>
+                <a:latin typeface="Bahnschrift" panose="020B0502040204020203" pitchFamily="34" charset="0"/>
+                <a:cs typeface="Courier New" panose="02070309020205020404" pitchFamily="49" charset="0"/>
+              </a:rPr>
+              <a:t>the "</a:t>
+            </a:r>
+            <a:r>
+              <a:rPr lang="en-US" altLang="en-US" dirty="0" err="1">
+                <a:solidFill>
+                  <a:srgbClr val="006666"/>
+                </a:solidFill>
+                <a:latin typeface="Bahnschrift" panose="020B0502040204020203" pitchFamily="34" charset="0"/>
+                <a:cs typeface="Courier New" panose="02070309020205020404" pitchFamily="49" charset="0"/>
+              </a:rPr>
+              <a:t>rootCause</a:t>
+            </a:r>
+            <a:r>
+              <a:rPr lang="en-US" altLang="en-US" dirty="0">
+                <a:solidFill>
+                  <a:srgbClr val="006666"/>
+                </a:solidFill>
+                <a:latin typeface="Bahnschrift" panose="020B0502040204020203" pitchFamily="34" charset="0"/>
+                <a:cs typeface="Courier New" panose="02070309020205020404" pitchFamily="49" charset="0"/>
+              </a:rPr>
+              <a:t>" to the constructor </a:t>
+            </a:r>
+            <a:br>
+              <a:rPr lang="en-US" altLang="en-US" dirty="0">
+                <a:solidFill>
+                  <a:srgbClr val="006666"/>
+                </a:solidFill>
+                <a:latin typeface="Bahnschrift" panose="020B0502040204020203" pitchFamily="34" charset="0"/>
+                <a:cs typeface="Courier New" panose="02070309020205020404" pitchFamily="49" charset="0"/>
+              </a:rPr>
+            </a:br>
+            <a:r>
+              <a:rPr lang="en-US" altLang="en-US" dirty="0">
+                <a:solidFill>
+                  <a:srgbClr val="006666"/>
+                </a:solidFill>
+                <a:latin typeface="Bahnschrift" panose="020B0502040204020203" pitchFamily="34" charset="0"/>
+                <a:cs typeface="Courier New" panose="02070309020205020404" pitchFamily="49" charset="0"/>
+              </a:rPr>
+              <a:t>of the new exception</a:t>
+            </a:r>
+          </a:p>
+        </p:txBody>
+      </p:sp>
+    </p:spTree>
+    <p:extLst>
+      <p:ext uri="{BB962C8B-B14F-4D97-AF65-F5344CB8AC3E}">
+        <p14:creationId xmlns:p14="http://schemas.microsoft.com/office/powerpoint/2010/main" val="3372052799"/>
+      </p:ext>
+    </p:extLst>
+  </p:cSld>
+  <p:clrMapOvr>
+    <a:masterClrMapping/>
+  </p:clrMapOvr>
+</p:sld>
+</file>
+
+<file path=ppt/slides/slide47.xml><?xml version="1.0" encoding="utf-8"?>
 <p:sld xmlns:a="http://schemas.openxmlformats.org/drawingml/2006/main" xmlns:r="http://schemas.openxmlformats.org/officeDocument/2006/relationships" xmlns:p="http://schemas.openxmlformats.org/presentationml/2006/main">
   <p:cSld>
     <p:spTree>
@@ -36880,10 +37790,16 @@
           <a:p>
             <a:pPr eaLnBrk="1" hangingPunct="1"/>
             <a:r>
+              <a:rPr lang="en-US" altLang="en-US" sz="4000" b="1" dirty="0">
+                <a:latin typeface="Bahnschrift" panose="020B0502040204020203" pitchFamily="34" charset="0"/>
+              </a:rPr>
+              <a:t>Document</a:t>
+            </a:r>
+            <a:r>
               <a:rPr lang="en-US" altLang="en-US" sz="4000" dirty="0">
                 <a:latin typeface="Bahnschrift" panose="020B0502040204020203" pitchFamily="34" charset="0"/>
               </a:rPr>
-              <a:t>Document Exceptions</a:t>
+              <a:t> Exceptions</a:t>
             </a:r>
           </a:p>
         </p:txBody>
